--- a/pitch/Commission-Plan.pptx
+++ b/pitch/Commission-Plan.pptx
@@ -2797,7 +2797,7 @@
           </p:nvPr>
         </p:nvGraphicFramePr>
         <p:xfrm>
-          <a:off x="548640" y="1828800"/>
+          <a:off x="548640" y="1783080"/>
           <a:ext cx="11064240" cy="914400"/>
         </p:xfrm>
         <a:graphic>
@@ -2812,7 +2812,7 @@
                 <a:gridCol w="1463040"/>
                 <a:gridCol w="1737360"/>
               </a:tblGrid>
-              <a:tr h="411480">
+              <a:tr h="365760">
                 <a:tc>
                   <a:txBody>
                     <a:bodyPr/>
@@ -2821,6 +2821,17 @@
                       <a:pPr algn="ctr" indent="0" marL="0">
                         <a:buNone/>
                       </a:pPr>
+                      <a:r>
+                        <a:rPr lang="en-US" sz="1300" b="1" dirty="0">
+                          <a:solidFill>
+                            <a:srgbClr val="FFFFFF"/>
+                          </a:solidFill>
+                          <a:latin typeface="Arial" pitchFamily="34" charset="0"/>
+                          <a:ea typeface="Arial" pitchFamily="34" charset="-122"/>
+                          <a:cs typeface="Arial" pitchFamily="34" charset="-120"/>
+                        </a:rPr>
+                        <a:t>Per 10 scoped leads</a:t>
+                      </a:r>
                       <a:endParaRPr lang="en-US" sz="1300" dirty="0">
                         <a:latin typeface="Arial" charset="0"/>
                         <a:ea typeface="Arial" charset="0"/>
@@ -2828,7 +2839,7 @@
                       </a:endParaRPr>
                     </a:p>
                   </a:txBody>
-                  <a:tcPr marL="73152" marR="73152" marT="73152" marB="73152" anchor="ctr">
+                  <a:tcPr marL="64008" marR="64008" marT="64008" marB="64008" anchor="ctr">
                     <a:lnL w="9525" cap="flat" cmpd="sng" algn="ctr">
                       <a:solidFill>
                         <a:srgbClr val="DDDDDD"/>
@@ -2896,7 +2907,7 @@
                       </a:endParaRPr>
                     </a:p>
                   </a:txBody>
-                  <a:tcPr marL="73152" marR="73152" marT="73152" marB="73152" anchor="ctr">
+                  <a:tcPr marL="64008" marR="64008" marT="64008" marB="64008" anchor="ctr">
                     <a:lnL w="9525" cap="flat" cmpd="sng" algn="ctr">
                       <a:solidFill>
                         <a:srgbClr val="DDDDDD"/>
@@ -2964,7 +2975,7 @@
                       </a:endParaRPr>
                     </a:p>
                   </a:txBody>
-                  <a:tcPr marL="73152" marR="73152" marT="73152" marB="73152" anchor="ctr">
+                  <a:tcPr marL="64008" marR="64008" marT="64008" marB="64008" anchor="ctr">
                     <a:lnL w="9525" cap="flat" cmpd="sng" algn="ctr">
                       <a:solidFill>
                         <a:srgbClr val="DDDDDD"/>
@@ -3032,7 +3043,7 @@
                       </a:endParaRPr>
                     </a:p>
                   </a:txBody>
-                  <a:tcPr marL="73152" marR="73152" marT="73152" marB="73152" anchor="ctr">
+                  <a:tcPr marL="64008" marR="64008" marT="64008" marB="64008" anchor="ctr">
                     <a:lnL w="9525" cap="flat" cmpd="sng" algn="ctr">
                       <a:solidFill>
                         <a:srgbClr val="DDDDDD"/>
@@ -3100,7 +3111,7 @@
                       </a:endParaRPr>
                     </a:p>
                   </a:txBody>
-                  <a:tcPr marL="73152" marR="73152" marT="73152" marB="73152" anchor="ctr">
+                  <a:tcPr marL="64008" marR="64008" marT="64008" marB="64008" anchor="ctr">
                     <a:lnL w="9525" cap="flat" cmpd="sng" algn="ctr">
                       <a:solidFill>
                         <a:srgbClr val="DDDDDD"/>
@@ -3168,7 +3179,7 @@
                       </a:endParaRPr>
                     </a:p>
                   </a:txBody>
-                  <a:tcPr marL="73152" marR="73152" marT="73152" marB="73152" anchor="ctr">
+                  <a:tcPr marL="64008" marR="64008" marT="64008" marB="64008" anchor="ctr">
                     <a:lnL w="9525" cap="flat" cmpd="sng" algn="ctr">
                       <a:solidFill>
                         <a:srgbClr val="DDDDDD"/>
@@ -3211,7 +3222,7 @@
                   </a:tcPr>
                 </a:tc>
               </a:tr>
-              <a:tr h="502920">
+              <a:tr h="384048">
                 <a:tc>
                   <a:txBody>
                     <a:bodyPr/>
@@ -3238,7 +3249,7 @@
                       </a:endParaRPr>
                     </a:p>
                   </a:txBody>
-                  <a:tcPr marL="73152" marR="73152" marT="73152" marB="73152" anchor="ctr">
+                  <a:tcPr marL="64008" marR="64008" marT="64008" marB="64008" anchor="ctr">
                     <a:lnL w="9525" cap="flat" cmpd="sng" algn="ctr">
                       <a:solidFill>
                         <a:srgbClr val="DDDDDD"/>
@@ -3303,7 +3314,7 @@
                       </a:endParaRPr>
                     </a:p>
                   </a:txBody>
-                  <a:tcPr marL="73152" marR="73152" marT="73152" marB="73152" anchor="ctr">
+                  <a:tcPr marL="64008" marR="64008" marT="64008" marB="64008" anchor="ctr">
                     <a:lnL w="9525" cap="flat" cmpd="sng" algn="ctr">
                       <a:solidFill>
                         <a:srgbClr val="DDDDDD"/>
@@ -3368,7 +3379,7 @@
                       </a:endParaRPr>
                     </a:p>
                   </a:txBody>
-                  <a:tcPr marL="73152" marR="73152" marT="73152" marB="73152" anchor="ctr">
+                  <a:tcPr marL="64008" marR="64008" marT="64008" marB="64008" anchor="ctr">
                     <a:lnL w="9525" cap="flat" cmpd="sng" algn="ctr">
                       <a:solidFill>
                         <a:srgbClr val="DDDDDD"/>
@@ -3433,7 +3444,7 @@
                       </a:endParaRPr>
                     </a:p>
                   </a:txBody>
-                  <a:tcPr marL="73152" marR="73152" marT="73152" marB="73152" anchor="ctr">
+                  <a:tcPr marL="64008" marR="64008" marT="64008" marB="64008" anchor="ctr">
                     <a:lnL w="9525" cap="flat" cmpd="sng" algn="ctr">
                       <a:solidFill>
                         <a:srgbClr val="DDDDDD"/>
@@ -3498,7 +3509,7 @@
                       </a:endParaRPr>
                     </a:p>
                   </a:txBody>
-                  <a:tcPr marL="73152" marR="73152" marT="73152" marB="73152" anchor="ctr">
+                  <a:tcPr marL="64008" marR="64008" marT="64008" marB="64008" anchor="ctr">
                     <a:lnL w="9525" cap="flat" cmpd="sng" algn="ctr">
                       <a:solidFill>
                         <a:srgbClr val="DDDDDD"/>
@@ -3563,7 +3574,7 @@
                       </a:endParaRPr>
                     </a:p>
                   </a:txBody>
-                  <a:tcPr marL="73152" marR="73152" marT="73152" marB="73152" anchor="ctr">
+                  <a:tcPr marL="64008" marR="64008" marT="64008" marB="64008" anchor="ctr">
                     <a:lnL w="9525" cap="flat" cmpd="sng" algn="ctr">
                       <a:solidFill>
                         <a:srgbClr val="DDDDDD"/>
@@ -3603,7 +3614,7 @@
                   </a:tcPr>
                 </a:tc>
               </a:tr>
-              <a:tr h="502920">
+              <a:tr h="384048">
                 <a:tc>
                   <a:txBody>
                     <a:bodyPr/>
@@ -3621,7 +3632,7 @@
                           <a:ea typeface="Arial" pitchFamily="34" charset="-122"/>
                           <a:cs typeface="Arial" pitchFamily="34" charset="-120"/>
                         </a:rPr>
-                        <a:t>Fee on a $30,000 job</a:t>
+                        <a:t>Jobs closed &amp; collected (fee paid on these only)</a:t>
                       </a:r>
                       <a:endParaRPr lang="en-US" sz="1200" dirty="0">
                         <a:latin typeface="Arial" charset="0"/>
@@ -3630,7 +3641,399 @@
                       </a:endParaRPr>
                     </a:p>
                   </a:txBody>
-                  <a:tcPr marL="73152" marR="73152" marT="73152" marB="73152" anchor="ctr">
+                  <a:tcPr marL="64008" marR="64008" marT="64008" marB="64008" anchor="ctr">
+                    <a:lnL w="9525" cap="flat" cmpd="sng" algn="ctr">
+                      <a:solidFill>
+                        <a:srgbClr val="DDDDDD"/>
+                      </a:solidFill>
+                      <a:prstDash val="solid"/>
+                      <a:round/>
+                      <a:headEnd type="none" w="med" len="med"/>
+                      <a:tailEnd type="none" w="med" len="med"/>
+                    </a:lnL>
+                    <a:lnR w="9525" cap="flat" cmpd="sng" algn="ctr">
+                      <a:solidFill>
+                        <a:srgbClr val="DDDDDD"/>
+                      </a:solidFill>
+                      <a:prstDash val="solid"/>
+                      <a:round/>
+                      <a:headEnd type="none" w="med" len="med"/>
+                      <a:tailEnd type="none" w="med" len="med"/>
+                    </a:lnR>
+                    <a:lnT w="9525" cap="flat" cmpd="sng" algn="ctr">
+                      <a:solidFill>
+                        <a:srgbClr val="DDDDDD"/>
+                      </a:solidFill>
+                      <a:prstDash val="solid"/>
+                      <a:round/>
+                      <a:headEnd type="none" w="med" len="med"/>
+                      <a:tailEnd type="none" w="med" len="med"/>
+                    </a:lnT>
+                    <a:lnB w="9525" cap="flat" cmpd="sng" algn="ctr">
+                      <a:solidFill>
+                        <a:srgbClr val="DDDDDD"/>
+                      </a:solidFill>
+                      <a:prstDash val="solid"/>
+                      <a:round/>
+                      <a:headEnd type="none" w="med" len="med"/>
+                      <a:tailEnd type="none" w="med" len="med"/>
+                    </a:lnB>
+                  </a:tcPr>
+                </a:tc>
+                <a:tc>
+                  <a:txBody>
+                    <a:bodyPr/>
+                    <a:lstStyle/>
+                    <a:p>
+                      <a:pPr algn="ctr" indent="0" marL="0">
+                        <a:buNone/>
+                      </a:pPr>
+                      <a:r>
+                        <a:rPr lang="en-US" sz="1250" dirty="0">
+                          <a:solidFill>
+                            <a:srgbClr val="2A2A2A"/>
+                          </a:solidFill>
+                          <a:latin typeface="Arial" pitchFamily="34" charset="0"/>
+                          <a:ea typeface="Arial" pitchFamily="34" charset="-122"/>
+                          <a:cs typeface="Arial" pitchFamily="34" charset="-120"/>
+                        </a:rPr>
+                        <a:t>2 of 10</a:t>
+                      </a:r>
+                      <a:endParaRPr lang="en-US" sz="1250" dirty="0">
+                        <a:latin typeface="Arial" charset="0"/>
+                        <a:ea typeface="Arial" charset="0"/>
+                        <a:cs typeface="Arial" charset="0"/>
+                      </a:endParaRPr>
+                    </a:p>
+                  </a:txBody>
+                  <a:tcPr marL="64008" marR="64008" marT="64008" marB="64008" anchor="ctr">
+                    <a:lnL w="9525" cap="flat" cmpd="sng" algn="ctr">
+                      <a:solidFill>
+                        <a:srgbClr val="DDDDDD"/>
+                      </a:solidFill>
+                      <a:prstDash val="solid"/>
+                      <a:round/>
+                      <a:headEnd type="none" w="med" len="med"/>
+                      <a:tailEnd type="none" w="med" len="med"/>
+                    </a:lnL>
+                    <a:lnR w="9525" cap="flat" cmpd="sng" algn="ctr">
+                      <a:solidFill>
+                        <a:srgbClr val="DDDDDD"/>
+                      </a:solidFill>
+                      <a:prstDash val="solid"/>
+                      <a:round/>
+                      <a:headEnd type="none" w="med" len="med"/>
+                      <a:tailEnd type="none" w="med" len="med"/>
+                    </a:lnR>
+                    <a:lnT w="9525" cap="flat" cmpd="sng" algn="ctr">
+                      <a:solidFill>
+                        <a:srgbClr val="DDDDDD"/>
+                      </a:solidFill>
+                      <a:prstDash val="solid"/>
+                      <a:round/>
+                      <a:headEnd type="none" w="med" len="med"/>
+                      <a:tailEnd type="none" w="med" len="med"/>
+                    </a:lnT>
+                    <a:lnB w="9525" cap="flat" cmpd="sng" algn="ctr">
+                      <a:solidFill>
+                        <a:srgbClr val="DDDDDD"/>
+                      </a:solidFill>
+                      <a:prstDash val="solid"/>
+                      <a:round/>
+                      <a:headEnd type="none" w="med" len="med"/>
+                      <a:tailEnd type="none" w="med" len="med"/>
+                    </a:lnB>
+                  </a:tcPr>
+                </a:tc>
+                <a:tc>
+                  <a:txBody>
+                    <a:bodyPr/>
+                    <a:lstStyle/>
+                    <a:p>
+                      <a:pPr algn="ctr" indent="0" marL="0">
+                        <a:buNone/>
+                      </a:pPr>
+                      <a:r>
+                        <a:rPr lang="en-US" sz="1250" dirty="0">
+                          <a:solidFill>
+                            <a:srgbClr val="2A2A2A"/>
+                          </a:solidFill>
+                          <a:latin typeface="Arial" pitchFamily="34" charset="0"/>
+                          <a:ea typeface="Arial" pitchFamily="34" charset="-122"/>
+                          <a:cs typeface="Arial" pitchFamily="34" charset="-120"/>
+                        </a:rPr>
+                        <a:t>4 of 10</a:t>
+                      </a:r>
+                      <a:endParaRPr lang="en-US" sz="1250" dirty="0">
+                        <a:latin typeface="Arial" charset="0"/>
+                        <a:ea typeface="Arial" charset="0"/>
+                        <a:cs typeface="Arial" charset="0"/>
+                      </a:endParaRPr>
+                    </a:p>
+                  </a:txBody>
+                  <a:tcPr marL="64008" marR="64008" marT="64008" marB="64008" anchor="ctr">
+                    <a:lnL w="9525" cap="flat" cmpd="sng" algn="ctr">
+                      <a:solidFill>
+                        <a:srgbClr val="DDDDDD"/>
+                      </a:solidFill>
+                      <a:prstDash val="solid"/>
+                      <a:round/>
+                      <a:headEnd type="none" w="med" len="med"/>
+                      <a:tailEnd type="none" w="med" len="med"/>
+                    </a:lnL>
+                    <a:lnR w="9525" cap="flat" cmpd="sng" algn="ctr">
+                      <a:solidFill>
+                        <a:srgbClr val="DDDDDD"/>
+                      </a:solidFill>
+                      <a:prstDash val="solid"/>
+                      <a:round/>
+                      <a:headEnd type="none" w="med" len="med"/>
+                      <a:tailEnd type="none" w="med" len="med"/>
+                    </a:lnR>
+                    <a:lnT w="9525" cap="flat" cmpd="sng" algn="ctr">
+                      <a:solidFill>
+                        <a:srgbClr val="DDDDDD"/>
+                      </a:solidFill>
+                      <a:prstDash val="solid"/>
+                      <a:round/>
+                      <a:headEnd type="none" w="med" len="med"/>
+                      <a:tailEnd type="none" w="med" len="med"/>
+                    </a:lnT>
+                    <a:lnB w="9525" cap="flat" cmpd="sng" algn="ctr">
+                      <a:solidFill>
+                        <a:srgbClr val="DDDDDD"/>
+                      </a:solidFill>
+                      <a:prstDash val="solid"/>
+                      <a:round/>
+                      <a:headEnd type="none" w="med" len="med"/>
+                      <a:tailEnd type="none" w="med" len="med"/>
+                    </a:lnB>
+                  </a:tcPr>
+                </a:tc>
+                <a:tc>
+                  <a:txBody>
+                    <a:bodyPr/>
+                    <a:lstStyle/>
+                    <a:p>
+                      <a:pPr algn="ctr" indent="0" marL="0">
+                        <a:buNone/>
+                      </a:pPr>
+                      <a:r>
+                        <a:rPr lang="en-US" sz="1250" dirty="0">
+                          <a:solidFill>
+                            <a:srgbClr val="2A2A2A"/>
+                          </a:solidFill>
+                          <a:latin typeface="Arial" pitchFamily="34" charset="0"/>
+                          <a:ea typeface="Arial" pitchFamily="34" charset="-122"/>
+                          <a:cs typeface="Arial" pitchFamily="34" charset="-120"/>
+                        </a:rPr>
+                        <a:t>6 of 10</a:t>
+                      </a:r>
+                      <a:endParaRPr lang="en-US" sz="1250" dirty="0">
+                        <a:latin typeface="Arial" charset="0"/>
+                        <a:ea typeface="Arial" charset="0"/>
+                        <a:cs typeface="Arial" charset="0"/>
+                      </a:endParaRPr>
+                    </a:p>
+                  </a:txBody>
+                  <a:tcPr marL="64008" marR="64008" marT="64008" marB="64008" anchor="ctr">
+                    <a:lnL w="9525" cap="flat" cmpd="sng" algn="ctr">
+                      <a:solidFill>
+                        <a:srgbClr val="DDDDDD"/>
+                      </a:solidFill>
+                      <a:prstDash val="solid"/>
+                      <a:round/>
+                      <a:headEnd type="none" w="med" len="med"/>
+                      <a:tailEnd type="none" w="med" len="med"/>
+                    </a:lnL>
+                    <a:lnR w="9525" cap="flat" cmpd="sng" algn="ctr">
+                      <a:solidFill>
+                        <a:srgbClr val="DDDDDD"/>
+                      </a:solidFill>
+                      <a:prstDash val="solid"/>
+                      <a:round/>
+                      <a:headEnd type="none" w="med" len="med"/>
+                      <a:tailEnd type="none" w="med" len="med"/>
+                    </a:lnR>
+                    <a:lnT w="9525" cap="flat" cmpd="sng" algn="ctr">
+                      <a:solidFill>
+                        <a:srgbClr val="DDDDDD"/>
+                      </a:solidFill>
+                      <a:prstDash val="solid"/>
+                      <a:round/>
+                      <a:headEnd type="none" w="med" len="med"/>
+                      <a:tailEnd type="none" w="med" len="med"/>
+                    </a:lnT>
+                    <a:lnB w="9525" cap="flat" cmpd="sng" algn="ctr">
+                      <a:solidFill>
+                        <a:srgbClr val="DDDDDD"/>
+                      </a:solidFill>
+                      <a:prstDash val="solid"/>
+                      <a:round/>
+                      <a:headEnd type="none" w="med" len="med"/>
+                      <a:tailEnd type="none" w="med" len="med"/>
+                    </a:lnB>
+                  </a:tcPr>
+                </a:tc>
+                <a:tc>
+                  <a:txBody>
+                    <a:bodyPr/>
+                    <a:lstStyle/>
+                    <a:p>
+                      <a:pPr algn="ctr" indent="0" marL="0">
+                        <a:buNone/>
+                      </a:pPr>
+                      <a:r>
+                        <a:rPr lang="en-US" sz="1250" dirty="0">
+                          <a:solidFill>
+                            <a:srgbClr val="2A2A2A"/>
+                          </a:solidFill>
+                          <a:latin typeface="Arial" pitchFamily="34" charset="0"/>
+                          <a:ea typeface="Arial" pitchFamily="34" charset="-122"/>
+                          <a:cs typeface="Arial" pitchFamily="34" charset="-120"/>
+                        </a:rPr>
+                        <a:t>8 of 10</a:t>
+                      </a:r>
+                      <a:endParaRPr lang="en-US" sz="1250" dirty="0">
+                        <a:latin typeface="Arial" charset="0"/>
+                        <a:ea typeface="Arial" charset="0"/>
+                        <a:cs typeface="Arial" charset="0"/>
+                      </a:endParaRPr>
+                    </a:p>
+                  </a:txBody>
+                  <a:tcPr marL="64008" marR="64008" marT="64008" marB="64008" anchor="ctr">
+                    <a:lnL w="9525" cap="flat" cmpd="sng" algn="ctr">
+                      <a:solidFill>
+                        <a:srgbClr val="DDDDDD"/>
+                      </a:solidFill>
+                      <a:prstDash val="solid"/>
+                      <a:round/>
+                      <a:headEnd type="none" w="med" len="med"/>
+                      <a:tailEnd type="none" w="med" len="med"/>
+                    </a:lnL>
+                    <a:lnR w="9525" cap="flat" cmpd="sng" algn="ctr">
+                      <a:solidFill>
+                        <a:srgbClr val="DDDDDD"/>
+                      </a:solidFill>
+                      <a:prstDash val="solid"/>
+                      <a:round/>
+                      <a:headEnd type="none" w="med" len="med"/>
+                      <a:tailEnd type="none" w="med" len="med"/>
+                    </a:lnR>
+                    <a:lnT w="9525" cap="flat" cmpd="sng" algn="ctr">
+                      <a:solidFill>
+                        <a:srgbClr val="DDDDDD"/>
+                      </a:solidFill>
+                      <a:prstDash val="solid"/>
+                      <a:round/>
+                      <a:headEnd type="none" w="med" len="med"/>
+                      <a:tailEnd type="none" w="med" len="med"/>
+                    </a:lnT>
+                    <a:lnB w="9525" cap="flat" cmpd="sng" algn="ctr">
+                      <a:solidFill>
+                        <a:srgbClr val="DDDDDD"/>
+                      </a:solidFill>
+                      <a:prstDash val="solid"/>
+                      <a:round/>
+                      <a:headEnd type="none" w="med" len="med"/>
+                      <a:tailEnd type="none" w="med" len="med"/>
+                    </a:lnB>
+                  </a:tcPr>
+                </a:tc>
+                <a:tc>
+                  <a:txBody>
+                    <a:bodyPr/>
+                    <a:lstStyle/>
+                    <a:p>
+                      <a:pPr algn="ctr" indent="0" marL="0">
+                        <a:buNone/>
+                      </a:pPr>
+                      <a:r>
+                        <a:rPr lang="en-US" sz="1250" dirty="0">
+                          <a:solidFill>
+                            <a:srgbClr val="2A2A2A"/>
+                          </a:solidFill>
+                          <a:latin typeface="Arial" pitchFamily="34" charset="0"/>
+                          <a:ea typeface="Arial" pitchFamily="34" charset="-122"/>
+                          <a:cs typeface="Arial" pitchFamily="34" charset="-120"/>
+                        </a:rPr>
+                        <a:t>10 of 10</a:t>
+                      </a:r>
+                      <a:endParaRPr lang="en-US" sz="1250" dirty="0">
+                        <a:latin typeface="Arial" charset="0"/>
+                        <a:ea typeface="Arial" charset="0"/>
+                        <a:cs typeface="Arial" charset="0"/>
+                      </a:endParaRPr>
+                    </a:p>
+                  </a:txBody>
+                  <a:tcPr marL="64008" marR="64008" marT="64008" marB="64008" anchor="ctr">
+                    <a:lnL w="9525" cap="flat" cmpd="sng" algn="ctr">
+                      <a:solidFill>
+                        <a:srgbClr val="DDDDDD"/>
+                      </a:solidFill>
+                      <a:prstDash val="solid"/>
+                      <a:round/>
+                      <a:headEnd type="none" w="med" len="med"/>
+                      <a:tailEnd type="none" w="med" len="med"/>
+                    </a:lnL>
+                    <a:lnR w="9525" cap="flat" cmpd="sng" algn="ctr">
+                      <a:solidFill>
+                        <a:srgbClr val="DDDDDD"/>
+                      </a:solidFill>
+                      <a:prstDash val="solid"/>
+                      <a:round/>
+                      <a:headEnd type="none" w="med" len="med"/>
+                      <a:tailEnd type="none" w="med" len="med"/>
+                    </a:lnR>
+                    <a:lnT w="9525" cap="flat" cmpd="sng" algn="ctr">
+                      <a:solidFill>
+                        <a:srgbClr val="DDDDDD"/>
+                      </a:solidFill>
+                      <a:prstDash val="solid"/>
+                      <a:round/>
+                      <a:headEnd type="none" w="med" len="med"/>
+                      <a:tailEnd type="none" w="med" len="med"/>
+                    </a:lnT>
+                    <a:lnB w="9525" cap="flat" cmpd="sng" algn="ctr">
+                      <a:solidFill>
+                        <a:srgbClr val="DDDDDD"/>
+                      </a:solidFill>
+                      <a:prstDash val="solid"/>
+                      <a:round/>
+                      <a:headEnd type="none" w="med" len="med"/>
+                      <a:tailEnd type="none" w="med" len="med"/>
+                    </a:lnB>
+                  </a:tcPr>
+                </a:tc>
+              </a:tr>
+              <a:tr h="384048">
+                <a:tc>
+                  <a:txBody>
+                    <a:bodyPr/>
+                    <a:lstStyle/>
+                    <a:p>
+                      <a:pPr indent="0" marL="0">
+                        <a:buNone/>
+                      </a:pPr>
+                      <a:r>
+                        <a:rPr lang="en-US" sz="1200" b="1" dirty="0">
+                          <a:solidFill>
+                            <a:srgbClr val="111111"/>
+                          </a:solidFill>
+                          <a:latin typeface="Arial" pitchFamily="34" charset="0"/>
+                          <a:ea typeface="Arial" pitchFamily="34" charset="-122"/>
+                          <a:cs typeface="Arial" pitchFamily="34" charset="-120"/>
+                        </a:rPr>
+                        <a:t>Fee per closed $30,000 job</a:t>
+                      </a:r>
+                      <a:endParaRPr lang="en-US" sz="1200" dirty="0">
+                        <a:latin typeface="Arial" charset="0"/>
+                        <a:ea typeface="Arial" charset="0"/>
+                        <a:cs typeface="Arial" charset="0"/>
+                      </a:endParaRPr>
+                    </a:p>
+                  </a:txBody>
+                  <a:tcPr marL="64008" marR="64008" marT="64008" marB="64008" anchor="ctr">
                     <a:lnL w="9525" cap="flat" cmpd="sng" algn="ctr">
                       <a:solidFill>
                         <a:srgbClr val="DDDDDD"/>
@@ -3695,7 +4098,7 @@
                       </a:endParaRPr>
                     </a:p>
                   </a:txBody>
-                  <a:tcPr marL="73152" marR="73152" marT="73152" marB="73152" anchor="ctr">
+                  <a:tcPr marL="64008" marR="64008" marT="64008" marB="64008" anchor="ctr">
                     <a:lnL w="9525" cap="flat" cmpd="sng" algn="ctr">
                       <a:solidFill>
                         <a:srgbClr val="DDDDDD"/>
@@ -3760,7 +4163,7 @@
                       </a:endParaRPr>
                     </a:p>
                   </a:txBody>
-                  <a:tcPr marL="73152" marR="73152" marT="73152" marB="73152" anchor="ctr">
+                  <a:tcPr marL="64008" marR="64008" marT="64008" marB="64008" anchor="ctr">
                     <a:lnL w="9525" cap="flat" cmpd="sng" algn="ctr">
                       <a:solidFill>
                         <a:srgbClr val="DDDDDD"/>
@@ -3825,7 +4228,7 @@
                       </a:endParaRPr>
                     </a:p>
                   </a:txBody>
-                  <a:tcPr marL="73152" marR="73152" marT="73152" marB="73152" anchor="ctr">
+                  <a:tcPr marL="64008" marR="64008" marT="64008" marB="64008" anchor="ctr">
                     <a:lnL w="9525" cap="flat" cmpd="sng" algn="ctr">
                       <a:solidFill>
                         <a:srgbClr val="DDDDDD"/>
@@ -3890,7 +4293,7 @@
                       </a:endParaRPr>
                     </a:p>
                   </a:txBody>
-                  <a:tcPr marL="73152" marR="73152" marT="73152" marB="73152" anchor="ctr">
+                  <a:tcPr marL="64008" marR="64008" marT="64008" marB="64008" anchor="ctr">
                     <a:lnL w="9525" cap="flat" cmpd="sng" algn="ctr">
                       <a:solidFill>
                         <a:srgbClr val="DDDDDD"/>
@@ -3955,7 +4358,7 @@
                       </a:endParaRPr>
                     </a:p>
                   </a:txBody>
-                  <a:tcPr marL="73152" marR="73152" marT="73152" marB="73152" anchor="ctr">
+                  <a:tcPr marL="64008" marR="64008" marT="64008" marB="64008" anchor="ctr">
                     <a:lnL w="9525" cap="flat" cmpd="sng" algn="ctr">
                       <a:solidFill>
                         <a:srgbClr val="DDDDDD"/>
@@ -3995,7 +4398,7 @@
                   </a:tcPr>
                 </a:tc>
               </a:tr>
-              <a:tr h="502920">
+              <a:tr h="384048">
                 <a:tc>
                   <a:txBody>
                     <a:bodyPr/>
@@ -4013,7 +4416,7 @@
                           <a:ea typeface="Arial" pitchFamily="34" charset="-122"/>
                           <a:cs typeface="Arial" pitchFamily="34" charset="-120"/>
                         </a:rPr>
-                        <a:t>Job profit after fee (35% margin)</a:t>
+                        <a:t>Fee on the other 8 / 6 / 4 / 2 / 0 leads</a:t>
                       </a:r>
                       <a:endParaRPr lang="en-US" sz="1200" dirty="0">
                         <a:latin typeface="Arial" charset="0"/>
@@ -4022,7 +4425,399 @@
                       </a:endParaRPr>
                     </a:p>
                   </a:txBody>
-                  <a:tcPr marL="73152" marR="73152" marT="73152" marB="73152" anchor="ctr">
+                  <a:tcPr marL="64008" marR="64008" marT="64008" marB="64008" anchor="ctr">
+                    <a:lnL w="9525" cap="flat" cmpd="sng" algn="ctr">
+                      <a:solidFill>
+                        <a:srgbClr val="DDDDDD"/>
+                      </a:solidFill>
+                      <a:prstDash val="solid"/>
+                      <a:round/>
+                      <a:headEnd type="none" w="med" len="med"/>
+                      <a:tailEnd type="none" w="med" len="med"/>
+                    </a:lnL>
+                    <a:lnR w="9525" cap="flat" cmpd="sng" algn="ctr">
+                      <a:solidFill>
+                        <a:srgbClr val="DDDDDD"/>
+                      </a:solidFill>
+                      <a:prstDash val="solid"/>
+                      <a:round/>
+                      <a:headEnd type="none" w="med" len="med"/>
+                      <a:tailEnd type="none" w="med" len="med"/>
+                    </a:lnR>
+                    <a:lnT w="9525" cap="flat" cmpd="sng" algn="ctr">
+                      <a:solidFill>
+                        <a:srgbClr val="DDDDDD"/>
+                      </a:solidFill>
+                      <a:prstDash val="solid"/>
+                      <a:round/>
+                      <a:headEnd type="none" w="med" len="med"/>
+                      <a:tailEnd type="none" w="med" len="med"/>
+                    </a:lnT>
+                    <a:lnB w="9525" cap="flat" cmpd="sng" algn="ctr">
+                      <a:solidFill>
+                        <a:srgbClr val="DDDDDD"/>
+                      </a:solidFill>
+                      <a:prstDash val="solid"/>
+                      <a:round/>
+                      <a:headEnd type="none" w="med" len="med"/>
+                      <a:tailEnd type="none" w="med" len="med"/>
+                    </a:lnB>
+                  </a:tcPr>
+                </a:tc>
+                <a:tc>
+                  <a:txBody>
+                    <a:bodyPr/>
+                    <a:lstStyle/>
+                    <a:p>
+                      <a:pPr algn="ctr" indent="0" marL="0">
+                        <a:buNone/>
+                      </a:pPr>
+                      <a:r>
+                        <a:rPr lang="en-US" sz="1200" dirty="0">
+                          <a:solidFill>
+                            <a:srgbClr val="6E6E6E"/>
+                          </a:solidFill>
+                          <a:latin typeface="Arial" pitchFamily="34" charset="0"/>
+                          <a:ea typeface="Arial" pitchFamily="34" charset="-122"/>
+                          <a:cs typeface="Arial" pitchFamily="34" charset="-120"/>
+                        </a:rPr>
+                        <a:t>$0</a:t>
+                      </a:r>
+                      <a:endParaRPr lang="en-US" sz="1200" dirty="0">
+                        <a:latin typeface="Arial" charset="0"/>
+                        <a:ea typeface="Arial" charset="0"/>
+                        <a:cs typeface="Arial" charset="0"/>
+                      </a:endParaRPr>
+                    </a:p>
+                  </a:txBody>
+                  <a:tcPr marL="64008" marR="64008" marT="64008" marB="64008" anchor="ctr">
+                    <a:lnL w="9525" cap="flat" cmpd="sng" algn="ctr">
+                      <a:solidFill>
+                        <a:srgbClr val="DDDDDD"/>
+                      </a:solidFill>
+                      <a:prstDash val="solid"/>
+                      <a:round/>
+                      <a:headEnd type="none" w="med" len="med"/>
+                      <a:tailEnd type="none" w="med" len="med"/>
+                    </a:lnL>
+                    <a:lnR w="9525" cap="flat" cmpd="sng" algn="ctr">
+                      <a:solidFill>
+                        <a:srgbClr val="DDDDDD"/>
+                      </a:solidFill>
+                      <a:prstDash val="solid"/>
+                      <a:round/>
+                      <a:headEnd type="none" w="med" len="med"/>
+                      <a:tailEnd type="none" w="med" len="med"/>
+                    </a:lnR>
+                    <a:lnT w="9525" cap="flat" cmpd="sng" algn="ctr">
+                      <a:solidFill>
+                        <a:srgbClr val="DDDDDD"/>
+                      </a:solidFill>
+                      <a:prstDash val="solid"/>
+                      <a:round/>
+                      <a:headEnd type="none" w="med" len="med"/>
+                      <a:tailEnd type="none" w="med" len="med"/>
+                    </a:lnT>
+                    <a:lnB w="9525" cap="flat" cmpd="sng" algn="ctr">
+                      <a:solidFill>
+                        <a:srgbClr val="DDDDDD"/>
+                      </a:solidFill>
+                      <a:prstDash val="solid"/>
+                      <a:round/>
+                      <a:headEnd type="none" w="med" len="med"/>
+                      <a:tailEnd type="none" w="med" len="med"/>
+                    </a:lnB>
+                  </a:tcPr>
+                </a:tc>
+                <a:tc>
+                  <a:txBody>
+                    <a:bodyPr/>
+                    <a:lstStyle/>
+                    <a:p>
+                      <a:pPr algn="ctr" indent="0" marL="0">
+                        <a:buNone/>
+                      </a:pPr>
+                      <a:r>
+                        <a:rPr lang="en-US" sz="1200" dirty="0">
+                          <a:solidFill>
+                            <a:srgbClr val="6E6E6E"/>
+                          </a:solidFill>
+                          <a:latin typeface="Arial" pitchFamily="34" charset="0"/>
+                          <a:ea typeface="Arial" pitchFamily="34" charset="-122"/>
+                          <a:cs typeface="Arial" pitchFamily="34" charset="-120"/>
+                        </a:rPr>
+                        <a:t>$0</a:t>
+                      </a:r>
+                      <a:endParaRPr lang="en-US" sz="1200" dirty="0">
+                        <a:latin typeface="Arial" charset="0"/>
+                        <a:ea typeface="Arial" charset="0"/>
+                        <a:cs typeface="Arial" charset="0"/>
+                      </a:endParaRPr>
+                    </a:p>
+                  </a:txBody>
+                  <a:tcPr marL="64008" marR="64008" marT="64008" marB="64008" anchor="ctr">
+                    <a:lnL w="9525" cap="flat" cmpd="sng" algn="ctr">
+                      <a:solidFill>
+                        <a:srgbClr val="DDDDDD"/>
+                      </a:solidFill>
+                      <a:prstDash val="solid"/>
+                      <a:round/>
+                      <a:headEnd type="none" w="med" len="med"/>
+                      <a:tailEnd type="none" w="med" len="med"/>
+                    </a:lnL>
+                    <a:lnR w="9525" cap="flat" cmpd="sng" algn="ctr">
+                      <a:solidFill>
+                        <a:srgbClr val="DDDDDD"/>
+                      </a:solidFill>
+                      <a:prstDash val="solid"/>
+                      <a:round/>
+                      <a:headEnd type="none" w="med" len="med"/>
+                      <a:tailEnd type="none" w="med" len="med"/>
+                    </a:lnR>
+                    <a:lnT w="9525" cap="flat" cmpd="sng" algn="ctr">
+                      <a:solidFill>
+                        <a:srgbClr val="DDDDDD"/>
+                      </a:solidFill>
+                      <a:prstDash val="solid"/>
+                      <a:round/>
+                      <a:headEnd type="none" w="med" len="med"/>
+                      <a:tailEnd type="none" w="med" len="med"/>
+                    </a:lnT>
+                    <a:lnB w="9525" cap="flat" cmpd="sng" algn="ctr">
+                      <a:solidFill>
+                        <a:srgbClr val="DDDDDD"/>
+                      </a:solidFill>
+                      <a:prstDash val="solid"/>
+                      <a:round/>
+                      <a:headEnd type="none" w="med" len="med"/>
+                      <a:tailEnd type="none" w="med" len="med"/>
+                    </a:lnB>
+                  </a:tcPr>
+                </a:tc>
+                <a:tc>
+                  <a:txBody>
+                    <a:bodyPr/>
+                    <a:lstStyle/>
+                    <a:p>
+                      <a:pPr algn="ctr" indent="0" marL="0">
+                        <a:buNone/>
+                      </a:pPr>
+                      <a:r>
+                        <a:rPr lang="en-US" sz="1200" dirty="0">
+                          <a:solidFill>
+                            <a:srgbClr val="6E6E6E"/>
+                          </a:solidFill>
+                          <a:latin typeface="Arial" pitchFamily="34" charset="0"/>
+                          <a:ea typeface="Arial" pitchFamily="34" charset="-122"/>
+                          <a:cs typeface="Arial" pitchFamily="34" charset="-120"/>
+                        </a:rPr>
+                        <a:t>$0</a:t>
+                      </a:r>
+                      <a:endParaRPr lang="en-US" sz="1200" dirty="0">
+                        <a:latin typeface="Arial" charset="0"/>
+                        <a:ea typeface="Arial" charset="0"/>
+                        <a:cs typeface="Arial" charset="0"/>
+                      </a:endParaRPr>
+                    </a:p>
+                  </a:txBody>
+                  <a:tcPr marL="64008" marR="64008" marT="64008" marB="64008" anchor="ctr">
+                    <a:lnL w="9525" cap="flat" cmpd="sng" algn="ctr">
+                      <a:solidFill>
+                        <a:srgbClr val="DDDDDD"/>
+                      </a:solidFill>
+                      <a:prstDash val="solid"/>
+                      <a:round/>
+                      <a:headEnd type="none" w="med" len="med"/>
+                      <a:tailEnd type="none" w="med" len="med"/>
+                    </a:lnL>
+                    <a:lnR w="9525" cap="flat" cmpd="sng" algn="ctr">
+                      <a:solidFill>
+                        <a:srgbClr val="DDDDDD"/>
+                      </a:solidFill>
+                      <a:prstDash val="solid"/>
+                      <a:round/>
+                      <a:headEnd type="none" w="med" len="med"/>
+                      <a:tailEnd type="none" w="med" len="med"/>
+                    </a:lnR>
+                    <a:lnT w="9525" cap="flat" cmpd="sng" algn="ctr">
+                      <a:solidFill>
+                        <a:srgbClr val="DDDDDD"/>
+                      </a:solidFill>
+                      <a:prstDash val="solid"/>
+                      <a:round/>
+                      <a:headEnd type="none" w="med" len="med"/>
+                      <a:tailEnd type="none" w="med" len="med"/>
+                    </a:lnT>
+                    <a:lnB w="9525" cap="flat" cmpd="sng" algn="ctr">
+                      <a:solidFill>
+                        <a:srgbClr val="DDDDDD"/>
+                      </a:solidFill>
+                      <a:prstDash val="solid"/>
+                      <a:round/>
+                      <a:headEnd type="none" w="med" len="med"/>
+                      <a:tailEnd type="none" w="med" len="med"/>
+                    </a:lnB>
+                  </a:tcPr>
+                </a:tc>
+                <a:tc>
+                  <a:txBody>
+                    <a:bodyPr/>
+                    <a:lstStyle/>
+                    <a:p>
+                      <a:pPr algn="ctr" indent="0" marL="0">
+                        <a:buNone/>
+                      </a:pPr>
+                      <a:r>
+                        <a:rPr lang="en-US" sz="1200" dirty="0">
+                          <a:solidFill>
+                            <a:srgbClr val="6E6E6E"/>
+                          </a:solidFill>
+                          <a:latin typeface="Arial" pitchFamily="34" charset="0"/>
+                          <a:ea typeface="Arial" pitchFamily="34" charset="-122"/>
+                          <a:cs typeface="Arial" pitchFamily="34" charset="-120"/>
+                        </a:rPr>
+                        <a:t>$0</a:t>
+                      </a:r>
+                      <a:endParaRPr lang="en-US" sz="1200" dirty="0">
+                        <a:latin typeface="Arial" charset="0"/>
+                        <a:ea typeface="Arial" charset="0"/>
+                        <a:cs typeface="Arial" charset="0"/>
+                      </a:endParaRPr>
+                    </a:p>
+                  </a:txBody>
+                  <a:tcPr marL="64008" marR="64008" marT="64008" marB="64008" anchor="ctr">
+                    <a:lnL w="9525" cap="flat" cmpd="sng" algn="ctr">
+                      <a:solidFill>
+                        <a:srgbClr val="DDDDDD"/>
+                      </a:solidFill>
+                      <a:prstDash val="solid"/>
+                      <a:round/>
+                      <a:headEnd type="none" w="med" len="med"/>
+                      <a:tailEnd type="none" w="med" len="med"/>
+                    </a:lnL>
+                    <a:lnR w="9525" cap="flat" cmpd="sng" algn="ctr">
+                      <a:solidFill>
+                        <a:srgbClr val="DDDDDD"/>
+                      </a:solidFill>
+                      <a:prstDash val="solid"/>
+                      <a:round/>
+                      <a:headEnd type="none" w="med" len="med"/>
+                      <a:tailEnd type="none" w="med" len="med"/>
+                    </a:lnR>
+                    <a:lnT w="9525" cap="flat" cmpd="sng" algn="ctr">
+                      <a:solidFill>
+                        <a:srgbClr val="DDDDDD"/>
+                      </a:solidFill>
+                      <a:prstDash val="solid"/>
+                      <a:round/>
+                      <a:headEnd type="none" w="med" len="med"/>
+                      <a:tailEnd type="none" w="med" len="med"/>
+                    </a:lnT>
+                    <a:lnB w="9525" cap="flat" cmpd="sng" algn="ctr">
+                      <a:solidFill>
+                        <a:srgbClr val="DDDDDD"/>
+                      </a:solidFill>
+                      <a:prstDash val="solid"/>
+                      <a:round/>
+                      <a:headEnd type="none" w="med" len="med"/>
+                      <a:tailEnd type="none" w="med" len="med"/>
+                    </a:lnB>
+                  </a:tcPr>
+                </a:tc>
+                <a:tc>
+                  <a:txBody>
+                    <a:bodyPr/>
+                    <a:lstStyle/>
+                    <a:p>
+                      <a:pPr algn="ctr" indent="0" marL="0">
+                        <a:buNone/>
+                      </a:pPr>
+                      <a:r>
+                        <a:rPr lang="en-US" sz="1200" dirty="0">
+                          <a:solidFill>
+                            <a:srgbClr val="6E6E6E"/>
+                          </a:solidFill>
+                          <a:latin typeface="Arial" pitchFamily="34" charset="0"/>
+                          <a:ea typeface="Arial" pitchFamily="34" charset="-122"/>
+                          <a:cs typeface="Arial" pitchFamily="34" charset="-120"/>
+                        </a:rPr>
+                        <a:t>$0</a:t>
+                      </a:r>
+                      <a:endParaRPr lang="en-US" sz="1200" dirty="0">
+                        <a:latin typeface="Arial" charset="0"/>
+                        <a:ea typeface="Arial" charset="0"/>
+                        <a:cs typeface="Arial" charset="0"/>
+                      </a:endParaRPr>
+                    </a:p>
+                  </a:txBody>
+                  <a:tcPr marL="64008" marR="64008" marT="64008" marB="64008" anchor="ctr">
+                    <a:lnL w="9525" cap="flat" cmpd="sng" algn="ctr">
+                      <a:solidFill>
+                        <a:srgbClr val="DDDDDD"/>
+                      </a:solidFill>
+                      <a:prstDash val="solid"/>
+                      <a:round/>
+                      <a:headEnd type="none" w="med" len="med"/>
+                      <a:tailEnd type="none" w="med" len="med"/>
+                    </a:lnL>
+                    <a:lnR w="9525" cap="flat" cmpd="sng" algn="ctr">
+                      <a:solidFill>
+                        <a:srgbClr val="DDDDDD"/>
+                      </a:solidFill>
+                      <a:prstDash val="solid"/>
+                      <a:round/>
+                      <a:headEnd type="none" w="med" len="med"/>
+                      <a:tailEnd type="none" w="med" len="med"/>
+                    </a:lnR>
+                    <a:lnT w="9525" cap="flat" cmpd="sng" algn="ctr">
+                      <a:solidFill>
+                        <a:srgbClr val="DDDDDD"/>
+                      </a:solidFill>
+                      <a:prstDash val="solid"/>
+                      <a:round/>
+                      <a:headEnd type="none" w="med" len="med"/>
+                      <a:tailEnd type="none" w="med" len="med"/>
+                    </a:lnT>
+                    <a:lnB w="9525" cap="flat" cmpd="sng" algn="ctr">
+                      <a:solidFill>
+                        <a:srgbClr val="DDDDDD"/>
+                      </a:solidFill>
+                      <a:prstDash val="solid"/>
+                      <a:round/>
+                      <a:headEnd type="none" w="med" len="med"/>
+                      <a:tailEnd type="none" w="med" len="med"/>
+                    </a:lnB>
+                  </a:tcPr>
+                </a:tc>
+              </a:tr>
+              <a:tr h="384048">
+                <a:tc>
+                  <a:txBody>
+                    <a:bodyPr/>
+                    <a:lstStyle/>
+                    <a:p>
+                      <a:pPr indent="0" marL="0">
+                        <a:buNone/>
+                      </a:pPr>
+                      <a:r>
+                        <a:rPr lang="en-US" sz="1200" b="1" dirty="0">
+                          <a:solidFill>
+                            <a:srgbClr val="111111"/>
+                          </a:solidFill>
+                          <a:latin typeface="Arial" pitchFamily="34" charset="0"/>
+                          <a:ea typeface="Arial" pitchFamily="34" charset="-122"/>
+                          <a:cs typeface="Arial" pitchFamily="34" charset="-120"/>
+                        </a:rPr>
+                        <a:t>T^Rock net per closed job (after 50/50 PM split)</a:t>
+                      </a:r>
+                      <a:endParaRPr lang="en-US" sz="1200" dirty="0">
+                        <a:latin typeface="Arial" charset="0"/>
+                        <a:ea typeface="Arial" charset="0"/>
+                        <a:cs typeface="Arial" charset="0"/>
+                      </a:endParaRPr>
+                    </a:p>
+                  </a:txBody>
+                  <a:tcPr marL="64008" marR="64008" marT="64008" marB="64008" anchor="ctr">
                     <a:lnL w="9525" cap="flat" cmpd="sng" algn="ctr">
                       <a:solidFill>
                         <a:srgbClr val="DDDDDD"/>
@@ -4078,7 +4873,7 @@
                           <a:ea typeface="Arial" pitchFamily="34" charset="-122"/>
                           <a:cs typeface="Arial" pitchFamily="34" charset="-120"/>
                         </a:rPr>
-                        <a:t>$9,900</a:t>
+                        <a:t>$4,950</a:t>
                       </a:r>
                       <a:endParaRPr lang="en-US" sz="1250" dirty="0">
                         <a:latin typeface="Arial" charset="0"/>
@@ -4087,7 +4882,7 @@
                       </a:endParaRPr>
                     </a:p>
                   </a:txBody>
-                  <a:tcPr marL="73152" marR="73152" marT="73152" marB="73152" anchor="ctr">
+                  <a:tcPr marL="64008" marR="64008" marT="64008" marB="64008" anchor="ctr">
                     <a:lnL w="9525" cap="flat" cmpd="sng" algn="ctr">
                       <a:solidFill>
                         <a:srgbClr val="DDDDDD"/>
@@ -4143,7 +4938,7 @@
                           <a:ea typeface="Arial" pitchFamily="34" charset="-122"/>
                           <a:cs typeface="Arial" pitchFamily="34" charset="-120"/>
                         </a:rPr>
-                        <a:t>$9,300</a:t>
+                        <a:t>$4,650</a:t>
                       </a:r>
                       <a:endParaRPr lang="en-US" sz="1250" dirty="0">
                         <a:latin typeface="Arial" charset="0"/>
@@ -4152,7 +4947,7 @@
                       </a:endParaRPr>
                     </a:p>
                   </a:txBody>
-                  <a:tcPr marL="73152" marR="73152" marT="73152" marB="73152" anchor="ctr">
+                  <a:tcPr marL="64008" marR="64008" marT="64008" marB="64008" anchor="ctr">
                     <a:lnL w="9525" cap="flat" cmpd="sng" algn="ctr">
                       <a:solidFill>
                         <a:srgbClr val="DDDDDD"/>
@@ -4208,7 +5003,7 @@
                           <a:ea typeface="Arial" pitchFamily="34" charset="-122"/>
                           <a:cs typeface="Arial" pitchFamily="34" charset="-120"/>
                         </a:rPr>
-                        <a:t>$8,700</a:t>
+                        <a:t>$4,350</a:t>
                       </a:r>
                       <a:endParaRPr lang="en-US" sz="1250" dirty="0">
                         <a:latin typeface="Arial" charset="0"/>
@@ -4217,7 +5012,7 @@
                       </a:endParaRPr>
                     </a:p>
                   </a:txBody>
-                  <a:tcPr marL="73152" marR="73152" marT="73152" marB="73152" anchor="ctr">
+                  <a:tcPr marL="64008" marR="64008" marT="64008" marB="64008" anchor="ctr">
                     <a:lnL w="9525" cap="flat" cmpd="sng" algn="ctr">
                       <a:solidFill>
                         <a:srgbClr val="DDDDDD"/>
@@ -4273,7 +5068,7 @@
                           <a:ea typeface="Arial" pitchFamily="34" charset="-122"/>
                           <a:cs typeface="Arial" pitchFamily="34" charset="-120"/>
                         </a:rPr>
-                        <a:t>$8,100</a:t>
+                        <a:t>$4,050</a:t>
                       </a:r>
                       <a:endParaRPr lang="en-US" sz="1250" dirty="0">
                         <a:latin typeface="Arial" charset="0"/>
@@ -4282,7 +5077,7 @@
                       </a:endParaRPr>
                     </a:p>
                   </a:txBody>
-                  <a:tcPr marL="73152" marR="73152" marT="73152" marB="73152" anchor="ctr">
+                  <a:tcPr marL="64008" marR="64008" marT="64008" marB="64008" anchor="ctr">
                     <a:lnL w="9525" cap="flat" cmpd="sng" algn="ctr">
                       <a:solidFill>
                         <a:srgbClr val="DDDDDD"/>
@@ -4338,7 +5133,7 @@
                           <a:ea typeface="Arial" pitchFamily="34" charset="-122"/>
                           <a:cs typeface="Arial" pitchFamily="34" charset="-120"/>
                         </a:rPr>
-                        <a:t>$7,500</a:t>
+                        <a:t>$3,750</a:t>
                       </a:r>
                       <a:endParaRPr lang="en-US" sz="1250" dirty="0">
                         <a:latin typeface="Arial" charset="0"/>
@@ -4347,7 +5142,7 @@
                       </a:endParaRPr>
                     </a:p>
                   </a:txBody>
-                  <a:tcPr marL="73152" marR="73152" marT="73152" marB="73152" anchor="ctr">
+                  <a:tcPr marL="64008" marR="64008" marT="64008" marB="64008" anchor="ctr">
                     <a:lnL w="9525" cap="flat" cmpd="sng" algn="ctr">
                       <a:solidFill>
                         <a:srgbClr val="DDDDDD"/>
@@ -4387,7 +5182,7 @@
                   </a:tcPr>
                 </a:tc>
               </a:tr>
-              <a:tr h="548640">
+              <a:tr h="457200">
                 <a:tc>
                   <a:txBody>
                     <a:bodyPr/>
@@ -4405,7 +5200,7 @@
                           <a:ea typeface="Arial" pitchFamily="34" charset="-122"/>
                           <a:cs typeface="Arial" pitchFamily="34" charset="-120"/>
                         </a:rPr>
-                        <a:t>T^Rock net per job (after 50/50 PM split)</a:t>
+                        <a:t>T^Rock TOTAL net on the 10 leads</a:t>
                       </a:r>
                       <a:endParaRPr lang="en-US" sz="1200" dirty="0">
                         <a:latin typeface="Arial" charset="0"/>
@@ -4414,7 +5209,7 @@
                       </a:endParaRPr>
                     </a:p>
                   </a:txBody>
-                  <a:tcPr marL="73152" marR="73152" marT="73152" marB="73152" anchor="ctr">
+                  <a:tcPr marL="64008" marR="64008" marT="64008" marB="64008" anchor="ctr">
                     <a:lnL w="9525" cap="flat" cmpd="sng" algn="ctr">
                       <a:solidFill>
                         <a:srgbClr val="DDDDDD"/>
@@ -4470,7 +5265,7 @@
                           <a:ea typeface="Arial" pitchFamily="34" charset="-122"/>
                           <a:cs typeface="Arial" pitchFamily="34" charset="-120"/>
                         </a:rPr>
-                        <a:t>$4,950</a:t>
+                        <a:t>$9,900</a:t>
                       </a:r>
                       <a:endParaRPr lang="en-US" sz="1300" dirty="0">
                         <a:latin typeface="Arial" charset="0"/>
@@ -4479,7 +5274,7 @@
                       </a:endParaRPr>
                     </a:p>
                   </a:txBody>
-                  <a:tcPr marL="73152" marR="73152" marT="73152" marB="73152" anchor="ctr">
+                  <a:tcPr marL="64008" marR="64008" marT="64008" marB="64008" anchor="ctr">
                     <a:lnL w="9525" cap="flat" cmpd="sng" algn="ctr">
                       <a:solidFill>
                         <a:srgbClr val="DDDDDD"/>
@@ -4516,6 +5311,9 @@
                       <a:headEnd type="none" w="med" len="med"/>
                       <a:tailEnd type="none" w="med" len="med"/>
                     </a:lnB>
+                    <a:solidFill>
+                      <a:srgbClr val="FBEAEC"/>
+                    </a:solidFill>
                   </a:tcPr>
                 </a:tc>
                 <a:tc>
@@ -4535,7 +5333,7 @@
                           <a:ea typeface="Arial" pitchFamily="34" charset="-122"/>
                           <a:cs typeface="Arial" pitchFamily="34" charset="-120"/>
                         </a:rPr>
-                        <a:t>$4,650</a:t>
+                        <a:t>$18,600</a:t>
                       </a:r>
                       <a:endParaRPr lang="en-US" sz="1300" dirty="0">
                         <a:latin typeface="Arial" charset="0"/>
@@ -4544,7 +5342,7 @@
                       </a:endParaRPr>
                     </a:p>
                   </a:txBody>
-                  <a:tcPr marL="73152" marR="73152" marT="73152" marB="73152" anchor="ctr">
+                  <a:tcPr marL="64008" marR="64008" marT="64008" marB="64008" anchor="ctr">
                     <a:lnL w="9525" cap="flat" cmpd="sng" algn="ctr">
                       <a:solidFill>
                         <a:srgbClr val="DDDDDD"/>
@@ -4581,6 +5379,9 @@
                       <a:headEnd type="none" w="med" len="med"/>
                       <a:tailEnd type="none" w="med" len="med"/>
                     </a:lnB>
+                    <a:solidFill>
+                      <a:srgbClr val="FBEAEC"/>
+                    </a:solidFill>
                   </a:tcPr>
                 </a:tc>
                 <a:tc>
@@ -4600,7 +5401,7 @@
                           <a:ea typeface="Arial" pitchFamily="34" charset="-122"/>
                           <a:cs typeface="Arial" pitchFamily="34" charset="-120"/>
                         </a:rPr>
-                        <a:t>$4,350</a:t>
+                        <a:t>$26,100</a:t>
                       </a:r>
                       <a:endParaRPr lang="en-US" sz="1300" dirty="0">
                         <a:latin typeface="Arial" charset="0"/>
@@ -4609,7 +5410,7 @@
                       </a:endParaRPr>
                     </a:p>
                   </a:txBody>
-                  <a:tcPr marL="73152" marR="73152" marT="73152" marB="73152" anchor="ctr">
+                  <a:tcPr marL="64008" marR="64008" marT="64008" marB="64008" anchor="ctr">
                     <a:lnL w="9525" cap="flat" cmpd="sng" algn="ctr">
                       <a:solidFill>
                         <a:srgbClr val="DDDDDD"/>
@@ -4646,6 +5447,9 @@
                       <a:headEnd type="none" w="med" len="med"/>
                       <a:tailEnd type="none" w="med" len="med"/>
                     </a:lnB>
+                    <a:solidFill>
+                      <a:srgbClr val="FBEAEC"/>
+                    </a:solidFill>
                   </a:tcPr>
                 </a:tc>
                 <a:tc>
@@ -4665,7 +5469,7 @@
                           <a:ea typeface="Arial" pitchFamily="34" charset="-122"/>
                           <a:cs typeface="Arial" pitchFamily="34" charset="-120"/>
                         </a:rPr>
-                        <a:t>$4,050</a:t>
+                        <a:t>$32,400</a:t>
                       </a:r>
                       <a:endParaRPr lang="en-US" sz="1300" dirty="0">
                         <a:latin typeface="Arial" charset="0"/>
@@ -4674,7 +5478,7 @@
                       </a:endParaRPr>
                     </a:p>
                   </a:txBody>
-                  <a:tcPr marL="73152" marR="73152" marT="73152" marB="73152" anchor="ctr">
+                  <a:tcPr marL="64008" marR="64008" marT="64008" marB="64008" anchor="ctr">
                     <a:lnL w="9525" cap="flat" cmpd="sng" algn="ctr">
                       <a:solidFill>
                         <a:srgbClr val="DDDDDD"/>
@@ -4711,6 +5515,9 @@
                       <a:headEnd type="none" w="med" len="med"/>
                       <a:tailEnd type="none" w="med" len="med"/>
                     </a:lnB>
+                    <a:solidFill>
+                      <a:srgbClr val="FBEAEC"/>
+                    </a:solidFill>
                   </a:tcPr>
                 </a:tc>
                 <a:tc>
@@ -4730,7 +5537,7 @@
                           <a:ea typeface="Arial" pitchFamily="34" charset="-122"/>
                           <a:cs typeface="Arial" pitchFamily="34" charset="-120"/>
                         </a:rPr>
-                        <a:t>$3,750</a:t>
+                        <a:t>$37,500</a:t>
                       </a:r>
                       <a:endParaRPr lang="en-US" sz="1300" dirty="0">
                         <a:latin typeface="Arial" charset="0"/>
@@ -4739,7 +5546,7 @@
                       </a:endParaRPr>
                     </a:p>
                   </a:txBody>
-                  <a:tcPr marL="73152" marR="73152" marT="73152" marB="73152" anchor="ctr">
+                  <a:tcPr marL="64008" marR="64008" marT="64008" marB="64008" anchor="ctr">
                     <a:lnL w="9525" cap="flat" cmpd="sng" algn="ctr">
                       <a:solidFill>
                         <a:srgbClr val="DDDDDD"/>
@@ -4776,6 +5583,9 @@
                       <a:headEnd type="none" w="med" len="med"/>
                       <a:tailEnd type="none" w="med" len="med"/>
                     </a:lnB>
+                    <a:solidFill>
+                      <a:srgbClr val="FBEAEC"/>
+                    </a:solidFill>
                   </a:tcPr>
                 </a:tc>
               </a:tr>
@@ -4791,7 +5601,7 @@
         </p:nvSpPr>
         <p:spPr>
           <a:xfrm>
-            <a:off x="548640" y="4937760"/>
+            <a:off x="548640" y="4892040"/>
             <a:ext cx="11064240" cy="868680"/>
           </a:xfrm>
           <a:prstGeom prst="roundRect">
@@ -4813,8 +5623,8 @@
         </p:nvSpPr>
         <p:spPr>
           <a:xfrm>
-            <a:off x="868680" y="5074920"/>
-            <a:ext cx="10515600" cy="640080"/>
+            <a:off x="868680" y="5010912"/>
+            <a:ext cx="10515600" cy="658368"/>
           </a:xfrm>
           <a:prstGeom prst="rect">
             <a:avLst/>
@@ -4830,7 +5640,7 @@
               <a:buNone/>
             </a:pPr>
             <a:r>
-              <a:rPr lang="en-US" sz="1450" b="1" dirty="0">
+              <a:rPr lang="en-US" sz="1400" b="1" dirty="0">
                 <a:solidFill>
                   <a:srgbClr val="111111"/>
                 </a:solidFill>
@@ -4838,13 +5648,13 @@
                 <a:ea typeface="Arial" pitchFamily="34" charset="-122"/>
                 <a:cs typeface="Arial" pitchFamily="34" charset="-120"/>
               </a:rPr>
-              <a:t>Worst case for T^Rock is still $3,750 net per closed job </a:t>
+              <a:t>The “expensive” end of the slider is the one where T^Rock banks $37,500 on 10 leads instead of $9,900. </a:t>
             </a:r>
             <a:pPr indent="0" marL="0">
               <a:buNone/>
             </a:pPr>
             <a:r>
-              <a:rPr lang="en-US" sz="1450" dirty="0">
+              <a:rPr lang="en-US" sz="1400" dirty="0">
                 <a:solidFill>
                   <a:srgbClr val="2A2A2A"/>
                 </a:solidFill>
@@ -4852,9 +5662,9 @@
                 <a:ea typeface="Arial" pitchFamily="34" charset="-122"/>
                 <a:cs typeface="Arial" pitchFamily="34" charset="-120"/>
               </a:rPr>
-              <a:t>— and that case only exists in a quarter where every single scoped lead closed. The fee can never run ahead of collected cash.</a:t>
+              <a:t>The 10% fee only exists when all 10 closed and funded — it can never run ahead of collected cash.</a:t>
             </a:r>
-            <a:endParaRPr lang="en-US" sz="1450" dirty="0"/>
+            <a:endParaRPr lang="en-US" sz="1400" dirty="0"/>
           </a:p>
         </p:txBody>
       </p:sp>
@@ -4891,7 +5701,7 @@
                 <a:ea typeface="Arial" pitchFamily="34" charset="-122"/>
                 <a:cs typeface="Arial" pitchFamily="34" charset="-120"/>
               </a:rPr>
-              <a:t>Rates between tiers interpolate linearly. Close rate = closed &amp; collected jobs ÷ scoped leads, trailing quarter.</a:t>
+              <a:t>Total net = jobs closed (of 10) × net per closed job. Rates between tiers interpolate linearly. Close rate measured on a trailing quarter.</a:t>
             </a:r>
             <a:endParaRPr lang="en-US" sz="900" dirty="0"/>
           </a:p>

--- a/pitch/Commission-Plan.pptx
+++ b/pitch/Commission-Plan.pptx
@@ -12,9 +12,10 @@
     <p:sldId id="260" r:id="rId6"/>
     <p:sldId id="261" r:id="rId7"/>
     <p:sldId id="262" r:id="rId8"/>
+    <p:sldId id="263" r:id="rId9"/>
   </p:sldIdLst>
   <p:notesMasterIdLst>
-    <p:notesMasterId r:id="rId9"/>
+    <p:notesMasterId r:id="rId10"/>
   </p:notesMasterIdLst>
   <p:sldSz cx="12192000" cy="6858000"/>
   <p:notesSz cx="6858000" cy="12192000"/>
@@ -1342,6 +1343,94 @@
             <a:fld id="{F7021451-1387-4CA6-816F-3879F97B5CBC}" type="slidenum">
               <a:rPr lang="en-US"/>
               <a:t>7</a:t>
+            </a:fld>
+            <a:endParaRPr lang="en-US"/>
+          </a:p>
+        </p:txBody>
+      </p:sp>
+    </p:spTree>
+    <p:extLst>
+      <p:ext uri="{BB962C8B-B14F-4D97-AF65-F5344CB8AC3E}">
+        <p14:creationId xmlns:p14="http://schemas.microsoft.com/office/powerpoint/2010/main" val="1024086991"/>
+      </p:ext>
+    </p:extLst>
+  </p:cSld>
+  <p:clrMapOvr>
+    <a:masterClrMapping/>
+  </p:clrMapOvr>
+</p:notes>
+</file>
+
+<file path=ppt/notesSlides/notesSlide8.xml><?xml version="1.0" encoding="utf-8"?>
+<p:notes xmlns:a="http://schemas.openxmlformats.org/drawingml/2006/main" xmlns:r="http://schemas.openxmlformats.org/officeDocument/2006/relationships" xmlns:p="http://schemas.openxmlformats.org/presentationml/2006/main">
+  <p:cSld>
+    <p:spTree>
+      <p:nvGrpSpPr>
+        <p:cNvPr id="1" name=""/>
+        <p:cNvGrpSpPr/>
+        <p:nvPr/>
+      </p:nvGrpSpPr>
+      <p:grpSpPr>
+        <a:xfrm>
+          <a:off x="0" y="0"/>
+          <a:ext cx="0" cy="0"/>
+          <a:chOff x="0" y="0"/>
+          <a:chExt cx="0" cy="0"/>
+        </a:xfrm>
+      </p:grpSpPr>
+      <p:sp>
+        <p:nvSpPr>
+          <p:cNvPr id="2" name="Slide Image Placeholder 1"/>
+          <p:cNvSpPr>
+            <a:spLocks noGrp="1" noRot="1" noChangeAspect="1"/>
+          </p:cNvSpPr>
+          <p:nvPr>
+            <p:ph type="sldImg"/>
+          </p:nvPr>
+        </p:nvSpPr>
+        <p:spPr/>
+      </p:sp>
+      <p:sp>
+        <p:nvSpPr>
+          <p:cNvPr id="3" name="Notes Placeholder 2"/>
+          <p:cNvSpPr>
+            <a:spLocks noGrp="1"/>
+          </p:cNvSpPr>
+          <p:nvPr>
+            <p:ph type="body" idx="1"/>
+          </p:nvPr>
+        </p:nvSpPr>
+        <p:spPr/>
+        <p:txBody>
+          <a:bodyPr/>
+          <a:lstStyle/>
+          <a:p>
+            <a:r>
+              <a:rPr lang="en-US" dirty="0"/>
+              <a:t/>
+            </a:r>
+            <a:endParaRPr lang="en-US" dirty="0"/>
+          </a:p>
+        </p:txBody>
+      </p:sp>
+      <p:sp>
+        <p:nvSpPr>
+          <p:cNvPr id="4" name="Slide Number Placeholder 3"/>
+          <p:cNvSpPr>
+            <a:spLocks noGrp="1"/>
+          </p:cNvSpPr>
+          <p:nvPr>
+            <p:ph type="sldNum" sz="quarter" idx="10"/>
+          </p:nvPr>
+        </p:nvSpPr>
+        <p:spPr/>
+        <p:txBody>
+          <a:bodyPr/>
+          <a:lstStyle/>
+          <a:p>
+            <a:fld id="{F7021451-1387-4CA6-816F-3879F97B5CBC}" type="slidenum">
+              <a:rPr lang="en-US"/>
+              <a:t>8</a:t>
             </a:fld>
             <a:endParaRPr lang="en-US"/>
           </a:p>
@@ -5811,7 +5900,7 @@
                 <a:ea typeface="Arial" pitchFamily="34" charset="-122"/>
                 <a:cs typeface="Arial" pitchFamily="34" charset="-120"/>
               </a:rPr>
-              <a:t>Why the slider pays for itself</a:t>
+              <a:t>Where the slider comes from</a:t>
             </a:r>
             <a:endParaRPr lang="en-US" sz="3200" dirty="0"/>
           </a:p>
@@ -5825,7 +5914,7 @@
         </p:nvSpPr>
         <p:spPr>
           <a:xfrm>
-            <a:off x="548640" y="1078992"/>
+            <a:off x="548640" y="1097280"/>
             <a:ext cx="10881360" cy="365760"/>
           </a:xfrm>
           <a:prstGeom prst="rect">
@@ -5850,42 +5939,209 @@
                 <a:ea typeface="Arial" pitchFamily="34" charset="-122"/>
                 <a:cs typeface="Arial" pitchFamily="34" charset="-120"/>
               </a:rPr>
-              <a:t>Same 100 scoped leads, five close rates. The fee % rises — the pie rises much faster.</a:t>
+              <a:t>Both ends are anchored to prices the industry already pays. The slider just connects them.</a:t>
             </a:r>
             <a:endParaRPr lang="en-US" sz="1500" dirty="0"/>
           </a:p>
         </p:txBody>
       </p:sp>
-      <p:graphicFrame>
-        <p:nvGraphicFramePr>
-          <p:cNvPr id="4" name="Chart 0" descr=""/>
-          <p:cNvGraphicFramePr/>
-          <p:nvPr/>
-        </p:nvGraphicFramePr>
-        <p:xfrm>
-          <a:off x="548640" y="1600200"/>
-          <a:ext cx="11064240" cy="3749040"/>
-        </p:xfrm>
-        <a:graphic xmlns:a="http://schemas.openxmlformats.org/drawingml/2006/main">
-          <a:graphicData uri="http://schemas.openxmlformats.org/drawingml/2006/chart">
-            <c:chart xmlns:c="http://schemas.openxmlformats.org/drawingml/2006/chart" r:id="rId1"/>
-          </a:graphicData>
-        </a:graphic>
-      </p:graphicFrame>
-      <p:sp>
-        <p:nvSpPr>
-          <p:cNvPr id="5" name="Shape 2"/>
-          <p:cNvSpPr/>
-          <p:nvPr/>
-        </p:nvSpPr>
-        <p:spPr>
-          <a:xfrm>
-            <a:off x="548640" y="5532120"/>
-            <a:ext cx="11064240" cy="731520"/>
+      <p:sp>
+        <p:nvSpPr>
+          <p:cNvPr id="4" name="Shape 2"/>
+          <p:cNvSpPr/>
+          <p:nvPr/>
+        </p:nvSpPr>
+        <p:spPr>
+          <a:xfrm>
+            <a:off x="548640" y="1645920"/>
+            <a:ext cx="5394960" cy="3200400"/>
           </a:xfrm>
           <a:prstGeom prst="roundRect">
             <a:avLst>
-              <a:gd name="adj" fmla="val 7500"/>
+              <a:gd name="adj" fmla="val 2286"/>
+            </a:avLst>
+          </a:prstGeom>
+          <a:solidFill>
+            <a:srgbClr val="F5F5F5"/>
+          </a:solidFill>
+          <a:ln/>
+        </p:spPr>
+      </p:sp>
+      <p:sp>
+        <p:nvSpPr>
+          <p:cNvPr id="5" name="Shape 3"/>
+          <p:cNvSpPr/>
+          <p:nvPr/>
+        </p:nvSpPr>
+        <p:spPr>
+          <a:xfrm>
+            <a:off x="822960" y="1920240"/>
+            <a:ext cx="640080" cy="640080"/>
+          </a:xfrm>
+          <a:prstGeom prst="ellipse">
+            <a:avLst/>
+          </a:prstGeom>
+          <a:solidFill>
+            <a:srgbClr val="C8102E"/>
+          </a:solidFill>
+          <a:ln/>
+        </p:spPr>
+      </p:sp>
+      <p:pic>
+        <p:nvPicPr>
+          <p:cNvPr id="6" name="Image 0" descr="preencoded.png">    </p:cNvPr>
+          <p:cNvPicPr>
+            <a:picLocks noChangeAspect="1"/>
+          </p:cNvPicPr>
+          <p:nvPr/>
+        </p:nvPicPr>
+        <p:blipFill>
+          <a:blip r:embed="rId1"/>
+          <a:stretch>
+            <a:fillRect/>
+          </a:stretch>
+        </p:blipFill>
+        <p:spPr>
+          <a:xfrm>
+            <a:off x="989381" y="2086661"/>
+            <a:ext cx="307238" cy="307238"/>
+          </a:xfrm>
+          <a:prstGeom prst="rect">
+            <a:avLst/>
+          </a:prstGeom>
+        </p:spPr>
+      </p:pic>
+      <p:sp>
+        <p:nvSpPr>
+          <p:cNvPr id="7" name="Text 4"/>
+          <p:cNvSpPr/>
+          <p:nvPr/>
+        </p:nvSpPr>
+        <p:spPr>
+          <a:xfrm>
+            <a:off x="1645920" y="2057400"/>
+            <a:ext cx="4114800" cy="365760"/>
+          </a:xfrm>
+          <a:prstGeom prst="rect">
+            <a:avLst/>
+          </a:prstGeom>
+          <a:noFill/>
+          <a:ln/>
+        </p:spPr>
+        <p:txBody>
+          <a:bodyPr wrap="square" lIns="0" tIns="0" rIns="0" bIns="0" rtlCol="0" anchor="ctr"/>
+          <a:lstStyle/>
+          <a:p>
+            <a:pPr indent="0" marL="0">
+              <a:buNone/>
+            </a:pPr>
+            <a:r>
+              <a:rPr lang="en-US" sz="1700" b="1" dirty="0">
+                <a:solidFill>
+                  <a:srgbClr val="111111"/>
+                </a:solidFill>
+                <a:latin typeface="Arial" pitchFamily="34" charset="0"/>
+                <a:ea typeface="Arial" pitchFamily="34" charset="-122"/>
+                <a:cs typeface="Arial" pitchFamily="34" charset="-120"/>
+              </a:rPr>
+              <a:t>The floor — raw leads</a:t>
+            </a:r>
+            <a:endParaRPr lang="en-US" sz="1700" dirty="0"/>
+          </a:p>
+        </p:txBody>
+      </p:sp>
+      <p:sp>
+        <p:nvSpPr>
+          <p:cNvPr id="8" name="Text 5"/>
+          <p:cNvSpPr/>
+          <p:nvPr/>
+        </p:nvSpPr>
+        <p:spPr>
+          <a:xfrm>
+            <a:off x="822960" y="2697480"/>
+            <a:ext cx="1828800" cy="822960"/>
+          </a:xfrm>
+          <a:prstGeom prst="rect">
+            <a:avLst/>
+          </a:prstGeom>
+          <a:noFill/>
+          <a:ln/>
+        </p:spPr>
+        <p:txBody>
+          <a:bodyPr wrap="square" lIns="0" tIns="0" rIns="0" bIns="0" rtlCol="0" anchor="ctr"/>
+          <a:lstStyle/>
+          <a:p>
+            <a:pPr indent="0" marL="0">
+              <a:buNone/>
+            </a:pPr>
+            <a:r>
+              <a:rPr lang="en-US" sz="4800" b="1" dirty="0">
+                <a:solidFill>
+                  <a:srgbClr val="C8102E"/>
+                </a:solidFill>
+                <a:latin typeface="Arial" pitchFamily="34" charset="0"/>
+                <a:ea typeface="Arial" pitchFamily="34" charset="-122"/>
+                <a:cs typeface="Arial" pitchFamily="34" charset="-120"/>
+              </a:rPr>
+              <a:t>2%</a:t>
+            </a:r>
+            <a:endParaRPr lang="en-US" sz="4800" dirty="0"/>
+          </a:p>
+        </p:txBody>
+      </p:sp>
+      <p:sp>
+        <p:nvSpPr>
+          <p:cNvPr id="9" name="Text 6"/>
+          <p:cNvSpPr/>
+          <p:nvPr/>
+        </p:nvSpPr>
+        <p:spPr>
+          <a:xfrm>
+            <a:off x="822960" y="3611880"/>
+            <a:ext cx="4846320" cy="1097280"/>
+          </a:xfrm>
+          <a:prstGeom prst="rect">
+            <a:avLst/>
+          </a:prstGeom>
+          <a:noFill/>
+          <a:ln/>
+        </p:spPr>
+        <p:txBody>
+          <a:bodyPr wrap="square" lIns="0" tIns="0" rIns="0" bIns="0" rtlCol="0" anchor="ctr"/>
+          <a:lstStyle/>
+          <a:p>
+            <a:pPr indent="0" marL="0">
+              <a:buNone/>
+            </a:pPr>
+            <a:r>
+              <a:rPr lang="en-US" sz="1250" dirty="0">
+                <a:solidFill>
+                  <a:srgbClr val="2A2A2A"/>
+                </a:solidFill>
+                <a:latin typeface="Arial" pitchFamily="34" charset="0"/>
+                <a:ea typeface="Arial" pitchFamily="34" charset="-122"/>
+                <a:cs typeface="Arial" pitchFamily="34" charset="-120"/>
+              </a:rPr>
+              <a:t>Scoped leads where most won't close. The fee collects on the few that do — priced like professional scope work, paid only on results. At a 20% close rate, 8 of every 10 scopes were written for free.</a:t>
+            </a:r>
+            <a:endParaRPr lang="en-US" sz="1250" dirty="0"/>
+          </a:p>
+        </p:txBody>
+      </p:sp>
+      <p:sp>
+        <p:nvSpPr>
+          <p:cNvPr id="10" name="Shape 7"/>
+          <p:cNvSpPr/>
+          <p:nvPr/>
+        </p:nvSpPr>
+        <p:spPr>
+          <a:xfrm>
+            <a:off x="6217920" y="1645920"/>
+            <a:ext cx="5394960" cy="3200400"/>
+          </a:xfrm>
+          <a:prstGeom prst="roundRect">
+            <a:avLst>
+              <a:gd name="adj" fmla="val 2286"/>
             </a:avLst>
           </a:prstGeom>
           <a:solidFill>
@@ -5896,14 +6152,58 @@
       </p:sp>
       <p:sp>
         <p:nvSpPr>
-          <p:cNvPr id="6" name="Text 3"/>
-          <p:cNvSpPr/>
-          <p:nvPr/>
-        </p:nvSpPr>
-        <p:spPr>
-          <a:xfrm>
-            <a:off x="868680" y="5650992"/>
-            <a:ext cx="10515600" cy="502920"/>
+          <p:cNvPr id="11" name="Shape 8"/>
+          <p:cNvSpPr/>
+          <p:nvPr/>
+        </p:nvSpPr>
+        <p:spPr>
+          <a:xfrm>
+            <a:off x="6492240" y="1920240"/>
+            <a:ext cx="640080" cy="640080"/>
+          </a:xfrm>
+          <a:prstGeom prst="ellipse">
+            <a:avLst/>
+          </a:prstGeom>
+          <a:solidFill>
+            <a:srgbClr val="C8102E"/>
+          </a:solidFill>
+          <a:ln/>
+        </p:spPr>
+      </p:sp>
+      <p:pic>
+        <p:nvPicPr>
+          <p:cNvPr id="12" name="Image 1" descr="preencoded.png">    </p:cNvPr>
+          <p:cNvPicPr>
+            <a:picLocks noChangeAspect="1"/>
+          </p:cNvPicPr>
+          <p:nvPr/>
+        </p:nvPicPr>
+        <p:blipFill>
+          <a:blip r:embed="rId2"/>
+          <a:stretch>
+            <a:fillRect/>
+          </a:stretch>
+        </p:blipFill>
+        <p:spPr>
+          <a:xfrm>
+            <a:off x="6658661" y="2086661"/>
+            <a:ext cx="307238" cy="307238"/>
+          </a:xfrm>
+          <a:prstGeom prst="rect">
+            <a:avLst/>
+          </a:prstGeom>
+        </p:spPr>
+      </p:pic>
+      <p:sp>
+        <p:nvSpPr>
+          <p:cNvPr id="13" name="Text 9"/>
+          <p:cNvSpPr/>
+          <p:nvPr/>
+        </p:nvSpPr>
+        <p:spPr>
+          <a:xfrm>
+            <a:off x="7315200" y="2057400"/>
+            <a:ext cx="4114800" cy="365760"/>
           </a:xfrm>
           <a:prstGeom prst="rect">
             <a:avLst/>
@@ -5919,7 +6219,7 @@
               <a:buNone/>
             </a:pPr>
             <a:r>
-              <a:rPr lang="en-US" sz="1500" b="1" dirty="0">
+              <a:rPr lang="en-US" sz="1700" b="1" dirty="0">
                 <a:solidFill>
                   <a:srgbClr val="FFFFFF"/>
                 </a:solidFill>
@@ -5927,29 +6227,168 @@
                 <a:ea typeface="Arial" pitchFamily="34" charset="-122"/>
                 <a:cs typeface="Arial" pitchFamily="34" charset="-120"/>
               </a:rPr>
-              <a:t>Top of the slider = T^Rock's take is up nearly 4×. </a:t>
-            </a:r>
+              <a:t>The ceiling — a done deal</a:t>
+            </a:r>
+            <a:endParaRPr lang="en-US" sz="1700" dirty="0"/>
+          </a:p>
+        </p:txBody>
+      </p:sp>
+      <p:sp>
+        <p:nvSpPr>
+          <p:cNvPr id="14" name="Text 10"/>
+          <p:cNvSpPr/>
+          <p:nvPr/>
+        </p:nvSpPr>
+        <p:spPr>
+          <a:xfrm>
+            <a:off x="6492240" y="2697480"/>
+            <a:ext cx="2194560" cy="822960"/>
+          </a:xfrm>
+          <a:prstGeom prst="rect">
+            <a:avLst/>
+          </a:prstGeom>
+          <a:noFill/>
+          <a:ln/>
+        </p:spPr>
+        <p:txBody>
+          <a:bodyPr wrap="square" lIns="0" tIns="0" rIns="0" bIns="0" rtlCol="0" anchor="ctr"/>
+          <a:lstStyle/>
+          <a:p>
             <a:pPr indent="0" marL="0">
               <a:buNone/>
             </a:pPr>
             <a:r>
-              <a:rPr lang="en-US" sz="1500" dirty="0">
+              <a:rPr lang="en-US" sz="4800" b="1" dirty="0">
                 <a:solidFill>
-                  <a:srgbClr val="E6E6E6"/>
+                  <a:srgbClr val="C8102E"/>
                 </a:solidFill>
                 <a:latin typeface="Arial" pitchFamily="34" charset="0"/>
                 <a:ea typeface="Arial" pitchFamily="34" charset="-122"/>
                 <a:cs typeface="Arial" pitchFamily="34" charset="-120"/>
               </a:rPr>
-              <a:t>The higher fee is only ever paid out of jobs that already closed — the plan cannot cost money in a bad quarter.</a:t>
-            </a:r>
-            <a:endParaRPr lang="en-US" sz="1500" dirty="0"/>
-          </a:p>
-        </p:txBody>
-      </p:sp>
-      <p:sp>
-        <p:nvSpPr>
-          <p:cNvPr id="7" name="Text 4"/>
+              <a:t>10%</a:t>
+            </a:r>
+            <a:endParaRPr lang="en-US" sz="4800" dirty="0"/>
+          </a:p>
+        </p:txBody>
+      </p:sp>
+      <p:sp>
+        <p:nvSpPr>
+          <p:cNvPr id="15" name="Text 11"/>
+          <p:cNvSpPr/>
+          <p:nvPr/>
+        </p:nvSpPr>
+        <p:spPr>
+          <a:xfrm>
+            <a:off x="6492240" y="3611880"/>
+            <a:ext cx="4846320" cy="1097280"/>
+          </a:xfrm>
+          <a:prstGeom prst="rect">
+            <a:avLst/>
+          </a:prstGeom>
+          <a:noFill/>
+          <a:ln/>
+        </p:spPr>
+        <p:txBody>
+          <a:bodyPr wrap="square" lIns="0" tIns="0" rIns="0" bIns="0" rtlCol="0" anchor="ctr"/>
+          <a:lstStyle/>
+          <a:p>
+            <a:pPr indent="0" marL="0">
+              <a:buNone/>
+            </a:pPr>
+            <a:r>
+              <a:rPr lang="en-US" sz="1250" dirty="0">
+                <a:solidFill>
+                  <a:srgbClr val="E0E0E0"/>
+                </a:solidFill>
+                <a:latin typeface="Arial" pitchFamily="34" charset="0"/>
+                <a:ea typeface="Arial" pitchFamily="34" charset="-122"/>
+                <a:cs typeface="Arial" pitchFamily="34" charset="-120"/>
+              </a:rPr>
+              <a:t>A lead that closes 100% of the time is a signed contract changing hands. That's a referral — and 10% of contract value is the standard referral fee. Nobody blinks at 10% for a job that's already sold.</a:t>
+            </a:r>
+            <a:endParaRPr lang="en-US" sz="1250" dirty="0"/>
+          </a:p>
+        </p:txBody>
+      </p:sp>
+      <p:sp>
+        <p:nvSpPr>
+          <p:cNvPr id="16" name="Shape 12"/>
+          <p:cNvSpPr/>
+          <p:nvPr/>
+        </p:nvSpPr>
+        <p:spPr>
+          <a:xfrm>
+            <a:off x="548640" y="5120640"/>
+            <a:ext cx="11064240" cy="914400"/>
+          </a:xfrm>
+          <a:prstGeom prst="roundRect">
+            <a:avLst>
+              <a:gd name="adj" fmla="val 6000"/>
+            </a:avLst>
+          </a:prstGeom>
+          <a:solidFill>
+            <a:srgbClr val="FBEAEC"/>
+          </a:solidFill>
+          <a:ln/>
+        </p:spPr>
+      </p:sp>
+      <p:sp>
+        <p:nvSpPr>
+          <p:cNvPr id="17" name="Text 13"/>
+          <p:cNvSpPr/>
+          <p:nvPr/>
+        </p:nvSpPr>
+        <p:spPr>
+          <a:xfrm>
+            <a:off x="868680" y="5230368"/>
+            <a:ext cx="10515600" cy="713232"/>
+          </a:xfrm>
+          <a:prstGeom prst="rect">
+            <a:avLst/>
+          </a:prstGeom>
+          <a:noFill/>
+          <a:ln/>
+        </p:spPr>
+        <p:txBody>
+          <a:bodyPr wrap="square" lIns="0" tIns="0" rIns="0" bIns="0" rtlCol="0" anchor="ctr"/>
+          <a:lstStyle/>
+          <a:p>
+            <a:pPr indent="0" marL="0">
+              <a:buNone/>
+            </a:pPr>
+            <a:r>
+              <a:rPr lang="en-US" sz="1400" b="1" dirty="0">
+                <a:solidFill>
+                  <a:srgbClr val="111111"/>
+                </a:solidFill>
+                <a:latin typeface="Arial" pitchFamily="34" charset="0"/>
+                <a:ea typeface="Arial" pitchFamily="34" charset="-122"/>
+                <a:cs typeface="Arial" pitchFamily="34" charset="-120"/>
+              </a:rPr>
+              <a:t>Everything between is interpolation. </a:t>
+            </a:r>
+            <a:pPr indent="0" marL="0">
+              <a:buNone/>
+            </a:pPr>
+            <a:r>
+              <a:rPr lang="en-US" sz="1400" dirty="0">
+                <a:solidFill>
+                  <a:srgbClr val="2A2A2A"/>
+                </a:solidFill>
+                <a:latin typeface="Arial" pitchFamily="34" charset="0"/>
+                <a:ea typeface="Arial" pitchFamily="34" charset="-122"/>
+                <a:cs typeface="Arial" pitchFamily="34" charset="-120"/>
+              </a:rPr>
+              <a:t>The quarter's actual close rate measures how pre-sold the leads really were, and the fee settles to match — on results, not promises. The slider doesn't invent a price; it connects two prices the industry already accepts.</a:t>
+            </a:r>
+            <a:endParaRPr lang="en-US" sz="1400" dirty="0"/>
+          </a:p>
+        </p:txBody>
+      </p:sp>
+      <p:sp>
+        <p:nvSpPr>
+          <p:cNvPr id="18" name="Text 14"/>
           <p:cNvSpPr/>
           <p:nvPr/>
         </p:nvSpPr>
@@ -5980,7 +6419,7 @@
                 <a:ea typeface="Arial" pitchFamily="34" charset="-122"/>
                 <a:cs typeface="Arial" pitchFamily="34" charset="-120"/>
               </a:rPr>
-              <a:t>Per closed job: $30,000 × 35% margin, less slider fee, split 50/50 with the PM. 100 scoped leads held constant across scenarios.</a:t>
+              <a:t>Referral benchmark: ~10% of contract value is the customary fee for handed-off, ready-to-sign work in residential contracting.</a:t>
             </a:r>
             <a:endParaRPr lang="en-US" sz="900" dirty="0"/>
           </a:p>
@@ -5988,7 +6427,7 @@
       </p:sp>
       <p:sp>
         <p:nvSpPr>
-          <p:cNvPr id="8" name="Text 5"/>
+          <p:cNvPr id="19" name="Text 15"/>
           <p:cNvSpPr/>
           <p:nvPr/>
         </p:nvSpPr>
@@ -6090,7 +6529,7 @@
                 <a:ea typeface="Arial" pitchFamily="34" charset="-122"/>
                 <a:cs typeface="Arial" pitchFamily="34" charset="-120"/>
               </a:rPr>
-              <a:t>Two ways to base it — pick one, put it in writing</a:t>
+              <a:t>Why the slider pays for itself</a:t>
             </a:r>
             <a:endParaRPr lang="en-US" sz="3200" dirty="0"/>
           </a:p>
@@ -6098,80 +6537,14 @@
       </p:sp>
       <p:sp>
         <p:nvSpPr>
-          <p:cNvPr id="3" name="Shape 1"/>
-          <p:cNvSpPr/>
-          <p:nvPr/>
-        </p:nvSpPr>
-        <p:spPr>
-          <a:xfrm>
-            <a:off x="548640" y="1371600"/>
-            <a:ext cx="5394960" cy="3977640"/>
-          </a:xfrm>
-          <a:prstGeom prst="roundRect">
-            <a:avLst>
-              <a:gd name="adj" fmla="val 1839"/>
-            </a:avLst>
-          </a:prstGeom>
-          <a:solidFill>
-            <a:srgbClr val="F5F5F5"/>
-          </a:solidFill>
-          <a:ln/>
-        </p:spPr>
-      </p:sp>
-      <p:sp>
-        <p:nvSpPr>
-          <p:cNvPr id="4" name="Shape 2"/>
-          <p:cNvSpPr/>
-          <p:nvPr/>
-        </p:nvSpPr>
-        <p:spPr>
-          <a:xfrm>
-            <a:off x="822960" y="1645920"/>
-            <a:ext cx="640080" cy="640080"/>
-          </a:xfrm>
-          <a:prstGeom prst="ellipse">
-            <a:avLst/>
-          </a:prstGeom>
-          <a:solidFill>
-            <a:srgbClr val="C8102E"/>
-          </a:solidFill>
-          <a:ln/>
-        </p:spPr>
-      </p:sp>
-      <p:pic>
-        <p:nvPicPr>
-          <p:cNvPr id="5" name="Image 0" descr="preencoded.png">    </p:cNvPr>
-          <p:cNvPicPr>
-            <a:picLocks noChangeAspect="1"/>
-          </p:cNvPicPr>
-          <p:nvPr/>
-        </p:nvPicPr>
-        <p:blipFill>
-          <a:blip r:embed="rId1"/>
-          <a:stretch>
-            <a:fillRect/>
-          </a:stretch>
-        </p:blipFill>
-        <p:spPr>
-          <a:xfrm>
-            <a:off x="989381" y="1812341"/>
-            <a:ext cx="307238" cy="307238"/>
-          </a:xfrm>
-          <a:prstGeom prst="rect">
-            <a:avLst/>
-          </a:prstGeom>
-        </p:spPr>
-      </p:pic>
-      <p:sp>
-        <p:nvSpPr>
-          <p:cNvPr id="6" name="Text 3"/>
-          <p:cNvSpPr/>
-          <p:nvPr/>
-        </p:nvSpPr>
-        <p:spPr>
-          <a:xfrm>
-            <a:off x="1645920" y="1664208"/>
-            <a:ext cx="4114800" cy="365760"/>
+          <p:cNvPr id="3" name="Text 1"/>
+          <p:cNvSpPr/>
+          <p:nvPr/>
+        </p:nvSpPr>
+        <p:spPr>
+          <a:xfrm>
+            <a:off x="548640" y="1078992"/>
+            <a:ext cx="10881360" cy="365760"/>
           </a:xfrm>
           <a:prstGeom prst="rect">
             <a:avLst/>
@@ -6187,30 +6560,68 @@
               <a:buNone/>
             </a:pPr>
             <a:r>
-              <a:rPr lang="en-US" sz="1700" b="1" dirty="0">
+              <a:rPr lang="en-US" sz="1500" dirty="0">
                 <a:solidFill>
-                  <a:srgbClr val="111111"/>
+                  <a:srgbClr val="6E6E6E"/>
                 </a:solidFill>
                 <a:latin typeface="Arial" pitchFamily="34" charset="0"/>
                 <a:ea typeface="Arial" pitchFamily="34" charset="-122"/>
                 <a:cs typeface="Arial" pitchFamily="34" charset="-120"/>
               </a:rPr>
-              <a:t>Option A — % of RCV</a:t>
-            </a:r>
-            <a:endParaRPr lang="en-US" sz="1700" dirty="0"/>
-          </a:p>
-        </p:txBody>
-      </p:sp>
-      <p:sp>
-        <p:nvSpPr>
-          <p:cNvPr id="7" name="Text 4"/>
-          <p:cNvSpPr/>
-          <p:nvPr/>
-        </p:nvSpPr>
-        <p:spPr>
-          <a:xfrm>
-            <a:off x="1645920" y="2048256"/>
-            <a:ext cx="4114800" cy="274320"/>
+              <a:t>Same 100 scoped leads, five close rates. The fee % rises — the pie rises much faster.</a:t>
+            </a:r>
+            <a:endParaRPr lang="en-US" sz="1500" dirty="0"/>
+          </a:p>
+        </p:txBody>
+      </p:sp>
+      <p:graphicFrame>
+        <p:nvGraphicFramePr>
+          <p:cNvPr id="4" name="Chart 0" descr=""/>
+          <p:cNvGraphicFramePr/>
+          <p:nvPr/>
+        </p:nvGraphicFramePr>
+        <p:xfrm>
+          <a:off x="548640" y="1600200"/>
+          <a:ext cx="11064240" cy="3749040"/>
+        </p:xfrm>
+        <a:graphic xmlns:a="http://schemas.openxmlformats.org/drawingml/2006/main">
+          <a:graphicData uri="http://schemas.openxmlformats.org/drawingml/2006/chart">
+            <c:chart xmlns:c="http://schemas.openxmlformats.org/drawingml/2006/chart" r:id="rId1"/>
+          </a:graphicData>
+        </a:graphic>
+      </p:graphicFrame>
+      <p:sp>
+        <p:nvSpPr>
+          <p:cNvPr id="5" name="Shape 2"/>
+          <p:cNvSpPr/>
+          <p:nvPr/>
+        </p:nvSpPr>
+        <p:spPr>
+          <a:xfrm>
+            <a:off x="548640" y="5532120"/>
+            <a:ext cx="11064240" cy="731520"/>
+          </a:xfrm>
+          <a:prstGeom prst="roundRect">
+            <a:avLst>
+              <a:gd name="adj" fmla="val 7500"/>
+            </a:avLst>
+          </a:prstGeom>
+          <a:solidFill>
+            <a:srgbClr val="111111"/>
+          </a:solidFill>
+          <a:ln/>
+        </p:spPr>
+      </p:sp>
+      <p:sp>
+        <p:nvSpPr>
+          <p:cNvPr id="6" name="Text 3"/>
+          <p:cNvSpPr/>
+          <p:nvPr/>
+        </p:nvSpPr>
+        <p:spPr>
+          <a:xfrm>
+            <a:off x="868680" y="5650992"/>
+            <a:ext cx="10515600" cy="502920"/>
           </a:xfrm>
           <a:prstGeom prst="rect">
             <a:avLst/>
@@ -6226,476 +6637,76 @@
               <a:buNone/>
             </a:pPr>
             <a:r>
-              <a:rPr lang="en-US" sz="1150" i="1" dirty="0">
+              <a:rPr lang="en-US" sz="1500" b="1" dirty="0">
                 <a:solidFill>
-                  <a:srgbClr val="C8102E"/>
+                  <a:srgbClr val="FFFFFF"/>
                 </a:solidFill>
                 <a:latin typeface="Arial" pitchFamily="34" charset="0"/>
                 <a:ea typeface="Arial" pitchFamily="34" charset="-122"/>
                 <a:cs typeface="Arial" pitchFamily="34" charset="-120"/>
               </a:rPr>
-              <a:t>the numbers shown so far</a:t>
-            </a:r>
-            <a:endParaRPr lang="en-US" sz="1150" dirty="0"/>
-          </a:p>
-        </p:txBody>
-      </p:sp>
-      <p:sp>
-        <p:nvSpPr>
-          <p:cNvPr id="8" name="Text 5"/>
-          <p:cNvSpPr/>
-          <p:nvPr/>
-        </p:nvSpPr>
-        <p:spPr>
-          <a:xfrm>
-            <a:off x="868680" y="2514600"/>
-            <a:ext cx="4754880" cy="2651760"/>
-          </a:xfrm>
-          <a:prstGeom prst="rect">
-            <a:avLst/>
-          </a:prstGeom>
-          <a:noFill/>
-          <a:ln/>
-        </p:spPr>
-        <p:txBody>
-          <a:bodyPr wrap="square" lIns="0" tIns="0" rIns="0" bIns="0" rtlCol="0" anchor="ctr"/>
-          <a:lstStyle/>
-          <a:p>
-            <a:pPr marL="342900" indent="-342900">
-              <a:spcAft>
-                <a:spcPts val="800"/>
-              </a:spcAft>
-              <a:buSzPct val="100000"/>
-              <a:buChar char="•"/>
+              <a:t>Top of the slider = T^Rock's take is up nearly 4×. </a:t>
+            </a:r>
+            <a:pPr indent="0" marL="0">
+              <a:buNone/>
             </a:pPr>
             <a:r>
-              <a:rPr lang="en-US" sz="1250" dirty="0">
+              <a:rPr lang="en-US" sz="1500" dirty="0">
                 <a:solidFill>
-                  <a:srgbClr val="2A2A2A"/>
+                  <a:srgbClr val="E6E6E6"/>
                 </a:solidFill>
                 <a:latin typeface="Arial" pitchFamily="34" charset="0"/>
                 <a:ea typeface="Arial" pitchFamily="34" charset="-122"/>
                 <a:cs typeface="Arial" pitchFamily="34" charset="-120"/>
               </a:rPr>
-              <a:t>Verified straight off the carrier paperwork — no accounting disputes, ever</a:t>
-            </a:r>
-            <a:endParaRPr lang="en-US" sz="1250" dirty="0"/>
-          </a:p>
-          <a:p>
-            <a:pPr marL="342900" indent="-342900">
-              <a:spcAft>
-                <a:spcPts val="800"/>
-              </a:spcAft>
-              <a:buSzPct val="100000"/>
-              <a:buChar char="•"/>
+              <a:t>The higher fee is only ever paid out of jobs that already closed — the plan cannot cost money in a bad quarter.</a:t>
+            </a:r>
+            <a:endParaRPr lang="en-US" sz="1500" dirty="0"/>
+          </a:p>
+        </p:txBody>
+      </p:sp>
+      <p:sp>
+        <p:nvSpPr>
+          <p:cNvPr id="7" name="Text 4"/>
+          <p:cNvSpPr/>
+          <p:nvPr/>
+        </p:nvSpPr>
+        <p:spPr>
+          <a:xfrm>
+            <a:off x="548640" y="6473952"/>
+            <a:ext cx="9601200" cy="274320"/>
+          </a:xfrm>
+          <a:prstGeom prst="rect">
+            <a:avLst/>
+          </a:prstGeom>
+          <a:noFill/>
+          <a:ln/>
+        </p:spPr>
+        <p:txBody>
+          <a:bodyPr wrap="square" lIns="0" tIns="0" rIns="0" bIns="0" rtlCol="0" anchor="ctr"/>
+          <a:lstStyle/>
+          <a:p>
+            <a:pPr indent="0" marL="0">
+              <a:buNone/>
             </a:pPr>
             <a:r>
-              <a:rPr lang="en-US" sz="1250" dirty="0">
+              <a:rPr lang="en-US" sz="900" dirty="0">
                 <a:solidFill>
-                  <a:srgbClr val="2A2A2A"/>
+                  <a:srgbClr val="6E6E6E"/>
                 </a:solidFill>
                 <a:latin typeface="Arial" pitchFamily="34" charset="0"/>
                 <a:ea typeface="Arial" pitchFamily="34" charset="-122"/>
                 <a:cs typeface="Arial" pitchFamily="34" charset="-120"/>
               </a:rPr>
-              <a:t>Insulated from cost overruns neither side controls</a:t>
-            </a:r>
-            <a:endParaRPr lang="en-US" sz="1250" dirty="0"/>
-          </a:p>
-          <a:p>
-            <a:pPr marL="342900" indent="-342900">
-              <a:spcAft>
-                <a:spcPts val="800"/>
-              </a:spcAft>
-              <a:buSzPct val="100000"/>
-              <a:buChar char="•"/>
-            </a:pPr>
-            <a:r>
-              <a:rPr lang="en-US" sz="1250" dirty="0">
-                <a:solidFill>
-                  <a:srgbClr val="2A2A2A"/>
-                </a:solidFill>
-                <a:latin typeface="Arial" pitchFamily="34" charset="0"/>
-                <a:ea typeface="Arial" pitchFamily="34" charset="-122"/>
-                <a:cs typeface="Arial" pitchFamily="34" charset="-120"/>
-              </a:rPr>
-              <a:t>Slider band: 2% → 10% of RCV</a:t>
-            </a:r>
-            <a:endParaRPr lang="en-US" sz="1250" dirty="0"/>
-          </a:p>
-          <a:p>
-            <a:pPr marL="342900" indent="-342900">
-              <a:buSzPct val="100000"/>
-              <a:buChar char="•"/>
-            </a:pPr>
-            <a:r>
-              <a:rPr lang="en-US" sz="1250" dirty="0">
-                <a:solidFill>
-                  <a:srgbClr val="2A2A2A"/>
-                </a:solidFill>
-                <a:latin typeface="Arial" pitchFamily="34" charset="0"/>
-                <a:ea typeface="Arial" pitchFamily="34" charset="-122"/>
-                <a:cs typeface="Arial" pitchFamily="34" charset="-120"/>
-              </a:rPr>
-              <a:t>At 50% close: 5% × $30,000 = $1,500 per closed job</a:t>
-            </a:r>
-            <a:endParaRPr lang="en-US" sz="1250" dirty="0"/>
-          </a:p>
-        </p:txBody>
-      </p:sp>
-      <p:sp>
-        <p:nvSpPr>
-          <p:cNvPr id="9" name="Shape 6"/>
-          <p:cNvSpPr/>
-          <p:nvPr/>
-        </p:nvSpPr>
-        <p:spPr>
-          <a:xfrm>
-            <a:off x="6217920" y="1371600"/>
-            <a:ext cx="5394960" cy="3977640"/>
-          </a:xfrm>
-          <a:prstGeom prst="roundRect">
-            <a:avLst>
-              <a:gd name="adj" fmla="val 1839"/>
-            </a:avLst>
-          </a:prstGeom>
-          <a:solidFill>
-            <a:srgbClr val="F5F5F5"/>
-          </a:solidFill>
-          <a:ln/>
-        </p:spPr>
-      </p:sp>
-      <p:sp>
-        <p:nvSpPr>
-          <p:cNvPr id="10" name="Shape 7"/>
-          <p:cNvSpPr/>
-          <p:nvPr/>
-        </p:nvSpPr>
-        <p:spPr>
-          <a:xfrm>
-            <a:off x="6492240" y="1645920"/>
-            <a:ext cx="640080" cy="640080"/>
-          </a:xfrm>
-          <a:prstGeom prst="ellipse">
-            <a:avLst/>
-          </a:prstGeom>
-          <a:solidFill>
-            <a:srgbClr val="C8102E"/>
-          </a:solidFill>
-          <a:ln/>
-        </p:spPr>
-      </p:sp>
-      <p:pic>
-        <p:nvPicPr>
-          <p:cNvPr id="11" name="Image 1" descr="preencoded.png">    </p:cNvPr>
-          <p:cNvPicPr>
-            <a:picLocks noChangeAspect="1"/>
-          </p:cNvPicPr>
-          <p:nvPr/>
-        </p:nvPicPr>
-        <p:blipFill>
-          <a:blip r:embed="rId2"/>
-          <a:stretch>
-            <a:fillRect/>
-          </a:stretch>
-        </p:blipFill>
-        <p:spPr>
-          <a:xfrm>
-            <a:off x="6658661" y="1812341"/>
-            <a:ext cx="307238" cy="307238"/>
-          </a:xfrm>
-          <a:prstGeom prst="rect">
-            <a:avLst/>
-          </a:prstGeom>
-        </p:spPr>
-      </p:pic>
-      <p:sp>
-        <p:nvSpPr>
-          <p:cNvPr id="12" name="Text 8"/>
-          <p:cNvSpPr/>
-          <p:nvPr/>
-        </p:nvSpPr>
-        <p:spPr>
-          <a:xfrm>
-            <a:off x="7315200" y="1664208"/>
-            <a:ext cx="4114800" cy="365760"/>
-          </a:xfrm>
-          <a:prstGeom prst="rect">
-            <a:avLst/>
-          </a:prstGeom>
-          <a:noFill/>
-          <a:ln/>
-        </p:spPr>
-        <p:txBody>
-          <a:bodyPr wrap="square" lIns="0" tIns="0" rIns="0" bIns="0" rtlCol="0" anchor="ctr"/>
-          <a:lstStyle/>
-          <a:p>
-            <a:pPr indent="0" marL="0">
-              <a:buNone/>
-            </a:pPr>
-            <a:r>
-              <a:rPr lang="en-US" sz="1700" b="1" dirty="0">
-                <a:solidFill>
-                  <a:srgbClr val="111111"/>
-                </a:solidFill>
-                <a:latin typeface="Arial" pitchFamily="34" charset="0"/>
-                <a:ea typeface="Arial" pitchFamily="34" charset="-122"/>
-                <a:cs typeface="Arial" pitchFamily="34" charset="-120"/>
-              </a:rPr>
-              <a:t>Option B — % of job profit</a:t>
-            </a:r>
-            <a:endParaRPr lang="en-US" sz="1700" dirty="0"/>
-          </a:p>
-        </p:txBody>
-      </p:sp>
-      <p:sp>
-        <p:nvSpPr>
-          <p:cNvPr id="13" name="Text 9"/>
-          <p:cNvSpPr/>
-          <p:nvPr/>
-        </p:nvSpPr>
-        <p:spPr>
-          <a:xfrm>
-            <a:off x="7315200" y="2048256"/>
-            <a:ext cx="4114800" cy="274320"/>
-          </a:xfrm>
-          <a:prstGeom prst="rect">
-            <a:avLst/>
-          </a:prstGeom>
-          <a:noFill/>
-          <a:ln/>
-        </p:spPr>
-        <p:txBody>
-          <a:bodyPr wrap="square" lIns="0" tIns="0" rIns="0" bIns="0" rtlCol="0" anchor="ctr"/>
-          <a:lstStyle/>
-          <a:p>
-            <a:pPr indent="0" marL="0">
-              <a:buNone/>
-            </a:pPr>
-            <a:r>
-              <a:rPr lang="en-US" sz="1150" i="1" dirty="0">
-                <a:solidFill>
-                  <a:srgbClr val="C8102E"/>
-                </a:solidFill>
-                <a:latin typeface="Arial" pitchFamily="34" charset="0"/>
-                <a:ea typeface="Arial" pitchFamily="34" charset="-122"/>
-                <a:cs typeface="Arial" pitchFamily="34" charset="-120"/>
-              </a:rPr>
-              <a:t>equivalent dollars, different base</a:t>
-            </a:r>
-            <a:endParaRPr lang="en-US" sz="1150" dirty="0"/>
-          </a:p>
-        </p:txBody>
-      </p:sp>
-      <p:sp>
-        <p:nvSpPr>
-          <p:cNvPr id="14" name="Text 10"/>
-          <p:cNvSpPr/>
-          <p:nvPr/>
-        </p:nvSpPr>
-        <p:spPr>
-          <a:xfrm>
-            <a:off x="6537960" y="2514600"/>
-            <a:ext cx="4754880" cy="2651760"/>
-          </a:xfrm>
-          <a:prstGeom prst="rect">
-            <a:avLst/>
-          </a:prstGeom>
-          <a:noFill/>
-          <a:ln/>
-        </p:spPr>
-        <p:txBody>
-          <a:bodyPr wrap="square" lIns="0" tIns="0" rIns="0" bIns="0" rtlCol="0" anchor="ctr"/>
-          <a:lstStyle/>
-          <a:p>
-            <a:pPr marL="342900" indent="-342900">
-              <a:spcAft>
-                <a:spcPts val="800"/>
-              </a:spcAft>
-              <a:buSzPct val="100000"/>
-              <a:buChar char="•"/>
-            </a:pPr>
-            <a:r>
-              <a:rPr lang="en-US" sz="1250" dirty="0">
-                <a:solidFill>
-                  <a:srgbClr val="2A2A2A"/>
-                </a:solidFill>
-                <a:latin typeface="Arial" pitchFamily="34" charset="0"/>
-                <a:ea typeface="Arial" pitchFamily="34" charset="-122"/>
-                <a:cs typeface="Arial" pitchFamily="34" charset="-120"/>
-              </a:rPr>
-              <a:t>Scales with margin — the fee shrinks automatically on thin jobs</a:t>
-            </a:r>
-            <a:endParaRPr lang="en-US" sz="1250" dirty="0"/>
-          </a:p>
-          <a:p>
-            <a:pPr marL="342900" indent="-342900">
-              <a:spcAft>
-                <a:spcPts val="800"/>
-              </a:spcAft>
-              <a:buSzPct val="100000"/>
-              <a:buChar char="•"/>
-            </a:pPr>
-            <a:r>
-              <a:rPr lang="en-US" sz="1250" dirty="0">
-                <a:solidFill>
-                  <a:srgbClr val="2A2A2A"/>
-                </a:solidFill>
-                <a:latin typeface="Arial" pitchFamily="34" charset="0"/>
-                <a:ea typeface="Arial" pitchFamily="34" charset="-122"/>
-                <a:cs typeface="Arial" pitchFamily="34" charset="-120"/>
-              </a:rPr>
-              <a:t>Requires open-book job costing both sides trust</a:t>
-            </a:r>
-            <a:endParaRPr lang="en-US" sz="1250" dirty="0"/>
-          </a:p>
-          <a:p>
-            <a:pPr marL="342900" indent="-342900">
-              <a:spcAft>
-                <a:spcPts val="800"/>
-              </a:spcAft>
-              <a:buSzPct val="100000"/>
-              <a:buChar char="•"/>
-            </a:pPr>
-            <a:r>
-              <a:rPr lang="en-US" sz="1250" dirty="0">
-                <a:solidFill>
-                  <a:srgbClr val="2A2A2A"/>
-                </a:solidFill>
-                <a:latin typeface="Arial" pitchFamily="34" charset="0"/>
-                <a:ea typeface="Arial" pitchFamily="34" charset="-122"/>
-                <a:cs typeface="Arial" pitchFamily="34" charset="-120"/>
-              </a:rPr>
-              <a:t>Equivalent slider band: ~6% → 28% of job gross profit</a:t>
-            </a:r>
-            <a:endParaRPr lang="en-US" sz="1250" dirty="0"/>
-          </a:p>
-          <a:p>
-            <a:pPr marL="342900" indent="-342900">
-              <a:buSzPct val="100000"/>
-              <a:buChar char="•"/>
-            </a:pPr>
-            <a:r>
-              <a:rPr lang="en-US" sz="1250" dirty="0">
-                <a:solidFill>
-                  <a:srgbClr val="2A2A2A"/>
-                </a:solidFill>
-                <a:latin typeface="Arial" pitchFamily="34" charset="0"/>
-                <a:ea typeface="Arial" pitchFamily="34" charset="-122"/>
-                <a:cs typeface="Arial" pitchFamily="34" charset="-120"/>
-              </a:rPr>
-              <a:t>At 50% close: ~14% × $10,500 = ~$1,470 per closed job</a:t>
-            </a:r>
-            <a:endParaRPr lang="en-US" sz="1250" dirty="0"/>
-          </a:p>
-        </p:txBody>
-      </p:sp>
-      <p:sp>
-        <p:nvSpPr>
-          <p:cNvPr id="15" name="Shape 11"/>
-          <p:cNvSpPr/>
-          <p:nvPr/>
-        </p:nvSpPr>
-        <p:spPr>
-          <a:xfrm>
-            <a:off x="548640" y="5532120"/>
-            <a:ext cx="11064240" cy="731520"/>
-          </a:xfrm>
-          <a:prstGeom prst="roundRect">
-            <a:avLst>
-              <a:gd name="adj" fmla="val 7500"/>
-            </a:avLst>
-          </a:prstGeom>
-          <a:solidFill>
-            <a:srgbClr val="FBEAEC"/>
-          </a:solidFill>
-          <a:ln/>
-        </p:spPr>
-      </p:sp>
-      <p:sp>
-        <p:nvSpPr>
-          <p:cNvPr id="16" name="Text 12"/>
-          <p:cNvSpPr/>
-          <p:nvPr/>
-        </p:nvSpPr>
-        <p:spPr>
-          <a:xfrm>
-            <a:off x="868680" y="5669280"/>
-            <a:ext cx="10515600" cy="457200"/>
-          </a:xfrm>
-          <a:prstGeom prst="rect">
-            <a:avLst/>
-          </a:prstGeom>
-          <a:noFill/>
-          <a:ln/>
-        </p:spPr>
-        <p:txBody>
-          <a:bodyPr wrap="square" lIns="0" tIns="0" rIns="0" bIns="0" rtlCol="0" anchor="ctr"/>
-          <a:lstStyle/>
-          <a:p>
-            <a:pPr indent="0" marL="0">
-              <a:buNone/>
-            </a:pPr>
-            <a:r>
-              <a:rPr lang="en-US" sz="1450" b="1" dirty="0">
-                <a:solidFill>
-                  <a:srgbClr val="111111"/>
-                </a:solidFill>
-                <a:latin typeface="Arial" pitchFamily="34" charset="0"/>
-                <a:ea typeface="Arial" pitchFamily="34" charset="-122"/>
-                <a:cs typeface="Arial" pitchFamily="34" charset="-120"/>
-              </a:rPr>
-              <a:t>Same money either way at today's margins. </a:t>
-            </a:r>
-            <a:pPr indent="0" marL="0">
-              <a:buNone/>
-            </a:pPr>
-            <a:r>
-              <a:rPr lang="en-US" sz="1450" dirty="0">
-                <a:solidFill>
-                  <a:srgbClr val="2A2A2A"/>
-                </a:solidFill>
-                <a:latin typeface="Arial" pitchFamily="34" charset="0"/>
-                <a:ea typeface="Arial" pitchFamily="34" charset="-122"/>
-                <a:cs typeface="Arial" pitchFamily="34" charset="-120"/>
-              </a:rPr>
-              <a:t>A is simpler to verify; B is tighter to margin. The only wrong answer is leaving the definition verbal.</a:t>
-            </a:r>
-            <a:endParaRPr lang="en-US" sz="1450" dirty="0"/>
-          </a:p>
-        </p:txBody>
-      </p:sp>
-      <p:sp>
-        <p:nvSpPr>
-          <p:cNvPr id="17" name="Text 13"/>
-          <p:cNvSpPr/>
-          <p:nvPr/>
-        </p:nvSpPr>
-        <p:spPr>
-          <a:xfrm>
-            <a:off x="548640" y="6473952"/>
-            <a:ext cx="9601200" cy="274320"/>
-          </a:xfrm>
-          <a:prstGeom prst="rect">
-            <a:avLst/>
-          </a:prstGeom>
-          <a:noFill/>
-          <a:ln/>
-        </p:spPr>
-        <p:txBody>
-          <a:bodyPr wrap="square" lIns="0" tIns="0" rIns="0" bIns="0" rtlCol="0" anchor="ctr"/>
-          <a:lstStyle/>
-          <a:p>
-            <a:pPr indent="0" marL="0">
-              <a:buNone/>
-            </a:pPr>
+              <a:t>Per closed job: $30,000 × 35% margin, less slider fee, split 50/50 with the PM. 100 scoped leads held constant across scenarios.</a:t>
+            </a:r>
             <a:endParaRPr lang="en-US" sz="900" dirty="0"/>
           </a:p>
         </p:txBody>
       </p:sp>
       <p:sp>
         <p:nvSpPr>
-          <p:cNvPr id="18" name="Text 14"/>
+          <p:cNvPr id="8" name="Text 5"/>
           <p:cNvSpPr/>
           <p:nvPr/>
         </p:nvSpPr>
@@ -6797,7 +6808,7 @@
                 <a:ea typeface="Arial" pitchFamily="34" charset="-122"/>
                 <a:cs typeface="Arial" pitchFamily="34" charset="-120"/>
               </a:rPr>
-              <a:t>What this costs vs. the alternatives</a:t>
+              <a:t>Two ways to base it — pick one, put it in writing</a:t>
             </a:r>
             <a:endParaRPr lang="en-US" sz="3200" dirty="0"/>
           </a:p>
@@ -6805,57 +6816,18 @@
       </p:sp>
       <p:sp>
         <p:nvSpPr>
-          <p:cNvPr id="3" name="Text 1"/>
-          <p:cNvSpPr/>
-          <p:nvPr/>
-        </p:nvSpPr>
-        <p:spPr>
-          <a:xfrm>
-            <a:off x="548640" y="1097280"/>
-            <a:ext cx="10881360" cy="365760"/>
-          </a:xfrm>
-          <a:prstGeom prst="rect">
-            <a:avLst/>
-          </a:prstGeom>
-          <a:noFill/>
-          <a:ln/>
-        </p:spPr>
-        <p:txBody>
-          <a:bodyPr wrap="square" lIns="0" tIns="0" rIns="0" bIns="0" rtlCol="0" anchor="ctr"/>
-          <a:lstStyle/>
-          <a:p>
-            <a:pPr indent="0" marL="0">
-              <a:buNone/>
-            </a:pPr>
-            <a:r>
-              <a:rPr lang="en-US" sz="1500" dirty="0">
-                <a:solidFill>
-                  <a:srgbClr val="6E6E6E"/>
-                </a:solidFill>
-                <a:latin typeface="Arial" pitchFamily="34" charset="0"/>
-                <a:ea typeface="Arial" pitchFamily="34" charset="-122"/>
-                <a:cs typeface="Arial" pitchFamily="34" charset="-120"/>
-              </a:rPr>
-              <a:t>Every other way to buy scope writing carries fixed cost or scales with paperwork. This one scales only with collected revenue.</a:t>
-            </a:r>
-            <a:endParaRPr lang="en-US" sz="1500" dirty="0"/>
-          </a:p>
-        </p:txBody>
-      </p:sp>
-      <p:sp>
-        <p:nvSpPr>
-          <p:cNvPr id="4" name="Shape 2"/>
-          <p:cNvSpPr/>
-          <p:nvPr/>
-        </p:nvSpPr>
-        <p:spPr>
-          <a:xfrm>
-            <a:off x="548640" y="1737360"/>
-            <a:ext cx="3520440" cy="3566160"/>
+          <p:cNvPr id="3" name="Shape 1"/>
+          <p:cNvSpPr/>
+          <p:nvPr/>
+        </p:nvSpPr>
+        <p:spPr>
+          <a:xfrm>
+            <a:off x="548640" y="1371600"/>
+            <a:ext cx="5394960" cy="3977640"/>
           </a:xfrm>
           <a:prstGeom prst="roundRect">
             <a:avLst>
-              <a:gd name="adj" fmla="val 2078"/>
+              <a:gd name="adj" fmla="val 1839"/>
             </a:avLst>
           </a:prstGeom>
           <a:solidFill>
@@ -6866,14 +6838,14 @@
       </p:sp>
       <p:sp>
         <p:nvSpPr>
-          <p:cNvPr id="5" name="Shape 3"/>
-          <p:cNvSpPr/>
-          <p:nvPr/>
-        </p:nvSpPr>
-        <p:spPr>
-          <a:xfrm>
-            <a:off x="868680" y="2011680"/>
-            <a:ext cx="685800" cy="685800"/>
+          <p:cNvPr id="4" name="Shape 2"/>
+          <p:cNvSpPr/>
+          <p:nvPr/>
+        </p:nvSpPr>
+        <p:spPr>
+          <a:xfrm>
+            <a:off x="822960" y="1645920"/>
+            <a:ext cx="640080" cy="640080"/>
           </a:xfrm>
           <a:prstGeom prst="ellipse">
             <a:avLst/>
@@ -6886,7 +6858,7 @@
       </p:sp>
       <p:pic>
         <p:nvPicPr>
-          <p:cNvPr id="6" name="Image 0" descr="preencoded.png">    </p:cNvPr>
+          <p:cNvPr id="5" name="Image 0" descr="preencoded.png">    </p:cNvPr>
           <p:cNvPicPr>
             <a:picLocks noChangeAspect="1"/>
           </p:cNvPicPr>
@@ -6900,8 +6872,8 @@
         </p:blipFill>
         <p:spPr>
           <a:xfrm>
-            <a:off x="1046988" y="2189988"/>
-            <a:ext cx="329184" cy="329184"/>
+            <a:off x="989381" y="1812341"/>
+            <a:ext cx="307238" cy="307238"/>
           </a:xfrm>
           <a:prstGeom prst="rect">
             <a:avLst/>
@@ -6910,14 +6882,14 @@
       </p:pic>
       <p:sp>
         <p:nvSpPr>
-          <p:cNvPr id="7" name="Text 4"/>
-          <p:cNvSpPr/>
-          <p:nvPr/>
-        </p:nvSpPr>
-        <p:spPr>
-          <a:xfrm>
-            <a:off x="1691640" y="2194560"/>
-            <a:ext cx="2286000" cy="365760"/>
+          <p:cNvPr id="6" name="Text 3"/>
+          <p:cNvSpPr/>
+          <p:nvPr/>
+        </p:nvSpPr>
+        <p:spPr>
+          <a:xfrm>
+            <a:off x="1645920" y="1664208"/>
+            <a:ext cx="4114800" cy="365760"/>
           </a:xfrm>
           <a:prstGeom prst="rect">
             <a:avLst/>
@@ -6933,7 +6905,7 @@
               <a:buNone/>
             </a:pPr>
             <a:r>
-              <a:rPr lang="en-US" sz="1500" b="1" dirty="0">
+              <a:rPr lang="en-US" sz="1700" b="1" dirty="0">
                 <a:solidFill>
                   <a:srgbClr val="111111"/>
                 </a:solidFill>
@@ -6941,22 +6913,22 @@
                 <a:ea typeface="Arial" pitchFamily="34" charset="-122"/>
                 <a:cs typeface="Arial" pitchFamily="34" charset="-120"/>
               </a:rPr>
-              <a:t>Staff estimator</a:t>
-            </a:r>
-            <a:endParaRPr lang="en-US" sz="1500" dirty="0"/>
-          </a:p>
-        </p:txBody>
-      </p:sp>
-      <p:sp>
-        <p:nvSpPr>
-          <p:cNvPr id="8" name="Text 5"/>
-          <p:cNvSpPr/>
-          <p:nvPr/>
-        </p:nvSpPr>
-        <p:spPr>
-          <a:xfrm>
-            <a:off x="868680" y="2880360"/>
-            <a:ext cx="2926080" cy="777240"/>
+              <a:t>Option A — % of RCV</a:t>
+            </a:r>
+            <a:endParaRPr lang="en-US" sz="1700" dirty="0"/>
+          </a:p>
+        </p:txBody>
+      </p:sp>
+      <p:sp>
+        <p:nvSpPr>
+          <p:cNvPr id="7" name="Text 4"/>
+          <p:cNvSpPr/>
+          <p:nvPr/>
+        </p:nvSpPr>
+        <p:spPr>
+          <a:xfrm>
+            <a:off x="1645920" y="2048256"/>
+            <a:ext cx="4114800" cy="274320"/>
           </a:xfrm>
           <a:prstGeom prst="rect">
             <a:avLst/>
@@ -6972,7 +6944,7 @@
               <a:buNone/>
             </a:pPr>
             <a:r>
-              <a:rPr lang="en-US" sz="4000" b="1" dirty="0">
+              <a:rPr lang="en-US" sz="1150" i="1" dirty="0">
                 <a:solidFill>
                   <a:srgbClr val="C8102E"/>
                 </a:solidFill>
@@ -6980,22 +6952,22 @@
                 <a:ea typeface="Arial" pitchFamily="34" charset="-122"/>
                 <a:cs typeface="Arial" pitchFamily="34" charset="-120"/>
               </a:rPr>
-              <a:t>$70–90k/yr</a:t>
-            </a:r>
-            <a:endParaRPr lang="en-US" sz="4000" dirty="0"/>
-          </a:p>
-        </p:txBody>
-      </p:sp>
-      <p:sp>
-        <p:nvSpPr>
-          <p:cNvPr id="9" name="Text 6"/>
-          <p:cNvSpPr/>
-          <p:nvPr/>
-        </p:nvSpPr>
-        <p:spPr>
-          <a:xfrm>
-            <a:off x="868680" y="3749040"/>
-            <a:ext cx="2926080" cy="1417320"/>
+              <a:t>the numbers shown so far</a:t>
+            </a:r>
+            <a:endParaRPr lang="en-US" sz="1150" dirty="0"/>
+          </a:p>
+        </p:txBody>
+      </p:sp>
+      <p:sp>
+        <p:nvSpPr>
+          <p:cNvPr id="8" name="Text 5"/>
+          <p:cNvSpPr/>
+          <p:nvPr/>
+        </p:nvSpPr>
+        <p:spPr>
+          <a:xfrm>
+            <a:off x="868680" y="2514600"/>
+            <a:ext cx="4754880" cy="2651760"/>
           </a:xfrm>
           <a:prstGeom prst="rect">
             <a:avLst/>
@@ -7007,11 +6979,15 @@
           <a:bodyPr wrap="square" lIns="0" tIns="0" rIns="0" bIns="0" rtlCol="0" anchor="ctr"/>
           <a:lstStyle/>
           <a:p>
-            <a:pPr indent="0" marL="0">
-              <a:buNone/>
+            <a:pPr marL="342900" indent="-342900">
+              <a:spcAft>
+                <a:spcPts val="800"/>
+              </a:spcAft>
+              <a:buSzPct val="100000"/>
+              <a:buChar char="•"/>
             </a:pPr>
             <a:r>
-              <a:rPr lang="en-US" sz="1200" dirty="0">
+              <a:rPr lang="en-US" sz="1250" dirty="0">
                 <a:solidFill>
                   <a:srgbClr val="2A2A2A"/>
                 </a:solidFill>
@@ -7019,26 +6995,86 @@
                 <a:ea typeface="Arial" pitchFamily="34" charset="-122"/>
                 <a:cs typeface="Arial" pitchFamily="34" charset="-120"/>
               </a:rPr>
-              <a:t>Salary paid whether jobs close or not. Pure fixed overhead, plus payroll burden — and someone still has to run lead targeting.</a:t>
-            </a:r>
-            <a:endParaRPr lang="en-US" sz="1200" dirty="0"/>
-          </a:p>
-        </p:txBody>
-      </p:sp>
-      <p:sp>
-        <p:nvSpPr>
-          <p:cNvPr id="10" name="Shape 7"/>
-          <p:cNvSpPr/>
-          <p:nvPr/>
-        </p:nvSpPr>
-        <p:spPr>
-          <a:xfrm>
-            <a:off x="4343400" y="1737360"/>
-            <a:ext cx="3520440" cy="3566160"/>
+              <a:t>Verified straight off the carrier paperwork — no accounting disputes, ever</a:t>
+            </a:r>
+            <a:endParaRPr lang="en-US" sz="1250" dirty="0"/>
+          </a:p>
+          <a:p>
+            <a:pPr marL="342900" indent="-342900">
+              <a:spcAft>
+                <a:spcPts val="800"/>
+              </a:spcAft>
+              <a:buSzPct val="100000"/>
+              <a:buChar char="•"/>
+            </a:pPr>
+            <a:r>
+              <a:rPr lang="en-US" sz="1250" dirty="0">
+                <a:solidFill>
+                  <a:srgbClr val="2A2A2A"/>
+                </a:solidFill>
+                <a:latin typeface="Arial" pitchFamily="34" charset="0"/>
+                <a:ea typeface="Arial" pitchFamily="34" charset="-122"/>
+                <a:cs typeface="Arial" pitchFamily="34" charset="-120"/>
+              </a:rPr>
+              <a:t>Insulated from cost overruns neither side controls</a:t>
+            </a:r>
+            <a:endParaRPr lang="en-US" sz="1250" dirty="0"/>
+          </a:p>
+          <a:p>
+            <a:pPr marL="342900" indent="-342900">
+              <a:spcAft>
+                <a:spcPts val="800"/>
+              </a:spcAft>
+              <a:buSzPct val="100000"/>
+              <a:buChar char="•"/>
+            </a:pPr>
+            <a:r>
+              <a:rPr lang="en-US" sz="1250" dirty="0">
+                <a:solidFill>
+                  <a:srgbClr val="2A2A2A"/>
+                </a:solidFill>
+                <a:latin typeface="Arial" pitchFamily="34" charset="0"/>
+                <a:ea typeface="Arial" pitchFamily="34" charset="-122"/>
+                <a:cs typeface="Arial" pitchFamily="34" charset="-120"/>
+              </a:rPr>
+              <a:t>Slider band: 2% → 10% of RCV</a:t>
+            </a:r>
+            <a:endParaRPr lang="en-US" sz="1250" dirty="0"/>
+          </a:p>
+          <a:p>
+            <a:pPr marL="342900" indent="-342900">
+              <a:buSzPct val="100000"/>
+              <a:buChar char="•"/>
+            </a:pPr>
+            <a:r>
+              <a:rPr lang="en-US" sz="1250" dirty="0">
+                <a:solidFill>
+                  <a:srgbClr val="2A2A2A"/>
+                </a:solidFill>
+                <a:latin typeface="Arial" pitchFamily="34" charset="0"/>
+                <a:ea typeface="Arial" pitchFamily="34" charset="-122"/>
+                <a:cs typeface="Arial" pitchFamily="34" charset="-120"/>
+              </a:rPr>
+              <a:t>At 50% close: 5% × $30,000 = $1,500 per closed job</a:t>
+            </a:r>
+            <a:endParaRPr lang="en-US" sz="1250" dirty="0"/>
+          </a:p>
+        </p:txBody>
+      </p:sp>
+      <p:sp>
+        <p:nvSpPr>
+          <p:cNvPr id="9" name="Shape 6"/>
+          <p:cNvSpPr/>
+          <p:nvPr/>
+        </p:nvSpPr>
+        <p:spPr>
+          <a:xfrm>
+            <a:off x="6217920" y="1371600"/>
+            <a:ext cx="5394960" cy="3977640"/>
           </a:xfrm>
           <a:prstGeom prst="roundRect">
             <a:avLst>
-              <a:gd name="adj" fmla="val 2078"/>
+              <a:gd name="adj" fmla="val 1839"/>
             </a:avLst>
           </a:prstGeom>
           <a:solidFill>
@@ -7049,14 +7085,14 @@
       </p:sp>
       <p:sp>
         <p:nvSpPr>
-          <p:cNvPr id="11" name="Shape 8"/>
-          <p:cNvSpPr/>
-          <p:nvPr/>
-        </p:nvSpPr>
-        <p:spPr>
-          <a:xfrm>
-            <a:off x="4663440" y="2011680"/>
-            <a:ext cx="685800" cy="685800"/>
+          <p:cNvPr id="10" name="Shape 7"/>
+          <p:cNvSpPr/>
+          <p:nvPr/>
+        </p:nvSpPr>
+        <p:spPr>
+          <a:xfrm>
+            <a:off x="6492240" y="1645920"/>
+            <a:ext cx="640080" cy="640080"/>
           </a:xfrm>
           <a:prstGeom prst="ellipse">
             <a:avLst/>
@@ -7069,7 +7105,7 @@
       </p:sp>
       <p:pic>
         <p:nvPicPr>
-          <p:cNvPr id="12" name="Image 1" descr="preencoded.png">    </p:cNvPr>
+          <p:cNvPr id="11" name="Image 1" descr="preencoded.png">    </p:cNvPr>
           <p:cNvPicPr>
             <a:picLocks noChangeAspect="1"/>
           </p:cNvPicPr>
@@ -7083,8 +7119,8 @@
         </p:blipFill>
         <p:spPr>
           <a:xfrm>
-            <a:off x="4841748" y="2189988"/>
-            <a:ext cx="329184" cy="329184"/>
+            <a:off x="6658661" y="1812341"/>
+            <a:ext cx="307238" cy="307238"/>
           </a:xfrm>
           <a:prstGeom prst="rect">
             <a:avLst/>
@@ -7093,14 +7129,14 @@
       </p:pic>
       <p:sp>
         <p:nvSpPr>
-          <p:cNvPr id="13" name="Text 9"/>
-          <p:cNvSpPr/>
-          <p:nvPr/>
-        </p:nvSpPr>
-        <p:spPr>
-          <a:xfrm>
-            <a:off x="5486400" y="2194560"/>
-            <a:ext cx="2286000" cy="365760"/>
+          <p:cNvPr id="12" name="Text 8"/>
+          <p:cNvSpPr/>
+          <p:nvPr/>
+        </p:nvSpPr>
+        <p:spPr>
+          <a:xfrm>
+            <a:off x="7315200" y="1664208"/>
+            <a:ext cx="4114800" cy="365760"/>
           </a:xfrm>
           <a:prstGeom prst="rect">
             <a:avLst/>
@@ -7116,7 +7152,7 @@
               <a:buNone/>
             </a:pPr>
             <a:r>
-              <a:rPr lang="en-US" sz="1500" b="1" dirty="0">
+              <a:rPr lang="en-US" sz="1700" b="1" dirty="0">
                 <a:solidFill>
                   <a:srgbClr val="111111"/>
                 </a:solidFill>
@@ -7124,22 +7160,22 @@
                 <a:ea typeface="Arial" pitchFamily="34" charset="-122"/>
                 <a:cs typeface="Arial" pitchFamily="34" charset="-120"/>
               </a:rPr>
-              <a:t>Supplement service</a:t>
-            </a:r>
-            <a:endParaRPr lang="en-US" sz="1500" dirty="0"/>
-          </a:p>
-        </p:txBody>
-      </p:sp>
-      <p:sp>
-        <p:nvSpPr>
-          <p:cNvPr id="14" name="Text 10"/>
-          <p:cNvSpPr/>
-          <p:nvPr/>
-        </p:nvSpPr>
-        <p:spPr>
-          <a:xfrm>
-            <a:off x="4663440" y="2880360"/>
-            <a:ext cx="2926080" cy="777240"/>
+              <a:t>Option B — % of job profit</a:t>
+            </a:r>
+            <a:endParaRPr lang="en-US" sz="1700" dirty="0"/>
+          </a:p>
+        </p:txBody>
+      </p:sp>
+      <p:sp>
+        <p:nvSpPr>
+          <p:cNvPr id="13" name="Text 9"/>
+          <p:cNvSpPr/>
+          <p:nvPr/>
+        </p:nvSpPr>
+        <p:spPr>
+          <a:xfrm>
+            <a:off x="7315200" y="2048256"/>
+            <a:ext cx="4114800" cy="274320"/>
           </a:xfrm>
           <a:prstGeom prst="rect">
             <a:avLst/>
@@ -7155,7 +7191,7 @@
               <a:buNone/>
             </a:pPr>
             <a:r>
-              <a:rPr lang="en-US" sz="4000" b="1" dirty="0">
+              <a:rPr lang="en-US" sz="1150" i="1" dirty="0">
                 <a:solidFill>
                   <a:srgbClr val="C8102E"/>
                 </a:solidFill>
@@ -7163,22 +7199,22 @@
                 <a:ea typeface="Arial" pitchFamily="34" charset="-122"/>
                 <a:cs typeface="Arial" pitchFamily="34" charset="-120"/>
               </a:rPr>
-              <a:t>25–33%</a:t>
-            </a:r>
-            <a:endParaRPr lang="en-US" sz="4000" dirty="0"/>
-          </a:p>
-        </p:txBody>
-      </p:sp>
-      <p:sp>
-        <p:nvSpPr>
-          <p:cNvPr id="15" name="Text 11"/>
-          <p:cNvSpPr/>
-          <p:nvPr/>
-        </p:nvSpPr>
-        <p:spPr>
-          <a:xfrm>
-            <a:off x="4663440" y="3749040"/>
-            <a:ext cx="2926080" cy="1417320"/>
+              <a:t>equivalent dollars, different base</a:t>
+            </a:r>
+            <a:endParaRPr lang="en-US" sz="1150" dirty="0"/>
+          </a:p>
+        </p:txBody>
+      </p:sp>
+      <p:sp>
+        <p:nvSpPr>
+          <p:cNvPr id="14" name="Text 10"/>
+          <p:cNvSpPr/>
+          <p:nvPr/>
+        </p:nvSpPr>
+        <p:spPr>
+          <a:xfrm>
+            <a:off x="6537960" y="2514600"/>
+            <a:ext cx="4754880" cy="2651760"/>
           </a:xfrm>
           <a:prstGeom prst="rect">
             <a:avLst/>
@@ -7190,11 +7226,15 @@
           <a:bodyPr wrap="square" lIns="0" tIns="0" rIns="0" bIns="0" rtlCol="0" anchor="ctr"/>
           <a:lstStyle/>
           <a:p>
-            <a:pPr indent="0" marL="0">
-              <a:buNone/>
+            <a:pPr marL="342900" indent="-342900">
+              <a:spcAft>
+                <a:spcPts val="800"/>
+              </a:spcAft>
+              <a:buSzPct val="100000"/>
+              <a:buChar char="•"/>
             </a:pPr>
             <a:r>
-              <a:rPr lang="en-US" sz="1200" dirty="0">
+              <a:rPr lang="en-US" sz="1250" dirty="0">
                 <a:solidFill>
                   <a:srgbClr val="2A2A2A"/>
                 </a:solidFill>
@@ -7202,205 +7242,104 @@
                 <a:ea typeface="Arial" pitchFamily="34" charset="-122"/>
                 <a:cs typeface="Arial" pitchFamily="34" charset="-120"/>
               </a:rPr>
-              <a:t>of every supplement dollar they add — cost scales with paperwork volume, not with closed jobs, and they touch nothing else.</a:t>
-            </a:r>
-            <a:endParaRPr lang="en-US" sz="1200" dirty="0"/>
-          </a:p>
-        </p:txBody>
-      </p:sp>
-      <p:sp>
-        <p:nvSpPr>
-          <p:cNvPr id="16" name="Shape 12"/>
-          <p:cNvSpPr/>
-          <p:nvPr/>
-        </p:nvSpPr>
-        <p:spPr>
-          <a:xfrm>
-            <a:off x="8138160" y="1737360"/>
-            <a:ext cx="3520440" cy="3566160"/>
-          </a:xfrm>
-          <a:prstGeom prst="roundRect">
-            <a:avLst>
-              <a:gd name="adj" fmla="val 2078"/>
-            </a:avLst>
-          </a:prstGeom>
-          <a:solidFill>
-            <a:srgbClr val="111111"/>
-          </a:solidFill>
-          <a:ln/>
-        </p:spPr>
-      </p:sp>
-      <p:sp>
-        <p:nvSpPr>
-          <p:cNvPr id="17" name="Shape 13"/>
-          <p:cNvSpPr/>
-          <p:nvPr/>
-        </p:nvSpPr>
-        <p:spPr>
-          <a:xfrm>
-            <a:off x="8458200" y="2011680"/>
-            <a:ext cx="685800" cy="685800"/>
-          </a:xfrm>
-          <a:prstGeom prst="ellipse">
-            <a:avLst/>
-          </a:prstGeom>
-          <a:solidFill>
-            <a:srgbClr val="C8102E"/>
-          </a:solidFill>
-          <a:ln/>
-        </p:spPr>
-      </p:sp>
-      <p:pic>
-        <p:nvPicPr>
-          <p:cNvPr id="18" name="Image 2" descr="preencoded.png">    </p:cNvPr>
-          <p:cNvPicPr>
-            <a:picLocks noChangeAspect="1"/>
-          </p:cNvPicPr>
-          <p:nvPr/>
-        </p:nvPicPr>
-        <p:blipFill>
-          <a:blip r:embed="rId3"/>
-          <a:stretch>
-            <a:fillRect/>
-          </a:stretch>
-        </p:blipFill>
-        <p:spPr>
-          <a:xfrm>
-            <a:off x="8636508" y="2189988"/>
-            <a:ext cx="329184" cy="329184"/>
-          </a:xfrm>
-          <a:prstGeom prst="rect">
-            <a:avLst/>
-          </a:prstGeom>
-        </p:spPr>
-      </p:pic>
-      <p:sp>
-        <p:nvSpPr>
-          <p:cNvPr id="19" name="Text 14"/>
-          <p:cNvSpPr/>
-          <p:nvPr/>
-        </p:nvSpPr>
-        <p:spPr>
-          <a:xfrm>
-            <a:off x="9281160" y="2194560"/>
-            <a:ext cx="2286000" cy="365760"/>
-          </a:xfrm>
-          <a:prstGeom prst="rect">
-            <a:avLst/>
-          </a:prstGeom>
-          <a:noFill/>
-          <a:ln/>
-        </p:spPr>
-        <p:txBody>
-          <a:bodyPr wrap="square" lIns="0" tIns="0" rIns="0" bIns="0" rtlCol="0" anchor="ctr"/>
-          <a:lstStyle/>
-          <a:p>
-            <a:pPr indent="0" marL="0">
-              <a:buNone/>
+              <a:t>Scales with margin — the fee shrinks automatically on thin jobs</a:t>
+            </a:r>
+            <a:endParaRPr lang="en-US" sz="1250" dirty="0"/>
+          </a:p>
+          <a:p>
+            <a:pPr marL="342900" indent="-342900">
+              <a:spcAft>
+                <a:spcPts val="800"/>
+              </a:spcAft>
+              <a:buSzPct val="100000"/>
+              <a:buChar char="•"/>
             </a:pPr>
             <a:r>
-              <a:rPr lang="en-US" sz="1500" b="1" dirty="0">
+              <a:rPr lang="en-US" sz="1250" dirty="0">
                 <a:solidFill>
-                  <a:srgbClr val="FFFFFF"/>
+                  <a:srgbClr val="2A2A2A"/>
                 </a:solidFill>
                 <a:latin typeface="Arial" pitchFamily="34" charset="0"/>
                 <a:ea typeface="Arial" pitchFamily="34" charset="-122"/>
                 <a:cs typeface="Arial" pitchFamily="34" charset="-120"/>
               </a:rPr>
-              <a:t>This plan</a:t>
-            </a:r>
-            <a:endParaRPr lang="en-US" sz="1500" dirty="0"/>
-          </a:p>
-        </p:txBody>
-      </p:sp>
-      <p:sp>
-        <p:nvSpPr>
-          <p:cNvPr id="20" name="Text 15"/>
-          <p:cNvSpPr/>
-          <p:nvPr/>
-        </p:nvSpPr>
-        <p:spPr>
-          <a:xfrm>
-            <a:off x="8458200" y="2880360"/>
-            <a:ext cx="2926080" cy="777240"/>
-          </a:xfrm>
-          <a:prstGeom prst="rect">
-            <a:avLst/>
-          </a:prstGeom>
-          <a:noFill/>
-          <a:ln/>
-        </p:spPr>
-        <p:txBody>
-          <a:bodyPr wrap="square" lIns="0" tIns="0" rIns="0" bIns="0" rtlCol="0" anchor="ctr"/>
-          <a:lstStyle/>
-          <a:p>
-            <a:pPr indent="0" marL="0">
-              <a:buNone/>
+              <a:t>Requires open-book job costing both sides trust</a:t>
+            </a:r>
+            <a:endParaRPr lang="en-US" sz="1250" dirty="0"/>
+          </a:p>
+          <a:p>
+            <a:pPr marL="342900" indent="-342900">
+              <a:spcAft>
+                <a:spcPts val="800"/>
+              </a:spcAft>
+              <a:buSzPct val="100000"/>
+              <a:buChar char="•"/>
             </a:pPr>
             <a:r>
-              <a:rPr lang="en-US" sz="4000" b="1" dirty="0">
+              <a:rPr lang="en-US" sz="1250" dirty="0">
                 <a:solidFill>
-                  <a:srgbClr val="C8102E"/>
+                  <a:srgbClr val="2A2A2A"/>
                 </a:solidFill>
                 <a:latin typeface="Arial" pitchFamily="34" charset="0"/>
                 <a:ea typeface="Arial" pitchFamily="34" charset="-122"/>
                 <a:cs typeface="Arial" pitchFamily="34" charset="-120"/>
               </a:rPr>
-              <a:t>$0</a:t>
-            </a:r>
-            <a:endParaRPr lang="en-US" sz="4000" dirty="0"/>
-          </a:p>
-        </p:txBody>
-      </p:sp>
-      <p:sp>
-        <p:nvSpPr>
-          <p:cNvPr id="21" name="Text 16"/>
-          <p:cNvSpPr/>
-          <p:nvPr/>
-        </p:nvSpPr>
-        <p:spPr>
-          <a:xfrm>
-            <a:off x="8458200" y="3749040"/>
-            <a:ext cx="2926080" cy="1417320"/>
-          </a:xfrm>
-          <a:prstGeom prst="rect">
-            <a:avLst/>
-          </a:prstGeom>
-          <a:noFill/>
-          <a:ln/>
-        </p:spPr>
-        <p:txBody>
-          <a:bodyPr wrap="square" lIns="0" tIns="0" rIns="0" bIns="0" rtlCol="0" anchor="ctr"/>
-          <a:lstStyle/>
-          <a:p>
-            <a:pPr indent="0" marL="0">
-              <a:buNone/>
+              <a:t>Equivalent slider band: ~6% → 28% of job gross profit</a:t>
+            </a:r>
+            <a:endParaRPr lang="en-US" sz="1250" dirty="0"/>
+          </a:p>
+          <a:p>
+            <a:pPr marL="342900" indent="-342900">
+              <a:buSzPct val="100000"/>
+              <a:buChar char="•"/>
             </a:pPr>
             <a:r>
-              <a:rPr lang="en-US" sz="1200" dirty="0">
+              <a:rPr lang="en-US" sz="1250" dirty="0">
                 <a:solidFill>
-                  <a:srgbClr val="E0E0E0"/>
+                  <a:srgbClr val="2A2A2A"/>
                 </a:solidFill>
                 <a:latin typeface="Arial" pitchFamily="34" charset="0"/>
                 <a:ea typeface="Arial" pitchFamily="34" charset="-122"/>
                 <a:cs typeface="Arial" pitchFamily="34" charset="-120"/>
               </a:rPr>
-              <a:t>until a job closes AND the check clears. Scope writing and lead operations in one seat, booked as a job cost on collected revenue.</a:t>
-            </a:r>
-            <a:endParaRPr lang="en-US" sz="1200" dirty="0"/>
-          </a:p>
-        </p:txBody>
-      </p:sp>
-      <p:sp>
-        <p:nvSpPr>
-          <p:cNvPr id="22" name="Text 17"/>
-          <p:cNvSpPr/>
-          <p:nvPr/>
-        </p:nvSpPr>
-        <p:spPr>
-          <a:xfrm>
-            <a:off x="548640" y="6473952"/>
-            <a:ext cx="9601200" cy="274320"/>
+              <a:t>At 50% close: ~14% × $10,500 = ~$1,470 per closed job</a:t>
+            </a:r>
+            <a:endParaRPr lang="en-US" sz="1250" dirty="0"/>
+          </a:p>
+        </p:txBody>
+      </p:sp>
+      <p:sp>
+        <p:nvSpPr>
+          <p:cNvPr id="15" name="Shape 11"/>
+          <p:cNvSpPr/>
+          <p:nvPr/>
+        </p:nvSpPr>
+        <p:spPr>
+          <a:xfrm>
+            <a:off x="548640" y="5532120"/>
+            <a:ext cx="11064240" cy="731520"/>
+          </a:xfrm>
+          <a:prstGeom prst="roundRect">
+            <a:avLst>
+              <a:gd name="adj" fmla="val 7500"/>
+            </a:avLst>
+          </a:prstGeom>
+          <a:solidFill>
+            <a:srgbClr val="FBEAEC"/>
+          </a:solidFill>
+          <a:ln/>
+        </p:spPr>
+      </p:sp>
+      <p:sp>
+        <p:nvSpPr>
+          <p:cNvPr id="16" name="Text 12"/>
+          <p:cNvSpPr/>
+          <p:nvPr/>
+        </p:nvSpPr>
+        <p:spPr>
+          <a:xfrm>
+            <a:off x="868680" y="5669280"/>
+            <a:ext cx="10515600" cy="457200"/>
           </a:xfrm>
           <a:prstGeom prst="rect">
             <a:avLst/>
@@ -7416,23 +7355,65 @@
               <a:buNone/>
             </a:pPr>
             <a:r>
-              <a:rPr lang="en-US" sz="900" dirty="0">
+              <a:rPr lang="en-US" sz="1450" b="1" dirty="0">
                 <a:solidFill>
-                  <a:srgbClr val="6E6E6E"/>
+                  <a:srgbClr val="111111"/>
                 </a:solidFill>
                 <a:latin typeface="Arial" pitchFamily="34" charset="0"/>
                 <a:ea typeface="Arial" pitchFamily="34" charset="-122"/>
                 <a:cs typeface="Arial" pitchFamily="34" charset="-120"/>
               </a:rPr>
-              <a:t>Estimator salary and supplement-fee ranges are industry-typical figures for the region, not quotes.</a:t>
-            </a:r>
+              <a:t>Same money either way at today's margins. </a:t>
+            </a:r>
+            <a:pPr indent="0" marL="0">
+              <a:buNone/>
+            </a:pPr>
+            <a:r>
+              <a:rPr lang="en-US" sz="1450" dirty="0">
+                <a:solidFill>
+                  <a:srgbClr val="2A2A2A"/>
+                </a:solidFill>
+                <a:latin typeface="Arial" pitchFamily="34" charset="0"/>
+                <a:ea typeface="Arial" pitchFamily="34" charset="-122"/>
+                <a:cs typeface="Arial" pitchFamily="34" charset="-120"/>
+              </a:rPr>
+              <a:t>A is simpler to verify; B is tighter to margin. The only wrong answer is leaving the definition verbal.</a:t>
+            </a:r>
+            <a:endParaRPr lang="en-US" sz="1450" dirty="0"/>
+          </a:p>
+        </p:txBody>
+      </p:sp>
+      <p:sp>
+        <p:nvSpPr>
+          <p:cNvPr id="17" name="Text 13"/>
+          <p:cNvSpPr/>
+          <p:nvPr/>
+        </p:nvSpPr>
+        <p:spPr>
+          <a:xfrm>
+            <a:off x="548640" y="6473952"/>
+            <a:ext cx="9601200" cy="274320"/>
+          </a:xfrm>
+          <a:prstGeom prst="rect">
+            <a:avLst/>
+          </a:prstGeom>
+          <a:noFill/>
+          <a:ln/>
+        </p:spPr>
+        <p:txBody>
+          <a:bodyPr wrap="square" lIns="0" tIns="0" rIns="0" bIns="0" rtlCol="0" anchor="ctr"/>
+          <a:lstStyle/>
+          <a:p>
+            <a:pPr indent="0" marL="0">
+              <a:buNone/>
+            </a:pPr>
             <a:endParaRPr lang="en-US" sz="900" dirty="0"/>
           </a:p>
         </p:txBody>
       </p:sp>
       <p:sp>
         <p:nvSpPr>
-          <p:cNvPr id="23" name="Text 18"/>
+          <p:cNvPr id="18" name="Text 14"/>
           <p:cNvSpPr/>
           <p:nvPr/>
         </p:nvSpPr>
@@ -7480,6 +7461,743 @@
 <file path=ppt/slides/slide7.xml><?xml version="1.0" encoding="utf-8"?>
 <p:sld xmlns:a="http://schemas.openxmlformats.org/drawingml/2006/main" xmlns:r="http://schemas.openxmlformats.org/officeDocument/2006/relationships" xmlns:p="http://schemas.openxmlformats.org/presentationml/2006/main">
   <p:cSld name="Slide 7">
+    <p:bg>
+      <p:bgPr>
+        <a:solidFill>
+          <a:srgbClr val="FFFFFF"/>
+        </a:solidFill>
+      </p:bgPr>
+    </p:bg>
+    <p:spTree>
+      <p:nvGrpSpPr>
+        <p:cNvPr id="1" name=""/>
+        <p:cNvGrpSpPr/>
+        <p:nvPr/>
+      </p:nvGrpSpPr>
+      <p:grpSpPr>
+        <a:xfrm>
+          <a:off x="0" y="0"/>
+          <a:ext cx="0" cy="0"/>
+          <a:chOff x="0" y="0"/>
+          <a:chExt cx="0" cy="0"/>
+        </a:xfrm>
+      </p:grpSpPr>
+      <p:sp>
+        <p:nvSpPr>
+          <p:cNvPr id="2" name="Text 0"/>
+          <p:cNvSpPr/>
+          <p:nvPr/>
+        </p:nvSpPr>
+        <p:spPr>
+          <a:xfrm>
+            <a:off x="548640" y="411480"/>
+            <a:ext cx="11064240" cy="640080"/>
+          </a:xfrm>
+          <a:prstGeom prst="rect">
+            <a:avLst/>
+          </a:prstGeom>
+          <a:noFill/>
+          <a:ln/>
+        </p:spPr>
+        <p:txBody>
+          <a:bodyPr wrap="square" lIns="0" tIns="0" rIns="0" bIns="0" rtlCol="0" anchor="ctr"/>
+          <a:lstStyle/>
+          <a:p>
+            <a:pPr indent="0" marL="0">
+              <a:buNone/>
+            </a:pPr>
+            <a:r>
+              <a:rPr lang="en-US" sz="3200" b="1" dirty="0">
+                <a:solidFill>
+                  <a:srgbClr val="111111"/>
+                </a:solidFill>
+                <a:latin typeface="Arial" pitchFamily="34" charset="0"/>
+                <a:ea typeface="Arial" pitchFamily="34" charset="-122"/>
+                <a:cs typeface="Arial" pitchFamily="34" charset="-120"/>
+              </a:rPr>
+              <a:t>What this costs vs. the alternatives</a:t>
+            </a:r>
+            <a:endParaRPr lang="en-US" sz="3200" dirty="0"/>
+          </a:p>
+        </p:txBody>
+      </p:sp>
+      <p:sp>
+        <p:nvSpPr>
+          <p:cNvPr id="3" name="Text 1"/>
+          <p:cNvSpPr/>
+          <p:nvPr/>
+        </p:nvSpPr>
+        <p:spPr>
+          <a:xfrm>
+            <a:off x="548640" y="1097280"/>
+            <a:ext cx="10881360" cy="365760"/>
+          </a:xfrm>
+          <a:prstGeom prst="rect">
+            <a:avLst/>
+          </a:prstGeom>
+          <a:noFill/>
+          <a:ln/>
+        </p:spPr>
+        <p:txBody>
+          <a:bodyPr wrap="square" lIns="0" tIns="0" rIns="0" bIns="0" rtlCol="0" anchor="ctr"/>
+          <a:lstStyle/>
+          <a:p>
+            <a:pPr indent="0" marL="0">
+              <a:buNone/>
+            </a:pPr>
+            <a:r>
+              <a:rPr lang="en-US" sz="1500" dirty="0">
+                <a:solidFill>
+                  <a:srgbClr val="6E6E6E"/>
+                </a:solidFill>
+                <a:latin typeface="Arial" pitchFamily="34" charset="0"/>
+                <a:ea typeface="Arial" pitchFamily="34" charset="-122"/>
+                <a:cs typeface="Arial" pitchFamily="34" charset="-120"/>
+              </a:rPr>
+              <a:t>Every other way to buy scope writing carries fixed cost or scales with paperwork. This one scales only with collected revenue.</a:t>
+            </a:r>
+            <a:endParaRPr lang="en-US" sz="1500" dirty="0"/>
+          </a:p>
+        </p:txBody>
+      </p:sp>
+      <p:sp>
+        <p:nvSpPr>
+          <p:cNvPr id="4" name="Shape 2"/>
+          <p:cNvSpPr/>
+          <p:nvPr/>
+        </p:nvSpPr>
+        <p:spPr>
+          <a:xfrm>
+            <a:off x="548640" y="1737360"/>
+            <a:ext cx="3520440" cy="3566160"/>
+          </a:xfrm>
+          <a:prstGeom prst="roundRect">
+            <a:avLst>
+              <a:gd name="adj" fmla="val 2078"/>
+            </a:avLst>
+          </a:prstGeom>
+          <a:solidFill>
+            <a:srgbClr val="F5F5F5"/>
+          </a:solidFill>
+          <a:ln/>
+        </p:spPr>
+      </p:sp>
+      <p:sp>
+        <p:nvSpPr>
+          <p:cNvPr id="5" name="Shape 3"/>
+          <p:cNvSpPr/>
+          <p:nvPr/>
+        </p:nvSpPr>
+        <p:spPr>
+          <a:xfrm>
+            <a:off x="868680" y="2011680"/>
+            <a:ext cx="685800" cy="685800"/>
+          </a:xfrm>
+          <a:prstGeom prst="ellipse">
+            <a:avLst/>
+          </a:prstGeom>
+          <a:solidFill>
+            <a:srgbClr val="C8102E"/>
+          </a:solidFill>
+          <a:ln/>
+        </p:spPr>
+      </p:sp>
+      <p:pic>
+        <p:nvPicPr>
+          <p:cNvPr id="6" name="Image 0" descr="preencoded.png">    </p:cNvPr>
+          <p:cNvPicPr>
+            <a:picLocks noChangeAspect="1"/>
+          </p:cNvPicPr>
+          <p:nvPr/>
+        </p:nvPicPr>
+        <p:blipFill>
+          <a:blip r:embed="rId1"/>
+          <a:stretch>
+            <a:fillRect/>
+          </a:stretch>
+        </p:blipFill>
+        <p:spPr>
+          <a:xfrm>
+            <a:off x="1046988" y="2189988"/>
+            <a:ext cx="329184" cy="329184"/>
+          </a:xfrm>
+          <a:prstGeom prst="rect">
+            <a:avLst/>
+          </a:prstGeom>
+        </p:spPr>
+      </p:pic>
+      <p:sp>
+        <p:nvSpPr>
+          <p:cNvPr id="7" name="Text 4"/>
+          <p:cNvSpPr/>
+          <p:nvPr/>
+        </p:nvSpPr>
+        <p:spPr>
+          <a:xfrm>
+            <a:off x="1691640" y="2194560"/>
+            <a:ext cx="2286000" cy="365760"/>
+          </a:xfrm>
+          <a:prstGeom prst="rect">
+            <a:avLst/>
+          </a:prstGeom>
+          <a:noFill/>
+          <a:ln/>
+        </p:spPr>
+        <p:txBody>
+          <a:bodyPr wrap="square" lIns="0" tIns="0" rIns="0" bIns="0" rtlCol="0" anchor="ctr"/>
+          <a:lstStyle/>
+          <a:p>
+            <a:pPr indent="0" marL="0">
+              <a:buNone/>
+            </a:pPr>
+            <a:r>
+              <a:rPr lang="en-US" sz="1500" b="1" dirty="0">
+                <a:solidFill>
+                  <a:srgbClr val="111111"/>
+                </a:solidFill>
+                <a:latin typeface="Arial" pitchFamily="34" charset="0"/>
+                <a:ea typeface="Arial" pitchFamily="34" charset="-122"/>
+                <a:cs typeface="Arial" pitchFamily="34" charset="-120"/>
+              </a:rPr>
+              <a:t>Staff estimator</a:t>
+            </a:r>
+            <a:endParaRPr lang="en-US" sz="1500" dirty="0"/>
+          </a:p>
+        </p:txBody>
+      </p:sp>
+      <p:sp>
+        <p:nvSpPr>
+          <p:cNvPr id="8" name="Text 5"/>
+          <p:cNvSpPr/>
+          <p:nvPr/>
+        </p:nvSpPr>
+        <p:spPr>
+          <a:xfrm>
+            <a:off x="868680" y="2880360"/>
+            <a:ext cx="2926080" cy="777240"/>
+          </a:xfrm>
+          <a:prstGeom prst="rect">
+            <a:avLst/>
+          </a:prstGeom>
+          <a:noFill/>
+          <a:ln/>
+        </p:spPr>
+        <p:txBody>
+          <a:bodyPr wrap="square" lIns="0" tIns="0" rIns="0" bIns="0" rtlCol="0" anchor="ctr"/>
+          <a:lstStyle/>
+          <a:p>
+            <a:pPr indent="0" marL="0">
+              <a:buNone/>
+            </a:pPr>
+            <a:r>
+              <a:rPr lang="en-US" sz="4000" b="1" dirty="0">
+                <a:solidFill>
+                  <a:srgbClr val="C8102E"/>
+                </a:solidFill>
+                <a:latin typeface="Arial" pitchFamily="34" charset="0"/>
+                <a:ea typeface="Arial" pitchFamily="34" charset="-122"/>
+                <a:cs typeface="Arial" pitchFamily="34" charset="-120"/>
+              </a:rPr>
+              <a:t>$70–90k/yr</a:t>
+            </a:r>
+            <a:endParaRPr lang="en-US" sz="4000" dirty="0"/>
+          </a:p>
+        </p:txBody>
+      </p:sp>
+      <p:sp>
+        <p:nvSpPr>
+          <p:cNvPr id="9" name="Text 6"/>
+          <p:cNvSpPr/>
+          <p:nvPr/>
+        </p:nvSpPr>
+        <p:spPr>
+          <a:xfrm>
+            <a:off x="868680" y="3749040"/>
+            <a:ext cx="2926080" cy="1417320"/>
+          </a:xfrm>
+          <a:prstGeom prst="rect">
+            <a:avLst/>
+          </a:prstGeom>
+          <a:noFill/>
+          <a:ln/>
+        </p:spPr>
+        <p:txBody>
+          <a:bodyPr wrap="square" lIns="0" tIns="0" rIns="0" bIns="0" rtlCol="0" anchor="ctr"/>
+          <a:lstStyle/>
+          <a:p>
+            <a:pPr indent="0" marL="0">
+              <a:buNone/>
+            </a:pPr>
+            <a:r>
+              <a:rPr lang="en-US" sz="1200" dirty="0">
+                <a:solidFill>
+                  <a:srgbClr val="2A2A2A"/>
+                </a:solidFill>
+                <a:latin typeface="Arial" pitchFamily="34" charset="0"/>
+                <a:ea typeface="Arial" pitchFamily="34" charset="-122"/>
+                <a:cs typeface="Arial" pitchFamily="34" charset="-120"/>
+              </a:rPr>
+              <a:t>Salary paid whether jobs close or not. Pure fixed overhead, plus payroll burden — and someone still has to run lead targeting.</a:t>
+            </a:r>
+            <a:endParaRPr lang="en-US" sz="1200" dirty="0"/>
+          </a:p>
+        </p:txBody>
+      </p:sp>
+      <p:sp>
+        <p:nvSpPr>
+          <p:cNvPr id="10" name="Shape 7"/>
+          <p:cNvSpPr/>
+          <p:nvPr/>
+        </p:nvSpPr>
+        <p:spPr>
+          <a:xfrm>
+            <a:off x="4343400" y="1737360"/>
+            <a:ext cx="3520440" cy="3566160"/>
+          </a:xfrm>
+          <a:prstGeom prst="roundRect">
+            <a:avLst>
+              <a:gd name="adj" fmla="val 2078"/>
+            </a:avLst>
+          </a:prstGeom>
+          <a:solidFill>
+            <a:srgbClr val="F5F5F5"/>
+          </a:solidFill>
+          <a:ln/>
+        </p:spPr>
+      </p:sp>
+      <p:sp>
+        <p:nvSpPr>
+          <p:cNvPr id="11" name="Shape 8"/>
+          <p:cNvSpPr/>
+          <p:nvPr/>
+        </p:nvSpPr>
+        <p:spPr>
+          <a:xfrm>
+            <a:off x="4663440" y="2011680"/>
+            <a:ext cx="685800" cy="685800"/>
+          </a:xfrm>
+          <a:prstGeom prst="ellipse">
+            <a:avLst/>
+          </a:prstGeom>
+          <a:solidFill>
+            <a:srgbClr val="C8102E"/>
+          </a:solidFill>
+          <a:ln/>
+        </p:spPr>
+      </p:sp>
+      <p:pic>
+        <p:nvPicPr>
+          <p:cNvPr id="12" name="Image 1" descr="preencoded.png">    </p:cNvPr>
+          <p:cNvPicPr>
+            <a:picLocks noChangeAspect="1"/>
+          </p:cNvPicPr>
+          <p:nvPr/>
+        </p:nvPicPr>
+        <p:blipFill>
+          <a:blip r:embed="rId2"/>
+          <a:stretch>
+            <a:fillRect/>
+          </a:stretch>
+        </p:blipFill>
+        <p:spPr>
+          <a:xfrm>
+            <a:off x="4841748" y="2189988"/>
+            <a:ext cx="329184" cy="329184"/>
+          </a:xfrm>
+          <a:prstGeom prst="rect">
+            <a:avLst/>
+          </a:prstGeom>
+        </p:spPr>
+      </p:pic>
+      <p:sp>
+        <p:nvSpPr>
+          <p:cNvPr id="13" name="Text 9"/>
+          <p:cNvSpPr/>
+          <p:nvPr/>
+        </p:nvSpPr>
+        <p:spPr>
+          <a:xfrm>
+            <a:off x="5486400" y="2194560"/>
+            <a:ext cx="2286000" cy="365760"/>
+          </a:xfrm>
+          <a:prstGeom prst="rect">
+            <a:avLst/>
+          </a:prstGeom>
+          <a:noFill/>
+          <a:ln/>
+        </p:spPr>
+        <p:txBody>
+          <a:bodyPr wrap="square" lIns="0" tIns="0" rIns="0" bIns="0" rtlCol="0" anchor="ctr"/>
+          <a:lstStyle/>
+          <a:p>
+            <a:pPr indent="0" marL="0">
+              <a:buNone/>
+            </a:pPr>
+            <a:r>
+              <a:rPr lang="en-US" sz="1500" b="1" dirty="0">
+                <a:solidFill>
+                  <a:srgbClr val="111111"/>
+                </a:solidFill>
+                <a:latin typeface="Arial" pitchFamily="34" charset="0"/>
+                <a:ea typeface="Arial" pitchFamily="34" charset="-122"/>
+                <a:cs typeface="Arial" pitchFamily="34" charset="-120"/>
+              </a:rPr>
+              <a:t>Supplement service</a:t>
+            </a:r>
+            <a:endParaRPr lang="en-US" sz="1500" dirty="0"/>
+          </a:p>
+        </p:txBody>
+      </p:sp>
+      <p:sp>
+        <p:nvSpPr>
+          <p:cNvPr id="14" name="Text 10"/>
+          <p:cNvSpPr/>
+          <p:nvPr/>
+        </p:nvSpPr>
+        <p:spPr>
+          <a:xfrm>
+            <a:off x="4663440" y="2880360"/>
+            <a:ext cx="2926080" cy="777240"/>
+          </a:xfrm>
+          <a:prstGeom prst="rect">
+            <a:avLst/>
+          </a:prstGeom>
+          <a:noFill/>
+          <a:ln/>
+        </p:spPr>
+        <p:txBody>
+          <a:bodyPr wrap="square" lIns="0" tIns="0" rIns="0" bIns="0" rtlCol="0" anchor="ctr"/>
+          <a:lstStyle/>
+          <a:p>
+            <a:pPr indent="0" marL="0">
+              <a:buNone/>
+            </a:pPr>
+            <a:r>
+              <a:rPr lang="en-US" sz="4000" b="1" dirty="0">
+                <a:solidFill>
+                  <a:srgbClr val="C8102E"/>
+                </a:solidFill>
+                <a:latin typeface="Arial" pitchFamily="34" charset="0"/>
+                <a:ea typeface="Arial" pitchFamily="34" charset="-122"/>
+                <a:cs typeface="Arial" pitchFamily="34" charset="-120"/>
+              </a:rPr>
+              <a:t>25–33%</a:t>
+            </a:r>
+            <a:endParaRPr lang="en-US" sz="4000" dirty="0"/>
+          </a:p>
+        </p:txBody>
+      </p:sp>
+      <p:sp>
+        <p:nvSpPr>
+          <p:cNvPr id="15" name="Text 11"/>
+          <p:cNvSpPr/>
+          <p:nvPr/>
+        </p:nvSpPr>
+        <p:spPr>
+          <a:xfrm>
+            <a:off x="4663440" y="3749040"/>
+            <a:ext cx="2926080" cy="1417320"/>
+          </a:xfrm>
+          <a:prstGeom prst="rect">
+            <a:avLst/>
+          </a:prstGeom>
+          <a:noFill/>
+          <a:ln/>
+        </p:spPr>
+        <p:txBody>
+          <a:bodyPr wrap="square" lIns="0" tIns="0" rIns="0" bIns="0" rtlCol="0" anchor="ctr"/>
+          <a:lstStyle/>
+          <a:p>
+            <a:pPr indent="0" marL="0">
+              <a:buNone/>
+            </a:pPr>
+            <a:r>
+              <a:rPr lang="en-US" sz="1200" dirty="0">
+                <a:solidFill>
+                  <a:srgbClr val="2A2A2A"/>
+                </a:solidFill>
+                <a:latin typeface="Arial" pitchFamily="34" charset="0"/>
+                <a:ea typeface="Arial" pitchFamily="34" charset="-122"/>
+                <a:cs typeface="Arial" pitchFamily="34" charset="-120"/>
+              </a:rPr>
+              <a:t>of every supplement dollar they add — cost scales with paperwork volume, not with closed jobs, and they touch nothing else.</a:t>
+            </a:r>
+            <a:endParaRPr lang="en-US" sz="1200" dirty="0"/>
+          </a:p>
+        </p:txBody>
+      </p:sp>
+      <p:sp>
+        <p:nvSpPr>
+          <p:cNvPr id="16" name="Shape 12"/>
+          <p:cNvSpPr/>
+          <p:nvPr/>
+        </p:nvSpPr>
+        <p:spPr>
+          <a:xfrm>
+            <a:off x="8138160" y="1737360"/>
+            <a:ext cx="3520440" cy="3566160"/>
+          </a:xfrm>
+          <a:prstGeom prst="roundRect">
+            <a:avLst>
+              <a:gd name="adj" fmla="val 2078"/>
+            </a:avLst>
+          </a:prstGeom>
+          <a:solidFill>
+            <a:srgbClr val="111111"/>
+          </a:solidFill>
+          <a:ln/>
+        </p:spPr>
+      </p:sp>
+      <p:sp>
+        <p:nvSpPr>
+          <p:cNvPr id="17" name="Shape 13"/>
+          <p:cNvSpPr/>
+          <p:nvPr/>
+        </p:nvSpPr>
+        <p:spPr>
+          <a:xfrm>
+            <a:off x="8458200" y="2011680"/>
+            <a:ext cx="685800" cy="685800"/>
+          </a:xfrm>
+          <a:prstGeom prst="ellipse">
+            <a:avLst/>
+          </a:prstGeom>
+          <a:solidFill>
+            <a:srgbClr val="C8102E"/>
+          </a:solidFill>
+          <a:ln/>
+        </p:spPr>
+      </p:sp>
+      <p:pic>
+        <p:nvPicPr>
+          <p:cNvPr id="18" name="Image 2" descr="preencoded.png">    </p:cNvPr>
+          <p:cNvPicPr>
+            <a:picLocks noChangeAspect="1"/>
+          </p:cNvPicPr>
+          <p:nvPr/>
+        </p:nvPicPr>
+        <p:blipFill>
+          <a:blip r:embed="rId3"/>
+          <a:stretch>
+            <a:fillRect/>
+          </a:stretch>
+        </p:blipFill>
+        <p:spPr>
+          <a:xfrm>
+            <a:off x="8636508" y="2189988"/>
+            <a:ext cx="329184" cy="329184"/>
+          </a:xfrm>
+          <a:prstGeom prst="rect">
+            <a:avLst/>
+          </a:prstGeom>
+        </p:spPr>
+      </p:pic>
+      <p:sp>
+        <p:nvSpPr>
+          <p:cNvPr id="19" name="Text 14"/>
+          <p:cNvSpPr/>
+          <p:nvPr/>
+        </p:nvSpPr>
+        <p:spPr>
+          <a:xfrm>
+            <a:off x="9281160" y="2194560"/>
+            <a:ext cx="2286000" cy="365760"/>
+          </a:xfrm>
+          <a:prstGeom prst="rect">
+            <a:avLst/>
+          </a:prstGeom>
+          <a:noFill/>
+          <a:ln/>
+        </p:spPr>
+        <p:txBody>
+          <a:bodyPr wrap="square" lIns="0" tIns="0" rIns="0" bIns="0" rtlCol="0" anchor="ctr"/>
+          <a:lstStyle/>
+          <a:p>
+            <a:pPr indent="0" marL="0">
+              <a:buNone/>
+            </a:pPr>
+            <a:r>
+              <a:rPr lang="en-US" sz="1500" b="1" dirty="0">
+                <a:solidFill>
+                  <a:srgbClr val="FFFFFF"/>
+                </a:solidFill>
+                <a:latin typeface="Arial" pitchFamily="34" charset="0"/>
+                <a:ea typeface="Arial" pitchFamily="34" charset="-122"/>
+                <a:cs typeface="Arial" pitchFamily="34" charset="-120"/>
+              </a:rPr>
+              <a:t>This plan</a:t>
+            </a:r>
+            <a:endParaRPr lang="en-US" sz="1500" dirty="0"/>
+          </a:p>
+        </p:txBody>
+      </p:sp>
+      <p:sp>
+        <p:nvSpPr>
+          <p:cNvPr id="20" name="Text 15"/>
+          <p:cNvSpPr/>
+          <p:nvPr/>
+        </p:nvSpPr>
+        <p:spPr>
+          <a:xfrm>
+            <a:off x="8458200" y="2880360"/>
+            <a:ext cx="2926080" cy="777240"/>
+          </a:xfrm>
+          <a:prstGeom prst="rect">
+            <a:avLst/>
+          </a:prstGeom>
+          <a:noFill/>
+          <a:ln/>
+        </p:spPr>
+        <p:txBody>
+          <a:bodyPr wrap="square" lIns="0" tIns="0" rIns="0" bIns="0" rtlCol="0" anchor="ctr"/>
+          <a:lstStyle/>
+          <a:p>
+            <a:pPr indent="0" marL="0">
+              <a:buNone/>
+            </a:pPr>
+            <a:r>
+              <a:rPr lang="en-US" sz="4000" b="1" dirty="0">
+                <a:solidFill>
+                  <a:srgbClr val="C8102E"/>
+                </a:solidFill>
+                <a:latin typeface="Arial" pitchFamily="34" charset="0"/>
+                <a:ea typeface="Arial" pitchFamily="34" charset="-122"/>
+                <a:cs typeface="Arial" pitchFamily="34" charset="-120"/>
+              </a:rPr>
+              <a:t>$0</a:t>
+            </a:r>
+            <a:endParaRPr lang="en-US" sz="4000" dirty="0"/>
+          </a:p>
+        </p:txBody>
+      </p:sp>
+      <p:sp>
+        <p:nvSpPr>
+          <p:cNvPr id="21" name="Text 16"/>
+          <p:cNvSpPr/>
+          <p:nvPr/>
+        </p:nvSpPr>
+        <p:spPr>
+          <a:xfrm>
+            <a:off x="8458200" y="3749040"/>
+            <a:ext cx="2926080" cy="1417320"/>
+          </a:xfrm>
+          <a:prstGeom prst="rect">
+            <a:avLst/>
+          </a:prstGeom>
+          <a:noFill/>
+          <a:ln/>
+        </p:spPr>
+        <p:txBody>
+          <a:bodyPr wrap="square" lIns="0" tIns="0" rIns="0" bIns="0" rtlCol="0" anchor="ctr"/>
+          <a:lstStyle/>
+          <a:p>
+            <a:pPr indent="0" marL="0">
+              <a:buNone/>
+            </a:pPr>
+            <a:r>
+              <a:rPr lang="en-US" sz="1200" dirty="0">
+                <a:solidFill>
+                  <a:srgbClr val="E0E0E0"/>
+                </a:solidFill>
+                <a:latin typeface="Arial" pitchFamily="34" charset="0"/>
+                <a:ea typeface="Arial" pitchFamily="34" charset="-122"/>
+                <a:cs typeface="Arial" pitchFamily="34" charset="-120"/>
+              </a:rPr>
+              <a:t>until a job closes AND the check clears. Scope writing and lead operations in one seat, booked as a job cost on collected revenue.</a:t>
+            </a:r>
+            <a:endParaRPr lang="en-US" sz="1200" dirty="0"/>
+          </a:p>
+        </p:txBody>
+      </p:sp>
+      <p:sp>
+        <p:nvSpPr>
+          <p:cNvPr id="22" name="Text 17"/>
+          <p:cNvSpPr/>
+          <p:nvPr/>
+        </p:nvSpPr>
+        <p:spPr>
+          <a:xfrm>
+            <a:off x="548640" y="6473952"/>
+            <a:ext cx="9601200" cy="274320"/>
+          </a:xfrm>
+          <a:prstGeom prst="rect">
+            <a:avLst/>
+          </a:prstGeom>
+          <a:noFill/>
+          <a:ln/>
+        </p:spPr>
+        <p:txBody>
+          <a:bodyPr wrap="square" lIns="0" tIns="0" rIns="0" bIns="0" rtlCol="0" anchor="ctr"/>
+          <a:lstStyle/>
+          <a:p>
+            <a:pPr indent="0" marL="0">
+              <a:buNone/>
+            </a:pPr>
+            <a:r>
+              <a:rPr lang="en-US" sz="900" dirty="0">
+                <a:solidFill>
+                  <a:srgbClr val="6E6E6E"/>
+                </a:solidFill>
+                <a:latin typeface="Arial" pitchFamily="34" charset="0"/>
+                <a:ea typeface="Arial" pitchFamily="34" charset="-122"/>
+                <a:cs typeface="Arial" pitchFamily="34" charset="-120"/>
+              </a:rPr>
+              <a:t>Estimator salary and supplement-fee ranges are industry-typical figures for the region, not quotes.</a:t>
+            </a:r>
+            <a:endParaRPr lang="en-US" sz="900" dirty="0"/>
+          </a:p>
+        </p:txBody>
+      </p:sp>
+      <p:sp>
+        <p:nvSpPr>
+          <p:cNvPr id="23" name="Text 18"/>
+          <p:cNvSpPr/>
+          <p:nvPr/>
+        </p:nvSpPr>
+        <p:spPr>
+          <a:xfrm>
+            <a:off x="11274552" y="6473952"/>
+            <a:ext cx="457200" cy="274320"/>
+          </a:xfrm>
+          <a:prstGeom prst="rect">
+            <a:avLst/>
+          </a:prstGeom>
+          <a:noFill/>
+          <a:ln/>
+        </p:spPr>
+        <p:txBody>
+          <a:bodyPr wrap="square" lIns="0" tIns="0" rIns="0" bIns="0" rtlCol="0" anchor="ctr"/>
+          <a:lstStyle/>
+          <a:p>
+            <a:pPr algn="r" indent="0" marL="0">
+              <a:buNone/>
+            </a:pPr>
+            <a:r>
+              <a:rPr lang="en-US" sz="1000" dirty="0">
+                <a:solidFill>
+                  <a:srgbClr val="6E6E6E"/>
+                </a:solidFill>
+                <a:latin typeface="Arial" pitchFamily="34" charset="0"/>
+                <a:ea typeface="Arial" pitchFamily="34" charset="-122"/>
+                <a:cs typeface="Arial" pitchFamily="34" charset="-120"/>
+              </a:rPr>
+              <a:t>7</a:t>
+            </a:r>
+            <a:endParaRPr lang="en-US" sz="1000" dirty="0"/>
+          </a:p>
+        </p:txBody>
+      </p:sp>
+    </p:spTree>
+  </p:cSld>
+  <p:clrMapOvr>
+    <a:masterClrMapping/>
+  </p:clrMapOvr>
+</p:sld>
+</file>
+
+<file path=ppt/slides/slide8.xml><?xml version="1.0" encoding="utf-8"?>
+<p:sld xmlns:a="http://schemas.openxmlformats.org/drawingml/2006/main" xmlns:r="http://schemas.openxmlformats.org/officeDocument/2006/relationships" xmlns:p="http://schemas.openxmlformats.org/presentationml/2006/main">
+  <p:cSld name="Slide 8">
     <p:bg>
       <p:bgPr>
         <a:solidFill>

--- a/pitch/Commission-Plan.pptx
+++ b/pitch/Commission-Plan.pptx
@@ -2826,8 +2826,8 @@
         </p:nvSpPr>
         <p:spPr>
           <a:xfrm>
-            <a:off x="548640" y="1097280"/>
-            <a:ext cx="10881360" cy="502920"/>
+            <a:off x="548640" y="1051560"/>
+            <a:ext cx="10881360" cy="685800"/>
           </a:xfrm>
           <a:prstGeom prst="rect">
             <a:avLst/>
@@ -2843,7 +2843,7 @@
               <a:buNone/>
             </a:pPr>
             <a:r>
-              <a:rPr lang="en-US" sz="1450" b="1" dirty="0">
+              <a:rPr lang="en-US" sz="1400" b="1" dirty="0">
                 <a:solidFill>
                   <a:srgbClr val="2A2A2A"/>
                 </a:solidFill>
@@ -2857,7 +2857,7 @@
               <a:buNone/>
             </a:pPr>
             <a:r>
-              <a:rPr lang="en-US" sz="1450" dirty="0">
+              <a:rPr lang="en-US" sz="1400" dirty="0">
                 <a:solidFill>
                   <a:srgbClr val="6E6E6E"/>
                 </a:solidFill>
@@ -2865,9 +2865,23 @@
                 <a:ea typeface="Arial" pitchFamily="34" charset="-122"/>
                 <a:cs typeface="Arial" pitchFamily="34" charset="-120"/>
               </a:rPr>
-              <a:t>The % is set by the close rate on scoped leads, measured quarterly — better conversion, better rate, for both sides.</a:t>
-            </a:r>
-            <a:endParaRPr lang="en-US" sz="1450" dirty="0"/>
+              <a:t>The % is set by the close rate on scoped leads, measured quarterly. </a:t>
+            </a:r>
+            <a:pPr indent="0" marL="0">
+              <a:buNone/>
+            </a:pPr>
+            <a:r>
+              <a:rPr lang="en-US" sz="1400" b="1" dirty="0">
+                <a:solidFill>
+                  <a:srgbClr val="C8102E"/>
+                </a:solidFill>
+                <a:latin typeface="Arial" pitchFamily="34" charset="0"/>
+                <a:ea typeface="Arial" pitchFamily="34" charset="-122"/>
+                <a:cs typeface="Arial" pitchFamily="34" charset="-120"/>
+              </a:rPr>
+              <a:t>Cash flow: the 2% floor is paid as each job funds; quarter-end reconciliation trues up to the earned average rate — T^Rock never prepays a rate, and nothing is ever clawed back.</a:t>
+            </a:r>
+            <a:endParaRPr lang="en-US" sz="1400" dirty="0"/>
           </a:p>
         </p:txBody>
       </p:sp>
@@ -2886,7 +2900,7 @@
           </p:nvPr>
         </p:nvGraphicFramePr>
         <p:xfrm>
-          <a:off x="548640" y="1783080"/>
+          <a:off x="548640" y="1874520"/>
           <a:ext cx="11064240" cy="914400"/>
         </p:xfrm>
         <a:graphic>
@@ -8801,7 +8815,7 @@
                 <a:ea typeface="Arial" pitchFamily="34" charset="-122"/>
                 <a:cs typeface="Arial" pitchFamily="34" charset="-120"/>
               </a:rPr>
-              <a:t>Rate recalculates each quarter from actuals. Six-month check: if the numbers say adjust the curve, adjust the curve.</a:t>
+              <a:t>2% floor paid as jobs fund; quarter-end true-up to the earned average rate. Six-month check: if the numbers say adjust the curve, adjust the curve.</a:t>
             </a:r>
             <a:endParaRPr lang="en-US" sz="1250" dirty="0"/>
           </a:p>

--- a/pitch/Commission-Plan.pptx
+++ b/pitch/Commission-Plan.pptx
@@ -112,288 +112,6 @@
     </a:lvl9pPr>
   </p:defaultTextStyle>
 </p:presentation>
-</file>
-
-<file path=ppt/charts/chart1.xml><?xml version="1.0" encoding="utf-8"?>
-<c:chartSpace xmlns:c="http://schemas.openxmlformats.org/drawingml/2006/chart" xmlns:a="http://schemas.openxmlformats.org/drawingml/2006/main" xmlns:r="http://schemas.openxmlformats.org/officeDocument/2006/relationships">
-  <c:date1904 val="0"/>
-  <c:roundedCorners val="1"/>
-  <c:chart>
-    <c:title>
-      <c:tx>
-        <c:rich>
-          <a:bodyPr/>
-          <a:lstStyle/>
-          <a:p>
-            <a:pPr>
-              <a:defRPr sz="1400" b="0" i="0" u="none" strike="noStrike">
-                <a:solidFill>
-                  <a:srgbClr val="111111"/>
-                </a:solidFill>
-                <a:latin typeface="Arial"/>
-              </a:defRPr>
-            </a:pPr>
-            <a:r>
-              <a:rPr sz="1400" b="0" i="0" u="none" strike="noStrike">
-                <a:solidFill>
-                  <a:srgbClr val="111111"/>
-                </a:solidFill>
-                <a:latin typeface="Arial"/>
-              </a:rPr>
-              <a:t>T^Rock net profit per 100 scoped leads (after fee &amp; PM split)</a:t>
-            </a:r>
-          </a:p>
-        </c:rich>
-      </c:tx>
-      <c:layout/>
-      <c:overlay val="0"/>
-    </c:title>
-    <c:autoTitleDeleted val="0"/>
-    <c:plotArea>
-      <c:layout/>
-      <c:barChart>
-        <c:barDir val="col"/>
-        <c:grouping val="clustered"/>
-        <c:varyColors val="0"/>
-        <c:ser>
-          <c:idx val="0"/>
-          <c:order val="0"/>
-          <c:tx>
-            <c:strRef>
-              <c:f>Sheet1!$B$1</c:f>
-              <c:strCache>
-                <c:ptCount val="1"/>
-                <c:pt idx="0">
-                  <c:v>T^Rock net profit per 100 scoped leads</c:v>
-                </c:pt>
-              </c:strCache>
-            </c:strRef>
-          </c:tx>
-          <c:spPr>
-            <a:solidFill>
-              <a:srgbClr val="C8102E"/>
-            </a:solidFill>
-            <a:effectLst/>
-          </c:spPr>
-          <c:invertIfNegative val="0"/>
-          <c:dLbls>
-            <c:numFmt formatCode="$#,##0" sourceLinked="0"/>
-            <c:txPr>
-              <a:bodyPr/>
-              <a:lstStyle/>
-              <a:p>
-                <a:pPr>
-                  <a:defRPr b="0" i="0" strike="noStrike" sz="1200" u="none">
-                    <a:solidFill>
-                      <a:srgbClr val="111111"/>
-                    </a:solidFill>
-                    <a:latin typeface="Arial"/>
-                  </a:defRPr>
-                </a:pPr>
-              </a:p>
-            </c:txPr>
-            <c:showLegendKey val="0"/>
-            <c:showVal val="1"/>
-            <c:showCatName val="0"/>
-            <c:showSerName val="0"/>
-            <c:showPercent val="0"/>
-            <c:showBubbleSize val="0"/>
-            <c:showLeaderLines val="0"/>
-          </c:dLbls>
-          <c:cat>
-            <c:multiLvlStrRef>
-              <c:f>Sheet1!$A$2:$A$6</c:f>
-              <c:multiLvlStrCache>
-                <c:ptCount val="5"/>
-                <c:lvl>
-                  <c:pt idx="0">
-                    <c:v>20% close</c:v>
-                  </c:pt>
-                  <c:pt idx="1">
-                    <c:v>40% close</c:v>
-                  </c:pt>
-                  <c:pt idx="2">
-                    <c:v>60% close</c:v>
-                  </c:pt>
-                  <c:pt idx="3">
-                    <c:v>80% close</c:v>
-                  </c:pt>
-                  <c:pt idx="4">
-                    <c:v>100% close</c:v>
-                  </c:pt>
-                </c:lvl>
-              </c:multiLvlStrCache>
-            </c:multiLvlStrRef>
-          </c:cat>
-          <c:val>
-            <c:numRef>
-              <c:f>Sheet1!$B$2:$B$6</c:f>
-              <c:numCache>
-                <c:formatCode>General</c:formatCode>
-                <c:ptCount val="5"/>
-                <c:pt idx="0">
-                  <c:v>99000</c:v>
-                </c:pt>
-                <c:pt idx="1">
-                  <c:v>186000</c:v>
-                </c:pt>
-                <c:pt idx="2">
-                  <c:v>261000</c:v>
-                </c:pt>
-                <c:pt idx="3">
-                  <c:v>324000</c:v>
-                </c:pt>
-                <c:pt idx="4">
-                  <c:v>375000</c:v>
-                </c:pt>
-              </c:numCache>
-            </c:numRef>
-          </c:val>
-        </c:ser>
-        <c:dLbls>
-          <c:numFmt formatCode="$#,##0" sourceLinked="0"/>
-          <c:txPr>
-            <a:bodyPr/>
-            <a:lstStyle/>
-            <a:p>
-              <a:pPr>
-                <a:defRPr b="0" i="0" strike="noStrike" sz="1200" u="none">
-                  <a:solidFill>
-                    <a:srgbClr val="111111"/>
-                  </a:solidFill>
-                  <a:latin typeface="Arial"/>
-                </a:defRPr>
-              </a:pPr>
-            </a:p>
-          </c:txPr>
-          <c:showLegendKey val="0"/>
-          <c:showVal val="1"/>
-          <c:showCatName val="0"/>
-          <c:showSerName val="0"/>
-          <c:showPercent val="0"/>
-          <c:showBubbleSize val="0"/>
-          <c:showLeaderLines val="0"/>
-        </c:dLbls>
-        <c:gapWidth val="150"/>
-        <c:overlap val="0"/>
-        <c:axId val="2094734554"/>
-        <c:axId val="2094734552"/>
-        <c:axId val="2094734556"/>
-      </c:barChart>
-      <c:catAx>
-        <c:axId val="2094734554"/>
-        <c:scaling>
-          <c:orientation val="minMax"/>
-        </c:scaling>
-        <c:delete val="0"/>
-        <c:axPos val="b"/>
-        <c:numFmt formatCode="General" sourceLinked="1"/>
-        <c:majorTickMark val="out"/>
-        <c:minorTickMark val="none"/>
-        <c:tickLblPos val="low"/>
-        <c:spPr>
-          <a:ln w="12700" cap="flat">
-            <a:solidFill>
-              <a:srgbClr val="888888"/>
-            </a:solidFill>
-            <a:prstDash val="solid"/>
-            <a:round/>
-          </a:ln>
-        </c:spPr>
-        <c:txPr>
-          <a:bodyPr/>
-          <a:lstStyle/>
-          <a:p>
-            <a:pPr>
-              <a:defRPr sz="1200" b="0" i="0" u="none" strike="noStrike">
-                <a:solidFill>
-                  <a:srgbClr val="2A2A2A"/>
-                </a:solidFill>
-                <a:latin typeface="Arial"/>
-              </a:defRPr>
-            </a:pPr>
-            <a:endParaRPr lang="en-US"/>
-          </a:p>
-        </c:txPr>
-        <c:crossAx val="2094734552"/>
-        <c:crosses val="autoZero"/>
-        <c:auto val="1"/>
-        <c:lblAlgn val="ctr"/>
-        <c:noMultiLvlLbl val="1"/>
-      </c:catAx>
-      <c:valAx>
-        <c:axId val="2094734552"/>
-        <c:scaling>
-          <c:orientation val="minMax"/>
-          <c:max val="420000"/>
-        </c:scaling>
-        <c:delete val="0"/>
-        <c:axPos val="l"/>
-        <c:majorGridlines>
-          <c:spPr>
-            <a:ln w="6350" cap="flat">
-              <a:solidFill>
-                <a:srgbClr val="E8E8E8"/>
-              </a:solidFill>
-              <a:prstDash val="solid"/>
-              <a:round/>
-            </a:ln>
-          </c:spPr>
-        </c:majorGridlines>
-        <c:numFmt formatCode="$#,##0" sourceLinked="0"/>
-        <c:majorTickMark val="out"/>
-        <c:minorTickMark val="none"/>
-        <c:tickLblPos val="nextTo"/>
-        <c:spPr>
-          <a:ln w="12700" cap="flat">
-            <a:solidFill>
-              <a:srgbClr val="888888"/>
-            </a:solidFill>
-            <a:prstDash val="solid"/>
-            <a:round/>
-          </a:ln>
-        </c:spPr>
-        <c:txPr>
-          <a:bodyPr/>
-          <a:lstStyle/>
-          <a:p>
-            <a:pPr>
-              <a:defRPr sz="1000" b="0" i="0" u="none" strike="noStrike">
-                <a:solidFill>
-                  <a:srgbClr val="6E6E6E"/>
-                </a:solidFill>
-                <a:latin typeface="Arial"/>
-              </a:defRPr>
-            </a:pPr>
-            <a:endParaRPr lang="en-US"/>
-          </a:p>
-        </c:txPr>
-        <c:crossAx val="2094734554"/>
-        <c:crosses val="autoZero"/>
-        <c:crossBetween val="between"/>
-      </c:valAx>
-      <c:spPr>
-        <a:noFill/>
-        <a:ln>
-          <a:noFill/>
-        </a:ln>
-        <a:effectLst/>
-      </c:spPr>
-    </c:plotArea>
-    <c:plotVisOnly val="1"/>
-    <c:dispBlanksAs val="span"/>
-  </c:chart>
-  <c:spPr>
-    <a:noFill/>
-    <a:ln>
-      <a:noFill/>
-    </a:ln>
-    <a:effectLst/>
-  </c:spPr>
-  <c:externalData r:id="rId1">
-    <c:autoUpdate val="0"/>
-  </c:externalData>
-</c:chartSpace>
 </file>
 
 <file path=ppt/notesMasters/notesMaster1.xml><?xml version="1.0" encoding="utf-8"?>
@@ -6588,25 +6306,568 @@
           </a:p>
         </p:txBody>
       </p:sp>
-      <p:graphicFrame>
-        <p:nvGraphicFramePr>
-          <p:cNvPr id="4" name="Chart 0" descr=""/>
-          <p:cNvGraphicFramePr/>
-          <p:nvPr/>
-        </p:nvGraphicFramePr>
-        <p:xfrm>
-          <a:off x="548640" y="1600200"/>
-          <a:ext cx="11064240" cy="3749040"/>
-        </p:xfrm>
-        <a:graphic xmlns:a="http://schemas.openxmlformats.org/drawingml/2006/main">
-          <a:graphicData uri="http://schemas.openxmlformats.org/drawingml/2006/chart">
-            <c:chart xmlns:c="http://schemas.openxmlformats.org/drawingml/2006/chart" r:id="rId1"/>
-          </a:graphicData>
-        </a:graphic>
-      </p:graphicFrame>
-      <p:sp>
-        <p:nvSpPr>
-          <p:cNvPr id="5" name="Shape 2"/>
+      <p:sp>
+        <p:nvSpPr>
+          <p:cNvPr id="4" name="Text 2"/>
+          <p:cNvSpPr/>
+          <p:nvPr/>
+        </p:nvSpPr>
+        <p:spPr>
+          <a:xfrm>
+            <a:off x="548640" y="1600200"/>
+            <a:ext cx="11064240" cy="320040"/>
+          </a:xfrm>
+          <a:prstGeom prst="rect">
+            <a:avLst/>
+          </a:prstGeom>
+          <a:noFill/>
+          <a:ln/>
+        </p:spPr>
+        <p:txBody>
+          <a:bodyPr wrap="square" lIns="0" tIns="0" rIns="0" bIns="0" rtlCol="0" anchor="ctr"/>
+          <a:lstStyle/>
+          <a:p>
+            <a:pPr indent="0" marL="0">
+              <a:buNone/>
+            </a:pPr>
+            <a:r>
+              <a:rPr lang="en-US" sz="1400" b="1" dirty="0">
+                <a:solidFill>
+                  <a:srgbClr val="111111"/>
+                </a:solidFill>
+                <a:latin typeface="Arial" pitchFamily="34" charset="0"/>
+                <a:ea typeface="Arial" pitchFamily="34" charset="-122"/>
+                <a:cs typeface="Arial" pitchFamily="34" charset="-120"/>
+              </a:rPr>
+              <a:t>T^Rock net profit per 100 scoped leads  (after fee &amp; PM split)</a:t>
+            </a:r>
+            <a:endParaRPr lang="en-US" sz="1400" dirty="0"/>
+          </a:p>
+        </p:txBody>
+      </p:sp>
+      <p:sp>
+        <p:nvSpPr>
+          <p:cNvPr id="5" name="Shape 3"/>
+          <p:cNvSpPr/>
+          <p:nvPr/>
+        </p:nvSpPr>
+        <p:spPr>
+          <a:xfrm>
+            <a:off x="685800" y="4846320"/>
+            <a:ext cx="10789920" cy="13716"/>
+          </a:xfrm>
+          <a:prstGeom prst="rect">
+            <a:avLst/>
+          </a:prstGeom>
+          <a:solidFill>
+            <a:srgbClr val="CCCCCC"/>
+          </a:solidFill>
+          <a:ln/>
+        </p:spPr>
+      </p:sp>
+      <p:sp>
+        <p:nvSpPr>
+          <p:cNvPr id="6" name="Shape 4"/>
+          <p:cNvSpPr/>
+          <p:nvPr/>
+        </p:nvSpPr>
+        <p:spPr>
+          <a:xfrm>
+            <a:off x="1005840" y="4194536"/>
+            <a:ext cx="1371600" cy="651784"/>
+          </a:xfrm>
+          <a:prstGeom prst="roundRect">
+            <a:avLst>
+              <a:gd name="adj" fmla="val 4209"/>
+            </a:avLst>
+          </a:prstGeom>
+          <a:solidFill>
+            <a:srgbClr val="B9BDC2"/>
+          </a:solidFill>
+          <a:ln/>
+        </p:spPr>
+      </p:sp>
+      <p:sp>
+        <p:nvSpPr>
+          <p:cNvPr id="7" name="Text 5"/>
+          <p:cNvSpPr/>
+          <p:nvPr/>
+        </p:nvSpPr>
+        <p:spPr>
+          <a:xfrm>
+            <a:off x="685800" y="3847064"/>
+            <a:ext cx="2011680" cy="320040"/>
+          </a:xfrm>
+          <a:prstGeom prst="rect">
+            <a:avLst/>
+          </a:prstGeom>
+          <a:noFill/>
+          <a:ln/>
+        </p:spPr>
+        <p:txBody>
+          <a:bodyPr wrap="square" lIns="0" tIns="0" rIns="0" bIns="0" rtlCol="0" anchor="ctr"/>
+          <a:lstStyle/>
+          <a:p>
+            <a:pPr algn="ctr" indent="0" marL="0">
+              <a:buNone/>
+            </a:pPr>
+            <a:r>
+              <a:rPr lang="en-US" sz="1350" b="1" dirty="0">
+                <a:solidFill>
+                  <a:srgbClr val="2A2A2A"/>
+                </a:solidFill>
+                <a:latin typeface="Arial" pitchFamily="34" charset="0"/>
+                <a:ea typeface="Arial" pitchFamily="34" charset="-122"/>
+                <a:cs typeface="Arial" pitchFamily="34" charset="-120"/>
+              </a:rPr>
+              <a:t>$99,000</a:t>
+            </a:r>
+            <a:endParaRPr lang="en-US" sz="1350" dirty="0"/>
+          </a:p>
+        </p:txBody>
+      </p:sp>
+      <p:sp>
+        <p:nvSpPr>
+          <p:cNvPr id="8" name="Text 6"/>
+          <p:cNvSpPr/>
+          <p:nvPr/>
+        </p:nvSpPr>
+        <p:spPr>
+          <a:xfrm>
+            <a:off x="685800" y="4919472"/>
+            <a:ext cx="2011680" cy="274320"/>
+          </a:xfrm>
+          <a:prstGeom prst="rect">
+            <a:avLst/>
+          </a:prstGeom>
+          <a:noFill/>
+          <a:ln/>
+        </p:spPr>
+        <p:txBody>
+          <a:bodyPr wrap="square" lIns="0" tIns="0" rIns="0" bIns="0" rtlCol="0" anchor="ctr"/>
+          <a:lstStyle/>
+          <a:p>
+            <a:pPr algn="ctr" indent="0" marL="0">
+              <a:buNone/>
+            </a:pPr>
+            <a:r>
+              <a:rPr lang="en-US" sz="1200" dirty="0">
+                <a:solidFill>
+                  <a:srgbClr val="2A2A2A"/>
+                </a:solidFill>
+                <a:latin typeface="Arial" pitchFamily="34" charset="0"/>
+                <a:ea typeface="Arial" pitchFamily="34" charset="-122"/>
+                <a:cs typeface="Arial" pitchFamily="34" charset="-120"/>
+              </a:rPr>
+              <a:t>20% close</a:t>
+            </a:r>
+            <a:endParaRPr lang="en-US" sz="1200" dirty="0"/>
+          </a:p>
+        </p:txBody>
+      </p:sp>
+      <p:sp>
+        <p:nvSpPr>
+          <p:cNvPr id="9" name="Shape 7"/>
+          <p:cNvSpPr/>
+          <p:nvPr/>
+        </p:nvSpPr>
+        <p:spPr>
+          <a:xfrm>
+            <a:off x="3200400" y="3621756"/>
+            <a:ext cx="1371600" cy="1224564"/>
+          </a:xfrm>
+          <a:prstGeom prst="roundRect">
+            <a:avLst>
+              <a:gd name="adj" fmla="val 2240"/>
+            </a:avLst>
+          </a:prstGeom>
+          <a:solidFill>
+            <a:srgbClr val="B9BDC2"/>
+          </a:solidFill>
+          <a:ln/>
+        </p:spPr>
+      </p:sp>
+      <p:sp>
+        <p:nvSpPr>
+          <p:cNvPr id="10" name="Text 8"/>
+          <p:cNvSpPr/>
+          <p:nvPr/>
+        </p:nvSpPr>
+        <p:spPr>
+          <a:xfrm>
+            <a:off x="2880360" y="3274284"/>
+            <a:ext cx="2011680" cy="320040"/>
+          </a:xfrm>
+          <a:prstGeom prst="rect">
+            <a:avLst/>
+          </a:prstGeom>
+          <a:noFill/>
+          <a:ln/>
+        </p:spPr>
+        <p:txBody>
+          <a:bodyPr wrap="square" lIns="0" tIns="0" rIns="0" bIns="0" rtlCol="0" anchor="ctr"/>
+          <a:lstStyle/>
+          <a:p>
+            <a:pPr algn="ctr" indent="0" marL="0">
+              <a:buNone/>
+            </a:pPr>
+            <a:r>
+              <a:rPr lang="en-US" sz="1350" b="1" dirty="0">
+                <a:solidFill>
+                  <a:srgbClr val="2A2A2A"/>
+                </a:solidFill>
+                <a:latin typeface="Arial" pitchFamily="34" charset="0"/>
+                <a:ea typeface="Arial" pitchFamily="34" charset="-122"/>
+                <a:cs typeface="Arial" pitchFamily="34" charset="-120"/>
+              </a:rPr>
+              <a:t>$186,000</a:t>
+            </a:r>
+            <a:endParaRPr lang="en-US" sz="1350" dirty="0"/>
+          </a:p>
+        </p:txBody>
+      </p:sp>
+      <p:sp>
+        <p:nvSpPr>
+          <p:cNvPr id="11" name="Text 9"/>
+          <p:cNvSpPr/>
+          <p:nvPr/>
+        </p:nvSpPr>
+        <p:spPr>
+          <a:xfrm>
+            <a:off x="2880360" y="4919472"/>
+            <a:ext cx="2011680" cy="274320"/>
+          </a:xfrm>
+          <a:prstGeom prst="rect">
+            <a:avLst/>
+          </a:prstGeom>
+          <a:noFill/>
+          <a:ln/>
+        </p:spPr>
+        <p:txBody>
+          <a:bodyPr wrap="square" lIns="0" tIns="0" rIns="0" bIns="0" rtlCol="0" anchor="ctr"/>
+          <a:lstStyle/>
+          <a:p>
+            <a:pPr algn="ctr" indent="0" marL="0">
+              <a:buNone/>
+            </a:pPr>
+            <a:r>
+              <a:rPr lang="en-US" sz="1200" dirty="0">
+                <a:solidFill>
+                  <a:srgbClr val="2A2A2A"/>
+                </a:solidFill>
+                <a:latin typeface="Arial" pitchFamily="34" charset="0"/>
+                <a:ea typeface="Arial" pitchFamily="34" charset="-122"/>
+                <a:cs typeface="Arial" pitchFamily="34" charset="-120"/>
+              </a:rPr>
+              <a:t>40% close</a:t>
+            </a:r>
+            <a:endParaRPr lang="en-US" sz="1200" dirty="0"/>
+          </a:p>
+        </p:txBody>
+      </p:sp>
+      <p:sp>
+        <p:nvSpPr>
+          <p:cNvPr id="12" name="Shape 10"/>
+          <p:cNvSpPr/>
+          <p:nvPr/>
+        </p:nvSpPr>
+        <p:spPr>
+          <a:xfrm>
+            <a:off x="5394960" y="3127980"/>
+            <a:ext cx="1371600" cy="1718340"/>
+          </a:xfrm>
+          <a:prstGeom prst="roundRect">
+            <a:avLst>
+              <a:gd name="adj" fmla="val 2000"/>
+            </a:avLst>
+          </a:prstGeom>
+          <a:solidFill>
+            <a:srgbClr val="B9BDC2"/>
+          </a:solidFill>
+          <a:ln/>
+        </p:spPr>
+      </p:sp>
+      <p:sp>
+        <p:nvSpPr>
+          <p:cNvPr id="13" name="Text 11"/>
+          <p:cNvSpPr/>
+          <p:nvPr/>
+        </p:nvSpPr>
+        <p:spPr>
+          <a:xfrm>
+            <a:off x="5074920" y="2780508"/>
+            <a:ext cx="2011680" cy="320040"/>
+          </a:xfrm>
+          <a:prstGeom prst="rect">
+            <a:avLst/>
+          </a:prstGeom>
+          <a:noFill/>
+          <a:ln/>
+        </p:spPr>
+        <p:txBody>
+          <a:bodyPr wrap="square" lIns="0" tIns="0" rIns="0" bIns="0" rtlCol="0" anchor="ctr"/>
+          <a:lstStyle/>
+          <a:p>
+            <a:pPr algn="ctr" indent="0" marL="0">
+              <a:buNone/>
+            </a:pPr>
+            <a:r>
+              <a:rPr lang="en-US" sz="1350" b="1" dirty="0">
+                <a:solidFill>
+                  <a:srgbClr val="2A2A2A"/>
+                </a:solidFill>
+                <a:latin typeface="Arial" pitchFamily="34" charset="0"/>
+                <a:ea typeface="Arial" pitchFamily="34" charset="-122"/>
+                <a:cs typeface="Arial" pitchFamily="34" charset="-120"/>
+              </a:rPr>
+              <a:t>$261,000</a:t>
+            </a:r>
+            <a:endParaRPr lang="en-US" sz="1350" dirty="0"/>
+          </a:p>
+        </p:txBody>
+      </p:sp>
+      <p:sp>
+        <p:nvSpPr>
+          <p:cNvPr id="14" name="Text 12"/>
+          <p:cNvSpPr/>
+          <p:nvPr/>
+        </p:nvSpPr>
+        <p:spPr>
+          <a:xfrm>
+            <a:off x="5074920" y="4919472"/>
+            <a:ext cx="2011680" cy="274320"/>
+          </a:xfrm>
+          <a:prstGeom prst="rect">
+            <a:avLst/>
+          </a:prstGeom>
+          <a:noFill/>
+          <a:ln/>
+        </p:spPr>
+        <p:txBody>
+          <a:bodyPr wrap="square" lIns="0" tIns="0" rIns="0" bIns="0" rtlCol="0" anchor="ctr"/>
+          <a:lstStyle/>
+          <a:p>
+            <a:pPr algn="ctr" indent="0" marL="0">
+              <a:buNone/>
+            </a:pPr>
+            <a:r>
+              <a:rPr lang="en-US" sz="1200" dirty="0">
+                <a:solidFill>
+                  <a:srgbClr val="2A2A2A"/>
+                </a:solidFill>
+                <a:latin typeface="Arial" pitchFamily="34" charset="0"/>
+                <a:ea typeface="Arial" pitchFamily="34" charset="-122"/>
+                <a:cs typeface="Arial" pitchFamily="34" charset="-120"/>
+              </a:rPr>
+              <a:t>60% close</a:t>
+            </a:r>
+            <a:endParaRPr lang="en-US" sz="1200" dirty="0"/>
+          </a:p>
+        </p:txBody>
+      </p:sp>
+      <p:sp>
+        <p:nvSpPr>
+          <p:cNvPr id="15" name="Shape 13"/>
+          <p:cNvSpPr/>
+          <p:nvPr/>
+        </p:nvSpPr>
+        <p:spPr>
+          <a:xfrm>
+            <a:off x="7589520" y="2713208"/>
+            <a:ext cx="1371600" cy="2133112"/>
+          </a:xfrm>
+          <a:prstGeom prst="roundRect">
+            <a:avLst>
+              <a:gd name="adj" fmla="val 2000"/>
+            </a:avLst>
+          </a:prstGeom>
+          <a:solidFill>
+            <a:srgbClr val="B9BDC2"/>
+          </a:solidFill>
+          <a:ln/>
+        </p:spPr>
+      </p:sp>
+      <p:sp>
+        <p:nvSpPr>
+          <p:cNvPr id="16" name="Text 14"/>
+          <p:cNvSpPr/>
+          <p:nvPr/>
+        </p:nvSpPr>
+        <p:spPr>
+          <a:xfrm>
+            <a:off x="7269480" y="2365736"/>
+            <a:ext cx="2011680" cy="320040"/>
+          </a:xfrm>
+          <a:prstGeom prst="rect">
+            <a:avLst/>
+          </a:prstGeom>
+          <a:noFill/>
+          <a:ln/>
+        </p:spPr>
+        <p:txBody>
+          <a:bodyPr wrap="square" lIns="0" tIns="0" rIns="0" bIns="0" rtlCol="0" anchor="ctr"/>
+          <a:lstStyle/>
+          <a:p>
+            <a:pPr algn="ctr" indent="0" marL="0">
+              <a:buNone/>
+            </a:pPr>
+            <a:r>
+              <a:rPr lang="en-US" sz="1350" b="1" dirty="0">
+                <a:solidFill>
+                  <a:srgbClr val="2A2A2A"/>
+                </a:solidFill>
+                <a:latin typeface="Arial" pitchFamily="34" charset="0"/>
+                <a:ea typeface="Arial" pitchFamily="34" charset="-122"/>
+                <a:cs typeface="Arial" pitchFamily="34" charset="-120"/>
+              </a:rPr>
+              <a:t>$324,000</a:t>
+            </a:r>
+            <a:endParaRPr lang="en-US" sz="1350" dirty="0"/>
+          </a:p>
+        </p:txBody>
+      </p:sp>
+      <p:sp>
+        <p:nvSpPr>
+          <p:cNvPr id="17" name="Text 15"/>
+          <p:cNvSpPr/>
+          <p:nvPr/>
+        </p:nvSpPr>
+        <p:spPr>
+          <a:xfrm>
+            <a:off x="7269480" y="4919472"/>
+            <a:ext cx="2011680" cy="274320"/>
+          </a:xfrm>
+          <a:prstGeom prst="rect">
+            <a:avLst/>
+          </a:prstGeom>
+          <a:noFill/>
+          <a:ln/>
+        </p:spPr>
+        <p:txBody>
+          <a:bodyPr wrap="square" lIns="0" tIns="0" rIns="0" bIns="0" rtlCol="0" anchor="ctr"/>
+          <a:lstStyle/>
+          <a:p>
+            <a:pPr algn="ctr" indent="0" marL="0">
+              <a:buNone/>
+            </a:pPr>
+            <a:r>
+              <a:rPr lang="en-US" sz="1200" dirty="0">
+                <a:solidFill>
+                  <a:srgbClr val="2A2A2A"/>
+                </a:solidFill>
+                <a:latin typeface="Arial" pitchFamily="34" charset="0"/>
+                <a:ea typeface="Arial" pitchFamily="34" charset="-122"/>
+                <a:cs typeface="Arial" pitchFamily="34" charset="-120"/>
+              </a:rPr>
+              <a:t>80% close</a:t>
+            </a:r>
+            <a:endParaRPr lang="en-US" sz="1200" dirty="0"/>
+          </a:p>
+        </p:txBody>
+      </p:sp>
+      <p:sp>
+        <p:nvSpPr>
+          <p:cNvPr id="18" name="Shape 16"/>
+          <p:cNvSpPr/>
+          <p:nvPr/>
+        </p:nvSpPr>
+        <p:spPr>
+          <a:xfrm>
+            <a:off x="9784080" y="2377440"/>
+            <a:ext cx="1371600" cy="2468880"/>
+          </a:xfrm>
+          <a:prstGeom prst="roundRect">
+            <a:avLst>
+              <a:gd name="adj" fmla="val 2000"/>
+            </a:avLst>
+          </a:prstGeom>
+          <a:solidFill>
+            <a:srgbClr val="C8102E"/>
+          </a:solidFill>
+          <a:ln/>
+        </p:spPr>
+      </p:sp>
+      <p:sp>
+        <p:nvSpPr>
+          <p:cNvPr id="19" name="Text 17"/>
+          <p:cNvSpPr/>
+          <p:nvPr/>
+        </p:nvSpPr>
+        <p:spPr>
+          <a:xfrm>
+            <a:off x="9464040" y="2029968"/>
+            <a:ext cx="2011680" cy="320040"/>
+          </a:xfrm>
+          <a:prstGeom prst="rect">
+            <a:avLst/>
+          </a:prstGeom>
+          <a:noFill/>
+          <a:ln/>
+        </p:spPr>
+        <p:txBody>
+          <a:bodyPr wrap="square" lIns="0" tIns="0" rIns="0" bIns="0" rtlCol="0" anchor="ctr"/>
+          <a:lstStyle/>
+          <a:p>
+            <a:pPr algn="ctr" indent="0" marL="0">
+              <a:buNone/>
+            </a:pPr>
+            <a:r>
+              <a:rPr lang="en-US" sz="1600" b="1" dirty="0">
+                <a:solidFill>
+                  <a:srgbClr val="C8102E"/>
+                </a:solidFill>
+                <a:latin typeface="Arial" pitchFamily="34" charset="0"/>
+                <a:ea typeface="Arial" pitchFamily="34" charset="-122"/>
+                <a:cs typeface="Arial" pitchFamily="34" charset="-120"/>
+              </a:rPr>
+              <a:t>$375,000</a:t>
+            </a:r>
+            <a:endParaRPr lang="en-US" sz="1600" dirty="0"/>
+          </a:p>
+        </p:txBody>
+      </p:sp>
+      <p:sp>
+        <p:nvSpPr>
+          <p:cNvPr id="20" name="Text 18"/>
+          <p:cNvSpPr/>
+          <p:nvPr/>
+        </p:nvSpPr>
+        <p:spPr>
+          <a:xfrm>
+            <a:off x="9464040" y="4919472"/>
+            <a:ext cx="2011680" cy="274320"/>
+          </a:xfrm>
+          <a:prstGeom prst="rect">
+            <a:avLst/>
+          </a:prstGeom>
+          <a:noFill/>
+          <a:ln/>
+        </p:spPr>
+        <p:txBody>
+          <a:bodyPr wrap="square" lIns="0" tIns="0" rIns="0" bIns="0" rtlCol="0" anchor="ctr"/>
+          <a:lstStyle/>
+          <a:p>
+            <a:pPr algn="ctr" indent="0" marL="0">
+              <a:buNone/>
+            </a:pPr>
+            <a:r>
+              <a:rPr lang="en-US" sz="1200" b="1" dirty="0">
+                <a:solidFill>
+                  <a:srgbClr val="C8102E"/>
+                </a:solidFill>
+                <a:latin typeface="Arial" pitchFamily="34" charset="0"/>
+                <a:ea typeface="Arial" pitchFamily="34" charset="-122"/>
+                <a:cs typeface="Arial" pitchFamily="34" charset="-120"/>
+              </a:rPr>
+              <a:t>100% close</a:t>
+            </a:r>
+            <a:endParaRPr lang="en-US" sz="1200" dirty="0"/>
+          </a:p>
+        </p:txBody>
+      </p:sp>
+      <p:sp>
+        <p:nvSpPr>
+          <p:cNvPr id="21" name="Shape 19"/>
           <p:cNvSpPr/>
           <p:nvPr/>
         </p:nvSpPr>
@@ -6628,7 +6889,7 @@
       </p:sp>
       <p:sp>
         <p:nvSpPr>
-          <p:cNvPr id="6" name="Text 3"/>
+          <p:cNvPr id="22" name="Text 20"/>
           <p:cNvSpPr/>
           <p:nvPr/>
         </p:nvSpPr>
@@ -6681,7 +6942,7 @@
       </p:sp>
       <p:sp>
         <p:nvSpPr>
-          <p:cNvPr id="7" name="Text 4"/>
+          <p:cNvPr id="23" name="Text 21"/>
           <p:cNvSpPr/>
           <p:nvPr/>
         </p:nvSpPr>
@@ -6720,7 +6981,7 @@
       </p:sp>
       <p:sp>
         <p:nvSpPr>
-          <p:cNvPr id="8" name="Text 5"/>
+          <p:cNvPr id="24" name="Text 22"/>
           <p:cNvSpPr/>
           <p:nvPr/>
         </p:nvSpPr>

--- a/pitch/Commission-Plan.pptx
+++ b/pitch/Commission-Plan.pptx
@@ -2569,7 +2569,7 @@
                 <a:ea typeface="Arial" pitchFamily="34" charset="-122"/>
                 <a:cs typeface="Arial" pitchFamily="34" charset="-120"/>
               </a:rPr>
-              <a:t>Fee = % of RCV on scoped jobs, paid only when closed AND collected. </a:t>
+              <a:t>Fee = % of job profit on scoped jobs, booked as a job expense, paid only when closed AND collected. </a:t>
             </a:r>
             <a:pPr indent="0" marL="0">
               <a:buNone/>
@@ -3061,7 +3061,7 @@
                           <a:ea typeface="Arial" pitchFamily="34" charset="-122"/>
                           <a:cs typeface="Arial" pitchFamily="34" charset="-120"/>
                         </a:rPr>
-                        <a:t>Fee (% of RCV)</a:t>
+                        <a:t>Fee (% of job profit)</a:t>
                       </a:r>
                       <a:endParaRPr lang="en-US" sz="1200" dirty="0">
                         <a:latin typeface="Arial" charset="0"/>
@@ -3845,9 +3845,74 @@
                           <a:ea typeface="Arial" pitchFamily="34" charset="-122"/>
                           <a:cs typeface="Arial" pitchFamily="34" charset="-120"/>
                         </a:rPr>
-                        <a:t>Fee per closed $30,000 job</a:t>
+                        <a:t>Fee per closed job ($15,000 profit)</a:t>
                       </a:r>
                       <a:endParaRPr lang="en-US" sz="1200" dirty="0">
+                        <a:latin typeface="Arial" charset="0"/>
+                        <a:ea typeface="Arial" charset="0"/>
+                        <a:cs typeface="Arial" charset="0"/>
+                      </a:endParaRPr>
+                    </a:p>
+                  </a:txBody>
+                  <a:tcPr marL="64008" marR="64008" marT="64008" marB="64008" anchor="ctr">
+                    <a:lnL w="9525" cap="flat" cmpd="sng" algn="ctr">
+                      <a:solidFill>
+                        <a:srgbClr val="DDDDDD"/>
+                      </a:solidFill>
+                      <a:prstDash val="solid"/>
+                      <a:round/>
+                      <a:headEnd type="none" w="med" len="med"/>
+                      <a:tailEnd type="none" w="med" len="med"/>
+                    </a:lnL>
+                    <a:lnR w="9525" cap="flat" cmpd="sng" algn="ctr">
+                      <a:solidFill>
+                        <a:srgbClr val="DDDDDD"/>
+                      </a:solidFill>
+                      <a:prstDash val="solid"/>
+                      <a:round/>
+                      <a:headEnd type="none" w="med" len="med"/>
+                      <a:tailEnd type="none" w="med" len="med"/>
+                    </a:lnR>
+                    <a:lnT w="9525" cap="flat" cmpd="sng" algn="ctr">
+                      <a:solidFill>
+                        <a:srgbClr val="DDDDDD"/>
+                      </a:solidFill>
+                      <a:prstDash val="solid"/>
+                      <a:round/>
+                      <a:headEnd type="none" w="med" len="med"/>
+                      <a:tailEnd type="none" w="med" len="med"/>
+                    </a:lnT>
+                    <a:lnB w="9525" cap="flat" cmpd="sng" algn="ctr">
+                      <a:solidFill>
+                        <a:srgbClr val="DDDDDD"/>
+                      </a:solidFill>
+                      <a:prstDash val="solid"/>
+                      <a:round/>
+                      <a:headEnd type="none" w="med" len="med"/>
+                      <a:tailEnd type="none" w="med" len="med"/>
+                    </a:lnB>
+                  </a:tcPr>
+                </a:tc>
+                <a:tc>
+                  <a:txBody>
+                    <a:bodyPr/>
+                    <a:lstStyle/>
+                    <a:p>
+                      <a:pPr algn="ctr" indent="0" marL="0">
+                        <a:buNone/>
+                      </a:pPr>
+                      <a:r>
+                        <a:rPr lang="en-US" sz="1250" dirty="0">
+                          <a:solidFill>
+                            <a:srgbClr val="2A2A2A"/>
+                          </a:solidFill>
+                          <a:latin typeface="Arial" pitchFamily="34" charset="0"/>
+                          <a:ea typeface="Arial" pitchFamily="34" charset="-122"/>
+                          <a:cs typeface="Arial" pitchFamily="34" charset="-120"/>
+                        </a:rPr>
+                        <a:t>$300</a:t>
+                      </a:r>
+                      <a:endParaRPr lang="en-US" sz="1250" dirty="0">
                         <a:latin typeface="Arial" charset="0"/>
                         <a:ea typeface="Arial" charset="0"/>
                         <a:cs typeface="Arial" charset="0"/>
@@ -3975,7 +4040,7 @@
                           <a:ea typeface="Arial" pitchFamily="34" charset="-122"/>
                           <a:cs typeface="Arial" pitchFamily="34" charset="-120"/>
                         </a:rPr>
-                        <a:t>$1,200</a:t>
+                        <a:t>$900</a:t>
                       </a:r>
                       <a:endParaRPr lang="en-US" sz="1250" dirty="0">
                         <a:latin typeface="Arial" charset="0"/>
@@ -4040,7 +4105,7 @@
                           <a:ea typeface="Arial" pitchFamily="34" charset="-122"/>
                           <a:cs typeface="Arial" pitchFamily="34" charset="-120"/>
                         </a:rPr>
-                        <a:t>$1,800</a:t>
+                        <a:t>$1,200</a:t>
                       </a:r>
                       <a:endParaRPr lang="en-US" sz="1250" dirty="0">
                         <a:latin typeface="Arial" charset="0"/>
@@ -4105,72 +4170,7 @@
                           <a:ea typeface="Arial" pitchFamily="34" charset="-122"/>
                           <a:cs typeface="Arial" pitchFamily="34" charset="-120"/>
                         </a:rPr>
-                        <a:t>$2,400</a:t>
-                      </a:r>
-                      <a:endParaRPr lang="en-US" sz="1250" dirty="0">
-                        <a:latin typeface="Arial" charset="0"/>
-                        <a:ea typeface="Arial" charset="0"/>
-                        <a:cs typeface="Arial" charset="0"/>
-                      </a:endParaRPr>
-                    </a:p>
-                  </a:txBody>
-                  <a:tcPr marL="64008" marR="64008" marT="64008" marB="64008" anchor="ctr">
-                    <a:lnL w="9525" cap="flat" cmpd="sng" algn="ctr">
-                      <a:solidFill>
-                        <a:srgbClr val="DDDDDD"/>
-                      </a:solidFill>
-                      <a:prstDash val="solid"/>
-                      <a:round/>
-                      <a:headEnd type="none" w="med" len="med"/>
-                      <a:tailEnd type="none" w="med" len="med"/>
-                    </a:lnL>
-                    <a:lnR w="9525" cap="flat" cmpd="sng" algn="ctr">
-                      <a:solidFill>
-                        <a:srgbClr val="DDDDDD"/>
-                      </a:solidFill>
-                      <a:prstDash val="solid"/>
-                      <a:round/>
-                      <a:headEnd type="none" w="med" len="med"/>
-                      <a:tailEnd type="none" w="med" len="med"/>
-                    </a:lnR>
-                    <a:lnT w="9525" cap="flat" cmpd="sng" algn="ctr">
-                      <a:solidFill>
-                        <a:srgbClr val="DDDDDD"/>
-                      </a:solidFill>
-                      <a:prstDash val="solid"/>
-                      <a:round/>
-                      <a:headEnd type="none" w="med" len="med"/>
-                      <a:tailEnd type="none" w="med" len="med"/>
-                    </a:lnT>
-                    <a:lnB w="9525" cap="flat" cmpd="sng" algn="ctr">
-                      <a:solidFill>
-                        <a:srgbClr val="DDDDDD"/>
-                      </a:solidFill>
-                      <a:prstDash val="solid"/>
-                      <a:round/>
-                      <a:headEnd type="none" w="med" len="med"/>
-                      <a:tailEnd type="none" w="med" len="med"/>
-                    </a:lnB>
-                  </a:tcPr>
-                </a:tc>
-                <a:tc>
-                  <a:txBody>
-                    <a:bodyPr/>
-                    <a:lstStyle/>
-                    <a:p>
-                      <a:pPr algn="ctr" indent="0" marL="0">
-                        <a:buNone/>
-                      </a:pPr>
-                      <a:r>
-                        <a:rPr lang="en-US" sz="1250" dirty="0">
-                          <a:solidFill>
-                            <a:srgbClr val="2A2A2A"/>
-                          </a:solidFill>
-                          <a:latin typeface="Arial" pitchFamily="34" charset="0"/>
-                          <a:ea typeface="Arial" pitchFamily="34" charset="-122"/>
-                          <a:cs typeface="Arial" pitchFamily="34" charset="-120"/>
-                        </a:rPr>
-                        <a:t>$3,000</a:t>
+                        <a:t>$1,500</a:t>
                       </a:r>
                       <a:endParaRPr lang="en-US" sz="1250" dirty="0">
                         <a:latin typeface="Arial" charset="0"/>
@@ -4629,7 +4629,7 @@
                           <a:ea typeface="Arial" pitchFamily="34" charset="-122"/>
                           <a:cs typeface="Arial" pitchFamily="34" charset="-120"/>
                         </a:rPr>
-                        <a:t>T^Rock net per closed job (after 50/50 PM split)</a:t>
+                        <a:t>T^Rock net per closed job (fee splits like any job cost)</a:t>
                       </a:r>
                       <a:endParaRPr lang="en-US" sz="1200" dirty="0">
                         <a:latin typeface="Arial" charset="0"/>
@@ -4694,7 +4694,7 @@
                           <a:ea typeface="Arial" pitchFamily="34" charset="-122"/>
                           <a:cs typeface="Arial" pitchFamily="34" charset="-120"/>
                         </a:rPr>
-                        <a:t>$4,950</a:t>
+                        <a:t>$7,350</a:t>
                       </a:r>
                       <a:endParaRPr lang="en-US" sz="1250" dirty="0">
                         <a:latin typeface="Arial" charset="0"/>
@@ -4759,7 +4759,7 @@
                           <a:ea typeface="Arial" pitchFamily="34" charset="-122"/>
                           <a:cs typeface="Arial" pitchFamily="34" charset="-120"/>
                         </a:rPr>
-                        <a:t>$4,650</a:t>
+                        <a:t>$7,200</a:t>
                       </a:r>
                       <a:endParaRPr lang="en-US" sz="1250" dirty="0">
                         <a:latin typeface="Arial" charset="0"/>
@@ -4824,7 +4824,7 @@
                           <a:ea typeface="Arial" pitchFamily="34" charset="-122"/>
                           <a:cs typeface="Arial" pitchFamily="34" charset="-120"/>
                         </a:rPr>
-                        <a:t>$4,350</a:t>
+                        <a:t>$7,050</a:t>
                       </a:r>
                       <a:endParaRPr lang="en-US" sz="1250" dirty="0">
                         <a:latin typeface="Arial" charset="0"/>
@@ -4889,7 +4889,7 @@
                           <a:ea typeface="Arial" pitchFamily="34" charset="-122"/>
                           <a:cs typeface="Arial" pitchFamily="34" charset="-120"/>
                         </a:rPr>
-                        <a:t>$4,050</a:t>
+                        <a:t>$6,900</a:t>
                       </a:r>
                       <a:endParaRPr lang="en-US" sz="1250" dirty="0">
                         <a:latin typeface="Arial" charset="0"/>
@@ -4954,7 +4954,7 @@
                           <a:ea typeface="Arial" pitchFamily="34" charset="-122"/>
                           <a:cs typeface="Arial" pitchFamily="34" charset="-120"/>
                         </a:rPr>
-                        <a:t>$3,750</a:t>
+                        <a:t>$6,750</a:t>
                       </a:r>
                       <a:endParaRPr lang="en-US" sz="1250" dirty="0">
                         <a:latin typeface="Arial" charset="0"/>
@@ -5086,7 +5086,7 @@
                           <a:ea typeface="Arial" pitchFamily="34" charset="-122"/>
                           <a:cs typeface="Arial" pitchFamily="34" charset="-120"/>
                         </a:rPr>
-                        <a:t>$9,900</a:t>
+                        <a:t>$14,700</a:t>
                       </a:r>
                       <a:endParaRPr lang="en-US" sz="1300" dirty="0">
                         <a:latin typeface="Arial" charset="0"/>
@@ -5154,7 +5154,7 @@
                           <a:ea typeface="Arial" pitchFamily="34" charset="-122"/>
                           <a:cs typeface="Arial" pitchFamily="34" charset="-120"/>
                         </a:rPr>
-                        <a:t>$18,600</a:t>
+                        <a:t>$28,800</a:t>
                       </a:r>
                       <a:endParaRPr lang="en-US" sz="1300" dirty="0">
                         <a:latin typeface="Arial" charset="0"/>
@@ -5222,7 +5222,7 @@
                           <a:ea typeface="Arial" pitchFamily="34" charset="-122"/>
                           <a:cs typeface="Arial" pitchFamily="34" charset="-120"/>
                         </a:rPr>
-                        <a:t>$26,100</a:t>
+                        <a:t>$42,300</a:t>
                       </a:r>
                       <a:endParaRPr lang="en-US" sz="1300" dirty="0">
                         <a:latin typeface="Arial" charset="0"/>
@@ -5290,7 +5290,7 @@
                           <a:ea typeface="Arial" pitchFamily="34" charset="-122"/>
                           <a:cs typeface="Arial" pitchFamily="34" charset="-120"/>
                         </a:rPr>
-                        <a:t>$32,400</a:t>
+                        <a:t>$55,200</a:t>
                       </a:r>
                       <a:endParaRPr lang="en-US" sz="1300" dirty="0">
                         <a:latin typeface="Arial" charset="0"/>
@@ -5358,7 +5358,7 @@
                           <a:ea typeface="Arial" pitchFamily="34" charset="-122"/>
                           <a:cs typeface="Arial" pitchFamily="34" charset="-120"/>
                         </a:rPr>
-                        <a:t>$37,500</a:t>
+                        <a:t>$67,500</a:t>
                       </a:r>
                       <a:endParaRPr lang="en-US" sz="1300" dirty="0">
                         <a:latin typeface="Arial" charset="0"/>
@@ -5469,7 +5469,7 @@
                 <a:ea typeface="Arial" pitchFamily="34" charset="-122"/>
                 <a:cs typeface="Arial" pitchFamily="34" charset="-120"/>
               </a:rPr>
-              <a:t>The “expensive” end of the slider is the one where T^Rock banks $37,500 on 10 leads instead of $9,900. </a:t>
+              <a:t>The “expensive” end of the slider is the one where T^Rock banks $67,500 on 10 leads instead of $14,700. </a:t>
             </a:r>
             <a:pPr indent="0" marL="0">
               <a:buNone/>
@@ -5522,7 +5522,7 @@
                 <a:ea typeface="Arial" pitchFamily="34" charset="-122"/>
                 <a:cs typeface="Arial" pitchFamily="34" charset="-120"/>
               </a:rPr>
-              <a:t>Total net = jobs closed (of 10) × net per closed job. Rates between tiers interpolate linearly. Close rate measured on a trailing quarter.</a:t>
+              <a:t>Typical job: $30,000 RCV at 50% margin = $15,000 profit. Fee is a job expense, so profit after fee splits 50/50 with the PM. Tiers interpolate linearly; close rate measured on a trailing quarter.</a:t>
             </a:r>
             <a:endParaRPr lang="en-US" sz="900" dirty="0"/>
           </a:p>
@@ -5854,7 +5854,7 @@
                 <a:ea typeface="Arial" pitchFamily="34" charset="-122"/>
                 <a:cs typeface="Arial" pitchFamily="34" charset="-120"/>
               </a:rPr>
-              <a:t>Scoped leads where most won't close. The fee collects on the few that do — priced like professional scope work, paid only on results. At a 20% close rate, 8 of every 10 scopes were written for free.</a:t>
+              <a:t>Of job profit — $300 on a typical roof. Scoped leads where most won't close; the fee collects on the few that do. At a 20% close rate, 8 of every 10 scopes were written for free.</a:t>
             </a:r>
             <a:endParaRPr lang="en-US" sz="1250" dirty="0"/>
           </a:p>
@@ -6037,7 +6037,7 @@
                 <a:ea typeface="Arial" pitchFamily="34" charset="-122"/>
                 <a:cs typeface="Arial" pitchFamily="34" charset="-120"/>
               </a:rPr>
-              <a:t>A lead that closes 100% of the time is a signed contract changing hands. That's a referral — and 10% of contract value is the standard referral fee. Nobody blinks at 10% for a job that's already sold.</a:t>
+              <a:t>A lead that closes 100% of the time is a signed contract changing hands — a referral. The customary referral fee is ~10% of contract value; 10% of profit is $1,500 on a $30,000 roof — just 5% of contract. Half the going rate for a done deal.</a:t>
             </a:r>
             <a:endParaRPr lang="en-US" sz="1250" dirty="0"/>
           </a:p>
@@ -6151,7 +6151,7 @@
                 <a:ea typeface="Arial" pitchFamily="34" charset="-122"/>
                 <a:cs typeface="Arial" pitchFamily="34" charset="-120"/>
               </a:rPr>
-              <a:t>Referral benchmark: ~10% of contract value is the customary fee for handed-off, ready-to-sign work in residential contracting.</a:t>
+              <a:t>Referral benchmark: ~10% of contract value is the customary fee for handed-off, ready-to-sign work — this plan's ceiling works out to half that.</a:t>
             </a:r>
             <a:endParaRPr lang="en-US" sz="900" dirty="0"/>
           </a:p>
@@ -6373,12 +6373,12 @@
         </p:nvSpPr>
         <p:spPr>
           <a:xfrm>
-            <a:off x="1005840" y="4194536"/>
-            <a:ext cx="1371600" cy="651784"/>
+            <a:off x="1005840" y="4308653"/>
+            <a:ext cx="1371600" cy="537667"/>
           </a:xfrm>
           <a:prstGeom prst="roundRect">
             <a:avLst>
-              <a:gd name="adj" fmla="val 4209"/>
+              <a:gd name="adj" fmla="val 5102"/>
             </a:avLst>
           </a:prstGeom>
           <a:solidFill>
@@ -6395,7 +6395,7 @@
         </p:nvSpPr>
         <p:spPr>
           <a:xfrm>
-            <a:off x="685800" y="3847064"/>
+            <a:off x="685800" y="3961181"/>
             <a:ext cx="2011680" cy="320040"/>
           </a:xfrm>
           <a:prstGeom prst="rect">
@@ -6420,7 +6420,7 @@
                 <a:ea typeface="Arial" pitchFamily="34" charset="-122"/>
                 <a:cs typeface="Arial" pitchFamily="34" charset="-120"/>
               </a:rPr>
-              <a:t>$99,000</a:t>
+              <a:t>$147,000</a:t>
             </a:r>
             <a:endParaRPr lang="en-US" sz="1350" dirty="0"/>
           </a:p>
@@ -6473,12 +6473,12 @@
         </p:nvSpPr>
         <p:spPr>
           <a:xfrm>
-            <a:off x="3200400" y="3621756"/>
-            <a:ext cx="1371600" cy="1224564"/>
+            <a:off x="3200400" y="3792931"/>
+            <a:ext cx="1371600" cy="1053389"/>
           </a:xfrm>
           <a:prstGeom prst="roundRect">
             <a:avLst>
-              <a:gd name="adj" fmla="val 2240"/>
+              <a:gd name="adj" fmla="val 2604"/>
             </a:avLst>
           </a:prstGeom>
           <a:solidFill>
@@ -6495,7 +6495,7 @@
         </p:nvSpPr>
         <p:spPr>
           <a:xfrm>
-            <a:off x="2880360" y="3274284"/>
+            <a:off x="2880360" y="3445459"/>
             <a:ext cx="2011680" cy="320040"/>
           </a:xfrm>
           <a:prstGeom prst="rect">
@@ -6520,7 +6520,7 @@
                 <a:ea typeface="Arial" pitchFamily="34" charset="-122"/>
                 <a:cs typeface="Arial" pitchFamily="34" charset="-120"/>
               </a:rPr>
-              <a:t>$186,000</a:t>
+              <a:t>$288,000</a:t>
             </a:r>
             <a:endParaRPr lang="en-US" sz="1350" dirty="0"/>
           </a:p>
@@ -6573,8 +6573,8 @@
         </p:nvSpPr>
         <p:spPr>
           <a:xfrm>
-            <a:off x="5394960" y="3127980"/>
-            <a:ext cx="1371600" cy="1718340"/>
+            <a:off x="5394960" y="3299155"/>
+            <a:ext cx="1371600" cy="1547165"/>
           </a:xfrm>
           <a:prstGeom prst="roundRect">
             <a:avLst>
@@ -6595,7 +6595,7 @@
         </p:nvSpPr>
         <p:spPr>
           <a:xfrm>
-            <a:off x="5074920" y="2780508"/>
+            <a:off x="5074920" y="2951683"/>
             <a:ext cx="2011680" cy="320040"/>
           </a:xfrm>
           <a:prstGeom prst="rect">
@@ -6620,7 +6620,7 @@
                 <a:ea typeface="Arial" pitchFamily="34" charset="-122"/>
                 <a:cs typeface="Arial" pitchFamily="34" charset="-120"/>
               </a:rPr>
-              <a:t>$261,000</a:t>
+              <a:t>$423,000</a:t>
             </a:r>
             <a:endParaRPr lang="en-US" sz="1350" dirty="0"/>
           </a:p>
@@ -6673,8 +6673,8 @@
         </p:nvSpPr>
         <p:spPr>
           <a:xfrm>
-            <a:off x="7589520" y="2713208"/>
-            <a:ext cx="1371600" cy="2133112"/>
+            <a:off x="7589520" y="2827325"/>
+            <a:ext cx="1371600" cy="2018995"/>
           </a:xfrm>
           <a:prstGeom prst="roundRect">
             <a:avLst>
@@ -6695,7 +6695,7 @@
         </p:nvSpPr>
         <p:spPr>
           <a:xfrm>
-            <a:off x="7269480" y="2365736"/>
+            <a:off x="7269480" y="2479853"/>
             <a:ext cx="2011680" cy="320040"/>
           </a:xfrm>
           <a:prstGeom prst="rect">
@@ -6720,7 +6720,7 @@
                 <a:ea typeface="Arial" pitchFamily="34" charset="-122"/>
                 <a:cs typeface="Arial" pitchFamily="34" charset="-120"/>
               </a:rPr>
-              <a:t>$324,000</a:t>
+              <a:t>$552,000</a:t>
             </a:r>
             <a:endParaRPr lang="en-US" sz="1350" dirty="0"/>
           </a:p>
@@ -6820,7 +6820,7 @@
                 <a:ea typeface="Arial" pitchFamily="34" charset="-122"/>
                 <a:cs typeface="Arial" pitchFamily="34" charset="-120"/>
               </a:rPr>
-              <a:t>$375,000</a:t>
+              <a:t>$675,000</a:t>
             </a:r>
             <a:endParaRPr lang="en-US" sz="1600" dirty="0"/>
           </a:p>
@@ -6920,7 +6920,7 @@
                 <a:ea typeface="Arial" pitchFamily="34" charset="-122"/>
                 <a:cs typeface="Arial" pitchFamily="34" charset="-120"/>
               </a:rPr>
-              <a:t>Top of the slider = T^Rock's take is up nearly 4×. </a:t>
+              <a:t>Top of the slider = T^Rock's take is up 4.6×. </a:t>
             </a:r>
             <a:pPr indent="0" marL="0">
               <a:buNone/>
@@ -6973,7 +6973,7 @@
                 <a:ea typeface="Arial" pitchFamily="34" charset="-122"/>
                 <a:cs typeface="Arial" pitchFamily="34" charset="-120"/>
               </a:rPr>
-              <a:t>Per closed job: $30,000 × 35% margin, less slider fee, split 50/50 with the PM. 100 scoped leads held constant across scenarios.</a:t>
+              <a:t>Per closed job: $30,000 × 50% margin = $15,000, less slider fee (a job expense), split 50/50 with the PM. 100 scoped leads held constant.</a:t>
             </a:r>
             <a:endParaRPr lang="en-US" sz="900" dirty="0"/>
           </a:p>
@@ -7188,7 +7188,7 @@
                 <a:ea typeface="Arial" pitchFamily="34" charset="-122"/>
                 <a:cs typeface="Arial" pitchFamily="34" charset="-120"/>
               </a:rPr>
-              <a:t>Option A — % of RCV</a:t>
+              <a:t>Option A — % of job profit</a:t>
             </a:r>
             <a:endParaRPr lang="en-US" sz="1700" dirty="0"/>
           </a:p>
@@ -7227,7 +7227,7 @@
                 <a:ea typeface="Arial" pitchFamily="34" charset="-122"/>
                 <a:cs typeface="Arial" pitchFamily="34" charset="-120"/>
               </a:rPr>
-              <a:t>the numbers shown so far</a:t>
+              <a:t>the plan as shown</a:t>
             </a:r>
             <a:endParaRPr lang="en-US" sz="1150" dirty="0"/>
           </a:p>
@@ -7270,7 +7270,7 @@
                 <a:ea typeface="Arial" pitchFamily="34" charset="-122"/>
                 <a:cs typeface="Arial" pitchFamily="34" charset="-120"/>
               </a:rPr>
-              <a:t>Verified straight off the carrier paperwork — no accounting disputes, ever</a:t>
+              <a:t>Booked as a job expense, so it splits with the PM like every other job cost — each side effectively carries half</a:t>
             </a:r>
             <a:endParaRPr lang="en-US" sz="1250" dirty="0"/>
           </a:p>
@@ -7291,7 +7291,7 @@
                 <a:ea typeface="Arial" pitchFamily="34" charset="-122"/>
                 <a:cs typeface="Arial" pitchFamily="34" charset="-120"/>
               </a:rPr>
-              <a:t>Insulated from cost overruns neither side controls</a:t>
+              <a:t>Worked example: $30,000 roof → $15,000 profit → 10% fee = $1,500 → $13,500 splits 50/50 → T^Rock nets $6,750</a:t>
             </a:r>
             <a:endParaRPr lang="en-US" sz="1250" dirty="0"/>
           </a:p>
@@ -7312,7 +7312,7 @@
                 <a:ea typeface="Arial" pitchFamily="34" charset="-122"/>
                 <a:cs typeface="Arial" pitchFamily="34" charset="-120"/>
               </a:rPr>
-              <a:t>Slider band: 2% → 10% of RCV</a:t>
+              <a:t>Fee shrinks automatically on thin-margin jobs — T^Rock is never overcharged on a bad one</a:t>
             </a:r>
             <a:endParaRPr lang="en-US" sz="1250" dirty="0"/>
           </a:p>
@@ -7330,7 +7330,7 @@
                 <a:ea typeface="Arial" pitchFamily="34" charset="-122"/>
                 <a:cs typeface="Arial" pitchFamily="34" charset="-120"/>
               </a:rPr>
-              <a:t>At 50% close: 5% × $30,000 = $1,500 per closed job</a:t>
+              <a:t>Needs job costing both sides can see</a:t>
             </a:r>
             <a:endParaRPr lang="en-US" sz="1250" dirty="0"/>
           </a:p>
@@ -7435,7 +7435,7 @@
                 <a:ea typeface="Arial" pitchFamily="34" charset="-122"/>
                 <a:cs typeface="Arial" pitchFamily="34" charset="-120"/>
               </a:rPr>
-              <a:t>Option B — % of job profit</a:t>
+              <a:t>Option B — % of RCV</a:t>
             </a:r>
             <a:endParaRPr lang="en-US" sz="1700" dirty="0"/>
           </a:p>
@@ -7474,7 +7474,7 @@
                 <a:ea typeface="Arial" pitchFamily="34" charset="-122"/>
                 <a:cs typeface="Arial" pitchFamily="34" charset="-120"/>
               </a:rPr>
-              <a:t>equivalent dollars, different base</a:t>
+              <a:t>same dollars, different base</a:t>
             </a:r>
             <a:endParaRPr lang="en-US" sz="1150" dirty="0"/>
           </a:p>
@@ -7517,7 +7517,7 @@
                 <a:ea typeface="Arial" pitchFamily="34" charset="-122"/>
                 <a:cs typeface="Arial" pitchFamily="34" charset="-120"/>
               </a:rPr>
-              <a:t>Scales with margin — the fee shrinks automatically on thin jobs</a:t>
+              <a:t>Equivalent band at today's margins: 1% → 5% of contract value</a:t>
             </a:r>
             <a:endParaRPr lang="en-US" sz="1250" dirty="0"/>
           </a:p>
@@ -7538,7 +7538,7 @@
                 <a:ea typeface="Arial" pitchFamily="34" charset="-122"/>
                 <a:cs typeface="Arial" pitchFamily="34" charset="-120"/>
               </a:rPr>
-              <a:t>Requires open-book job costing both sides trust</a:t>
+              <a:t>Verified straight off the carrier paperwork — no job-costing disputes, ever</a:t>
             </a:r>
             <a:endParaRPr lang="en-US" sz="1250" dirty="0"/>
           </a:p>
@@ -7559,7 +7559,7 @@
                 <a:ea typeface="Arial" pitchFamily="34" charset="-122"/>
                 <a:cs typeface="Arial" pitchFamily="34" charset="-120"/>
               </a:rPr>
-              <a:t>Equivalent slider band: ~6% → 28% of job gross profit</a:t>
+              <a:t>Insulated from cost overruns; the fee holds even if margins slip</a:t>
             </a:r>
             <a:endParaRPr lang="en-US" sz="1250" dirty="0"/>
           </a:p>
@@ -7577,7 +7577,7 @@
                 <a:ea typeface="Arial" pitchFamily="34" charset="-122"/>
                 <a:cs typeface="Arial" pitchFamily="34" charset="-120"/>
               </a:rPr>
-              <a:t>At 50% close: ~14% × $10,500 = ~$1,470 per closed job</a:t>
+              <a:t>Pick this if open-book job costing is a sticking point</a:t>
             </a:r>
             <a:endParaRPr lang="en-US" sz="1250" dirty="0"/>
           </a:p>
@@ -7652,7 +7652,7 @@
                 <a:ea typeface="Arial" pitchFamily="34" charset="-122"/>
                 <a:cs typeface="Arial" pitchFamily="34" charset="-120"/>
               </a:rPr>
-              <a:t>A is simpler to verify; B is tighter to margin. The only wrong answer is leaving the definition verbal.</a:t>
+              <a:t>A rides the profit pool and splits with the PM; B is simpler to audit. The only wrong answer is leaving the definition verbal.</a:t>
             </a:r>
             <a:endParaRPr lang="en-US" sz="1450" dirty="0"/>
           </a:p>
@@ -8893,7 +8893,7 @@
                 <a:ea typeface="Arial" pitchFamily="34" charset="-122"/>
                 <a:cs typeface="Arial" pitchFamily="34" charset="-120"/>
               </a:rPr>
-              <a:t>Option A (% of RCV) or Option B (% of job profit). One page, signed, with the slider table attached.</a:t>
+              <a:t>Option A (% of job profit, splits like a job cost) or Option B (% of RCV). One page, signed, with the slider table attached.</a:t>
             </a:r>
             <a:endParaRPr lang="en-US" sz="1250" dirty="0"/>
           </a:p>

--- a/pitch/Commission-Plan.pptx
+++ b/pitch/Commission-Plan.pptx
@@ -1498,29 +1498,9 @@
           <a:chExt cx="0" cy="0"/>
         </a:xfrm>
       </p:grpSpPr>
-      <p:sp>
-        <p:nvSpPr>
-          <p:cNvPr id="2" name="Shape 0"/>
-          <p:cNvSpPr/>
-          <p:nvPr/>
-        </p:nvSpPr>
-        <p:spPr>
-          <a:xfrm>
-            <a:off x="685800" y="777240"/>
-            <a:ext cx="822960" cy="822960"/>
-          </a:xfrm>
-          <a:prstGeom prst="ellipse">
-            <a:avLst/>
-          </a:prstGeom>
-          <a:solidFill>
-            <a:srgbClr val="C8102E"/>
-          </a:solidFill>
-          <a:ln/>
-        </p:spPr>
-      </p:sp>
       <p:pic>
         <p:nvPicPr>
-          <p:cNvPr id="3" name="Image 0" descr="preencoded.png">    </p:cNvPr>
+          <p:cNvPr id="2" name="Image 0" descr="preencoded.png">    </p:cNvPr>
           <p:cNvPicPr>
             <a:picLocks noChangeAspect="1"/>
           </p:cNvPicPr>
@@ -1534,8 +1514,8 @@
         </p:blipFill>
         <p:spPr>
           <a:xfrm>
-            <a:off x="899770" y="991210"/>
-            <a:ext cx="395021" cy="395021"/>
+            <a:off x="685800" y="777240"/>
+            <a:ext cx="822960" cy="822960"/>
           </a:xfrm>
           <a:prstGeom prst="rect">
             <a:avLst/>
@@ -1544,7 +1524,7 @@
       </p:pic>
       <p:sp>
         <p:nvSpPr>
-          <p:cNvPr id="4" name="Text 1"/>
+          <p:cNvPr id="3" name="Text 0"/>
           <p:cNvSpPr/>
           <p:nvPr/>
         </p:nvSpPr>
@@ -1583,7 +1563,7 @@
       </p:sp>
       <p:sp>
         <p:nvSpPr>
-          <p:cNvPr id="5" name="Text 2"/>
+          <p:cNvPr id="4" name="Text 1"/>
           <p:cNvSpPr/>
           <p:nvPr/>
         </p:nvSpPr>
@@ -1622,7 +1602,7 @@
       </p:sp>
       <p:sp>
         <p:nvSpPr>
-          <p:cNvPr id="6" name="Text 3"/>
+          <p:cNvPr id="5" name="Text 2"/>
           <p:cNvSpPr/>
           <p:nvPr/>
         </p:nvSpPr>
@@ -1675,7 +1655,7 @@
       </p:sp>
       <p:sp>
         <p:nvSpPr>
-          <p:cNvPr id="7" name="Text 4"/>
+          <p:cNvPr id="6" name="Text 3"/>
           <p:cNvSpPr/>
           <p:nvPr/>
         </p:nvSpPr>
@@ -1844,29 +1824,9 @@
           <a:ln/>
         </p:spPr>
       </p:sp>
-      <p:sp>
-        <p:nvSpPr>
-          <p:cNvPr id="5" name="Shape 3"/>
-          <p:cNvSpPr/>
-          <p:nvPr/>
-        </p:nvSpPr>
-        <p:spPr>
-          <a:xfrm>
-            <a:off x="822960" y="2103120"/>
-            <a:ext cx="640080" cy="640080"/>
-          </a:xfrm>
-          <a:prstGeom prst="ellipse">
-            <a:avLst/>
-          </a:prstGeom>
-          <a:solidFill>
-            <a:srgbClr val="C8102E"/>
-          </a:solidFill>
-          <a:ln/>
-        </p:spPr>
-      </p:sp>
       <p:pic>
         <p:nvPicPr>
-          <p:cNvPr id="6" name="Image 0" descr="preencoded.png">    </p:cNvPr>
+          <p:cNvPr id="5" name="Image 0" descr="preencoded.png">    </p:cNvPr>
           <p:cNvPicPr>
             <a:picLocks noChangeAspect="1"/>
           </p:cNvPicPr>
@@ -1880,8 +1840,8 @@
         </p:blipFill>
         <p:spPr>
           <a:xfrm>
-            <a:off x="989381" y="2269541"/>
-            <a:ext cx="307238" cy="307238"/>
+            <a:off x="822960" y="2103120"/>
+            <a:ext cx="640080" cy="640080"/>
           </a:xfrm>
           <a:prstGeom prst="rect">
             <a:avLst/>
@@ -1890,7 +1850,7 @@
       </p:pic>
       <p:sp>
         <p:nvSpPr>
-          <p:cNvPr id="7" name="Text 4"/>
+          <p:cNvPr id="6" name="Text 3"/>
           <p:cNvSpPr/>
           <p:nvPr/>
         </p:nvSpPr>
@@ -1929,7 +1889,7 @@
       </p:sp>
       <p:sp>
         <p:nvSpPr>
-          <p:cNvPr id="8" name="Text 5"/>
+          <p:cNvPr id="7" name="Text 4"/>
           <p:cNvSpPr/>
           <p:nvPr/>
         </p:nvSpPr>
@@ -1968,7 +1928,7 @@
       </p:sp>
       <p:sp>
         <p:nvSpPr>
-          <p:cNvPr id="9" name="Shape 6"/>
+          <p:cNvPr id="8" name="Shape 5"/>
           <p:cNvSpPr/>
           <p:nvPr/>
         </p:nvSpPr>
@@ -1988,29 +1948,9 @@
           <a:ln/>
         </p:spPr>
       </p:sp>
-      <p:sp>
-        <p:nvSpPr>
-          <p:cNvPr id="10" name="Shape 7"/>
-          <p:cNvSpPr/>
-          <p:nvPr/>
-        </p:nvSpPr>
-        <p:spPr>
-          <a:xfrm>
-            <a:off x="6492240" y="2103120"/>
-            <a:ext cx="640080" cy="640080"/>
-          </a:xfrm>
-          <a:prstGeom prst="ellipse">
-            <a:avLst/>
-          </a:prstGeom>
-          <a:solidFill>
-            <a:srgbClr val="C8102E"/>
-          </a:solidFill>
-          <a:ln/>
-        </p:spPr>
-      </p:sp>
       <p:pic>
         <p:nvPicPr>
-          <p:cNvPr id="11" name="Image 1" descr="preencoded.png">    </p:cNvPr>
+          <p:cNvPr id="9" name="Image 1" descr="preencoded.png">    </p:cNvPr>
           <p:cNvPicPr>
             <a:picLocks noChangeAspect="1"/>
           </p:cNvPicPr>
@@ -2024,8 +1964,8 @@
         </p:blipFill>
         <p:spPr>
           <a:xfrm>
-            <a:off x="6658661" y="2269541"/>
-            <a:ext cx="307238" cy="307238"/>
+            <a:off x="6492240" y="2103120"/>
+            <a:ext cx="640080" cy="640080"/>
           </a:xfrm>
           <a:prstGeom prst="rect">
             <a:avLst/>
@@ -2034,7 +1974,7 @@
       </p:pic>
       <p:sp>
         <p:nvSpPr>
-          <p:cNvPr id="12" name="Text 8"/>
+          <p:cNvPr id="10" name="Text 6"/>
           <p:cNvSpPr/>
           <p:nvPr/>
         </p:nvSpPr>
@@ -2073,7 +2013,7 @@
       </p:sp>
       <p:sp>
         <p:nvSpPr>
-          <p:cNvPr id="13" name="Text 9"/>
+          <p:cNvPr id="11" name="Text 7"/>
           <p:cNvSpPr/>
           <p:nvPr/>
         </p:nvSpPr>
@@ -2112,7 +2052,7 @@
       </p:sp>
       <p:sp>
         <p:nvSpPr>
-          <p:cNvPr id="14" name="Shape 10"/>
+          <p:cNvPr id="12" name="Shape 8"/>
           <p:cNvSpPr/>
           <p:nvPr/>
         </p:nvSpPr>
@@ -2132,29 +2072,9 @@
           <a:ln/>
         </p:spPr>
       </p:sp>
-      <p:sp>
-        <p:nvSpPr>
-          <p:cNvPr id="15" name="Shape 11"/>
-          <p:cNvSpPr/>
-          <p:nvPr/>
-        </p:nvSpPr>
-        <p:spPr>
-          <a:xfrm>
-            <a:off x="822960" y="4297680"/>
-            <a:ext cx="640080" cy="640080"/>
-          </a:xfrm>
-          <a:prstGeom prst="ellipse">
-            <a:avLst/>
-          </a:prstGeom>
-          <a:solidFill>
-            <a:srgbClr val="C8102E"/>
-          </a:solidFill>
-          <a:ln/>
-        </p:spPr>
-      </p:sp>
       <p:pic>
         <p:nvPicPr>
-          <p:cNvPr id="16" name="Image 2" descr="preencoded.png">    </p:cNvPr>
+          <p:cNvPr id="13" name="Image 2" descr="preencoded.png">    </p:cNvPr>
           <p:cNvPicPr>
             <a:picLocks noChangeAspect="1"/>
           </p:cNvPicPr>
@@ -2168,8 +2088,8 @@
         </p:blipFill>
         <p:spPr>
           <a:xfrm>
-            <a:off x="989381" y="4464101"/>
-            <a:ext cx="307238" cy="307238"/>
+            <a:off x="822960" y="4297680"/>
+            <a:ext cx="640080" cy="640080"/>
           </a:xfrm>
           <a:prstGeom prst="rect">
             <a:avLst/>
@@ -2178,7 +2098,7 @@
       </p:pic>
       <p:sp>
         <p:nvSpPr>
-          <p:cNvPr id="17" name="Text 12"/>
+          <p:cNvPr id="14" name="Text 9"/>
           <p:cNvSpPr/>
           <p:nvPr/>
         </p:nvSpPr>
@@ -2217,7 +2137,7 @@
       </p:sp>
       <p:sp>
         <p:nvSpPr>
-          <p:cNvPr id="18" name="Text 13"/>
+          <p:cNvPr id="15" name="Text 10"/>
           <p:cNvSpPr/>
           <p:nvPr/>
         </p:nvSpPr>
@@ -2256,7 +2176,7 @@
       </p:sp>
       <p:sp>
         <p:nvSpPr>
-          <p:cNvPr id="19" name="Shape 14"/>
+          <p:cNvPr id="16" name="Shape 11"/>
           <p:cNvSpPr/>
           <p:nvPr/>
         </p:nvSpPr>
@@ -2276,29 +2196,9 @@
           <a:ln/>
         </p:spPr>
       </p:sp>
-      <p:sp>
-        <p:nvSpPr>
-          <p:cNvPr id="20" name="Shape 15"/>
-          <p:cNvSpPr/>
-          <p:nvPr/>
-        </p:nvSpPr>
-        <p:spPr>
-          <a:xfrm>
-            <a:off x="6492240" y="4297680"/>
-            <a:ext cx="640080" cy="640080"/>
-          </a:xfrm>
-          <a:prstGeom prst="ellipse">
-            <a:avLst/>
-          </a:prstGeom>
-          <a:solidFill>
-            <a:srgbClr val="C8102E"/>
-          </a:solidFill>
-          <a:ln/>
-        </p:spPr>
-      </p:sp>
       <p:pic>
         <p:nvPicPr>
-          <p:cNvPr id="21" name="Image 3" descr="preencoded.png">    </p:cNvPr>
+          <p:cNvPr id="17" name="Image 3" descr="preencoded.png">    </p:cNvPr>
           <p:cNvPicPr>
             <a:picLocks noChangeAspect="1"/>
           </p:cNvPicPr>
@@ -2312,8 +2212,8 @@
         </p:blipFill>
         <p:spPr>
           <a:xfrm>
-            <a:off x="6658661" y="4464101"/>
-            <a:ext cx="307238" cy="307238"/>
+            <a:off x="6492240" y="4297680"/>
+            <a:ext cx="640080" cy="640080"/>
           </a:xfrm>
           <a:prstGeom prst="rect">
             <a:avLst/>
@@ -2322,7 +2222,7 @@
       </p:pic>
       <p:sp>
         <p:nvSpPr>
-          <p:cNvPr id="22" name="Text 16"/>
+          <p:cNvPr id="18" name="Text 12"/>
           <p:cNvSpPr/>
           <p:nvPr/>
         </p:nvSpPr>
@@ -2361,7 +2261,7 @@
       </p:sp>
       <p:sp>
         <p:nvSpPr>
-          <p:cNvPr id="23" name="Text 17"/>
+          <p:cNvPr id="19" name="Text 13"/>
           <p:cNvSpPr/>
           <p:nvPr/>
         </p:nvSpPr>
@@ -2400,7 +2300,7 @@
       </p:sp>
       <p:sp>
         <p:nvSpPr>
-          <p:cNvPr id="24" name="Text 18"/>
+          <p:cNvPr id="20" name="Text 14"/>
           <p:cNvSpPr/>
           <p:nvPr/>
         </p:nvSpPr>
@@ -2428,7 +2328,7 @@
       </p:sp>
       <p:sp>
         <p:nvSpPr>
-          <p:cNvPr id="25" name="Text 19"/>
+          <p:cNvPr id="21" name="Text 15"/>
           <p:cNvSpPr/>
           <p:nvPr/>
         </p:nvSpPr>
@@ -5522,7 +5422,7 @@
                 <a:ea typeface="Arial" pitchFamily="34" charset="-122"/>
                 <a:cs typeface="Arial" pitchFamily="34" charset="-120"/>
               </a:rPr>
-              <a:t>Typical job: $30,000 RCV at 50% margin = $15,000 profit. Fee is a job expense, so profit after fee splits 50/50 with the PM. Tiers interpolate linearly; close rate measured on a trailing quarter.</a:t>
+              <a:t>Typical job: $30,000 RCV at 50% margin = $15,000 profit; fee is a job expense, so profit after fee splits 50/50. Close rate is cohort-based — a lead belongs to the quarter it was scoped; late closers re-rate that cohort (180-day window), so the rate only moves up.</a:t>
             </a:r>
             <a:endParaRPr lang="en-US" sz="900" dirty="0"/>
           </a:p>
@@ -5699,29 +5599,9 @@
           <a:ln/>
         </p:spPr>
       </p:sp>
-      <p:sp>
-        <p:nvSpPr>
-          <p:cNvPr id="5" name="Shape 3"/>
-          <p:cNvSpPr/>
-          <p:nvPr/>
-        </p:nvSpPr>
-        <p:spPr>
-          <a:xfrm>
-            <a:off x="822960" y="1920240"/>
-            <a:ext cx="640080" cy="640080"/>
-          </a:xfrm>
-          <a:prstGeom prst="ellipse">
-            <a:avLst/>
-          </a:prstGeom>
-          <a:solidFill>
-            <a:srgbClr val="C8102E"/>
-          </a:solidFill>
-          <a:ln/>
-        </p:spPr>
-      </p:sp>
       <p:pic>
         <p:nvPicPr>
-          <p:cNvPr id="6" name="Image 0" descr="preencoded.png">    </p:cNvPr>
+          <p:cNvPr id="5" name="Image 0" descr="preencoded.png">    </p:cNvPr>
           <p:cNvPicPr>
             <a:picLocks noChangeAspect="1"/>
           </p:cNvPicPr>
@@ -5735,8 +5615,8 @@
         </p:blipFill>
         <p:spPr>
           <a:xfrm>
-            <a:off x="989381" y="2086661"/>
-            <a:ext cx="307238" cy="307238"/>
+            <a:off x="822960" y="1920240"/>
+            <a:ext cx="640080" cy="640080"/>
           </a:xfrm>
           <a:prstGeom prst="rect">
             <a:avLst/>
@@ -5745,7 +5625,7 @@
       </p:pic>
       <p:sp>
         <p:nvSpPr>
-          <p:cNvPr id="7" name="Text 4"/>
+          <p:cNvPr id="6" name="Text 3"/>
           <p:cNvSpPr/>
           <p:nvPr/>
         </p:nvSpPr>
@@ -5784,7 +5664,7 @@
       </p:sp>
       <p:sp>
         <p:nvSpPr>
-          <p:cNvPr id="8" name="Text 5"/>
+          <p:cNvPr id="7" name="Text 4"/>
           <p:cNvSpPr/>
           <p:nvPr/>
         </p:nvSpPr>
@@ -5823,7 +5703,7 @@
       </p:sp>
       <p:sp>
         <p:nvSpPr>
-          <p:cNvPr id="9" name="Text 6"/>
+          <p:cNvPr id="8" name="Text 5"/>
           <p:cNvSpPr/>
           <p:nvPr/>
         </p:nvSpPr>
@@ -5862,7 +5742,7 @@
       </p:sp>
       <p:sp>
         <p:nvSpPr>
-          <p:cNvPr id="10" name="Shape 7"/>
+          <p:cNvPr id="9" name="Shape 6"/>
           <p:cNvSpPr/>
           <p:nvPr/>
         </p:nvSpPr>
@@ -5882,29 +5762,9 @@
           <a:ln/>
         </p:spPr>
       </p:sp>
-      <p:sp>
-        <p:nvSpPr>
-          <p:cNvPr id="11" name="Shape 8"/>
-          <p:cNvSpPr/>
-          <p:nvPr/>
-        </p:nvSpPr>
-        <p:spPr>
-          <a:xfrm>
-            <a:off x="6492240" y="1920240"/>
-            <a:ext cx="640080" cy="640080"/>
-          </a:xfrm>
-          <a:prstGeom prst="ellipse">
-            <a:avLst/>
-          </a:prstGeom>
-          <a:solidFill>
-            <a:srgbClr val="C8102E"/>
-          </a:solidFill>
-          <a:ln/>
-        </p:spPr>
-      </p:sp>
       <p:pic>
         <p:nvPicPr>
-          <p:cNvPr id="12" name="Image 1" descr="preencoded.png">    </p:cNvPr>
+          <p:cNvPr id="10" name="Image 1" descr="preencoded.png">    </p:cNvPr>
           <p:cNvPicPr>
             <a:picLocks noChangeAspect="1"/>
           </p:cNvPicPr>
@@ -5918,8 +5778,8 @@
         </p:blipFill>
         <p:spPr>
           <a:xfrm>
-            <a:off x="6658661" y="2086661"/>
-            <a:ext cx="307238" cy="307238"/>
+            <a:off x="6492240" y="1920240"/>
+            <a:ext cx="640080" cy="640080"/>
           </a:xfrm>
           <a:prstGeom prst="rect">
             <a:avLst/>
@@ -5928,7 +5788,7 @@
       </p:pic>
       <p:sp>
         <p:nvSpPr>
-          <p:cNvPr id="13" name="Text 9"/>
+          <p:cNvPr id="11" name="Text 7"/>
           <p:cNvSpPr/>
           <p:nvPr/>
         </p:nvSpPr>
@@ -5967,7 +5827,7 @@
       </p:sp>
       <p:sp>
         <p:nvSpPr>
-          <p:cNvPr id="14" name="Text 10"/>
+          <p:cNvPr id="12" name="Text 8"/>
           <p:cNvSpPr/>
           <p:nvPr/>
         </p:nvSpPr>
@@ -6006,7 +5866,7 @@
       </p:sp>
       <p:sp>
         <p:nvSpPr>
-          <p:cNvPr id="15" name="Text 11"/>
+          <p:cNvPr id="13" name="Text 9"/>
           <p:cNvSpPr/>
           <p:nvPr/>
         </p:nvSpPr>
@@ -6045,7 +5905,7 @@
       </p:sp>
       <p:sp>
         <p:nvSpPr>
-          <p:cNvPr id="16" name="Shape 12"/>
+          <p:cNvPr id="14" name="Shape 10"/>
           <p:cNvSpPr/>
           <p:nvPr/>
         </p:nvSpPr>
@@ -6067,7 +5927,7 @@
       </p:sp>
       <p:sp>
         <p:nvSpPr>
-          <p:cNvPr id="17" name="Text 13"/>
+          <p:cNvPr id="15" name="Text 11"/>
           <p:cNvSpPr/>
           <p:nvPr/>
         </p:nvSpPr>
@@ -6120,7 +5980,7 @@
       </p:sp>
       <p:sp>
         <p:nvSpPr>
-          <p:cNvPr id="18" name="Text 14"/>
+          <p:cNvPr id="16" name="Text 12"/>
           <p:cNvSpPr/>
           <p:nvPr/>
         </p:nvSpPr>
@@ -6159,7 +6019,7 @@
       </p:sp>
       <p:sp>
         <p:nvSpPr>
-          <p:cNvPr id="19" name="Text 15"/>
+          <p:cNvPr id="17" name="Text 13"/>
           <p:cNvSpPr/>
           <p:nvPr/>
         </p:nvSpPr>
@@ -7111,29 +6971,9 @@
           <a:ln/>
         </p:spPr>
       </p:sp>
-      <p:sp>
-        <p:nvSpPr>
-          <p:cNvPr id="4" name="Shape 2"/>
-          <p:cNvSpPr/>
-          <p:nvPr/>
-        </p:nvSpPr>
-        <p:spPr>
-          <a:xfrm>
-            <a:off x="822960" y="1645920"/>
-            <a:ext cx="640080" cy="640080"/>
-          </a:xfrm>
-          <a:prstGeom prst="ellipse">
-            <a:avLst/>
-          </a:prstGeom>
-          <a:solidFill>
-            <a:srgbClr val="C8102E"/>
-          </a:solidFill>
-          <a:ln/>
-        </p:spPr>
-      </p:sp>
       <p:pic>
         <p:nvPicPr>
-          <p:cNvPr id="5" name="Image 0" descr="preencoded.png">    </p:cNvPr>
+          <p:cNvPr id="4" name="Image 0" descr="preencoded.png">    </p:cNvPr>
           <p:cNvPicPr>
             <a:picLocks noChangeAspect="1"/>
           </p:cNvPicPr>
@@ -7147,8 +6987,8 @@
         </p:blipFill>
         <p:spPr>
           <a:xfrm>
-            <a:off x="989381" y="1812341"/>
-            <a:ext cx="307238" cy="307238"/>
+            <a:off x="822960" y="1645920"/>
+            <a:ext cx="640080" cy="640080"/>
           </a:xfrm>
           <a:prstGeom prst="rect">
             <a:avLst/>
@@ -7157,7 +6997,7 @@
       </p:pic>
       <p:sp>
         <p:nvSpPr>
-          <p:cNvPr id="6" name="Text 3"/>
+          <p:cNvPr id="5" name="Text 2"/>
           <p:cNvSpPr/>
           <p:nvPr/>
         </p:nvSpPr>
@@ -7196,7 +7036,7 @@
       </p:sp>
       <p:sp>
         <p:nvSpPr>
-          <p:cNvPr id="7" name="Text 4"/>
+          <p:cNvPr id="6" name="Text 3"/>
           <p:cNvSpPr/>
           <p:nvPr/>
         </p:nvSpPr>
@@ -7235,7 +7075,7 @@
       </p:sp>
       <p:sp>
         <p:nvSpPr>
-          <p:cNvPr id="8" name="Text 5"/>
+          <p:cNvPr id="7" name="Text 4"/>
           <p:cNvSpPr/>
           <p:nvPr/>
         </p:nvSpPr>
@@ -7338,7 +7178,7 @@
       </p:sp>
       <p:sp>
         <p:nvSpPr>
-          <p:cNvPr id="9" name="Shape 6"/>
+          <p:cNvPr id="8" name="Shape 5"/>
           <p:cNvSpPr/>
           <p:nvPr/>
         </p:nvSpPr>
@@ -7358,29 +7198,9 @@
           <a:ln/>
         </p:spPr>
       </p:sp>
-      <p:sp>
-        <p:nvSpPr>
-          <p:cNvPr id="10" name="Shape 7"/>
-          <p:cNvSpPr/>
-          <p:nvPr/>
-        </p:nvSpPr>
-        <p:spPr>
-          <a:xfrm>
-            <a:off x="6492240" y="1645920"/>
-            <a:ext cx="640080" cy="640080"/>
-          </a:xfrm>
-          <a:prstGeom prst="ellipse">
-            <a:avLst/>
-          </a:prstGeom>
-          <a:solidFill>
-            <a:srgbClr val="C8102E"/>
-          </a:solidFill>
-          <a:ln/>
-        </p:spPr>
-      </p:sp>
       <p:pic>
         <p:nvPicPr>
-          <p:cNvPr id="11" name="Image 1" descr="preencoded.png">    </p:cNvPr>
+          <p:cNvPr id="9" name="Image 1" descr="preencoded.png">    </p:cNvPr>
           <p:cNvPicPr>
             <a:picLocks noChangeAspect="1"/>
           </p:cNvPicPr>
@@ -7394,8 +7214,8 @@
         </p:blipFill>
         <p:spPr>
           <a:xfrm>
-            <a:off x="6658661" y="1812341"/>
-            <a:ext cx="307238" cy="307238"/>
+            <a:off x="6492240" y="1645920"/>
+            <a:ext cx="640080" cy="640080"/>
           </a:xfrm>
           <a:prstGeom prst="rect">
             <a:avLst/>
@@ -7404,7 +7224,7 @@
       </p:pic>
       <p:sp>
         <p:nvSpPr>
-          <p:cNvPr id="12" name="Text 8"/>
+          <p:cNvPr id="10" name="Text 6"/>
           <p:cNvSpPr/>
           <p:nvPr/>
         </p:nvSpPr>
@@ -7443,7 +7263,7 @@
       </p:sp>
       <p:sp>
         <p:nvSpPr>
-          <p:cNvPr id="13" name="Text 9"/>
+          <p:cNvPr id="11" name="Text 7"/>
           <p:cNvSpPr/>
           <p:nvPr/>
         </p:nvSpPr>
@@ -7482,7 +7302,7 @@
       </p:sp>
       <p:sp>
         <p:nvSpPr>
-          <p:cNvPr id="14" name="Text 10"/>
+          <p:cNvPr id="12" name="Text 8"/>
           <p:cNvSpPr/>
           <p:nvPr/>
         </p:nvSpPr>
@@ -7585,7 +7405,7 @@
       </p:sp>
       <p:sp>
         <p:nvSpPr>
-          <p:cNvPr id="15" name="Shape 11"/>
+          <p:cNvPr id="13" name="Shape 9"/>
           <p:cNvSpPr/>
           <p:nvPr/>
         </p:nvSpPr>
@@ -7607,7 +7427,7 @@
       </p:sp>
       <p:sp>
         <p:nvSpPr>
-          <p:cNvPr id="16" name="Text 12"/>
+          <p:cNvPr id="14" name="Text 10"/>
           <p:cNvSpPr/>
           <p:nvPr/>
         </p:nvSpPr>
@@ -7660,7 +7480,7 @@
       </p:sp>
       <p:sp>
         <p:nvSpPr>
-          <p:cNvPr id="17" name="Text 13"/>
+          <p:cNvPr id="15" name="Text 11"/>
           <p:cNvSpPr/>
           <p:nvPr/>
         </p:nvSpPr>
@@ -7688,7 +7508,7 @@
       </p:sp>
       <p:sp>
         <p:nvSpPr>
-          <p:cNvPr id="18" name="Text 14"/>
+          <p:cNvPr id="16" name="Text 12"/>
           <p:cNvSpPr/>
           <p:nvPr/>
         </p:nvSpPr>
@@ -7857,29 +7677,9 @@
           <a:ln/>
         </p:spPr>
       </p:sp>
-      <p:sp>
-        <p:nvSpPr>
-          <p:cNvPr id="5" name="Shape 3"/>
-          <p:cNvSpPr/>
-          <p:nvPr/>
-        </p:nvSpPr>
-        <p:spPr>
-          <a:xfrm>
-            <a:off x="868680" y="2011680"/>
-            <a:ext cx="685800" cy="685800"/>
-          </a:xfrm>
-          <a:prstGeom prst="ellipse">
-            <a:avLst/>
-          </a:prstGeom>
-          <a:solidFill>
-            <a:srgbClr val="C8102E"/>
-          </a:solidFill>
-          <a:ln/>
-        </p:spPr>
-      </p:sp>
       <p:pic>
         <p:nvPicPr>
-          <p:cNvPr id="6" name="Image 0" descr="preencoded.png">    </p:cNvPr>
+          <p:cNvPr id="5" name="Image 0" descr="preencoded.png">    </p:cNvPr>
           <p:cNvPicPr>
             <a:picLocks noChangeAspect="1"/>
           </p:cNvPicPr>
@@ -7893,8 +7693,8 @@
         </p:blipFill>
         <p:spPr>
           <a:xfrm>
-            <a:off x="1046988" y="2189988"/>
-            <a:ext cx="329184" cy="329184"/>
+            <a:off x="868680" y="2011680"/>
+            <a:ext cx="685800" cy="685800"/>
           </a:xfrm>
           <a:prstGeom prst="rect">
             <a:avLst/>
@@ -7903,7 +7703,7 @@
       </p:pic>
       <p:sp>
         <p:nvSpPr>
-          <p:cNvPr id="7" name="Text 4"/>
+          <p:cNvPr id="6" name="Text 3"/>
           <p:cNvSpPr/>
           <p:nvPr/>
         </p:nvSpPr>
@@ -7942,7 +7742,7 @@
       </p:sp>
       <p:sp>
         <p:nvSpPr>
-          <p:cNvPr id="8" name="Text 5"/>
+          <p:cNvPr id="7" name="Text 4"/>
           <p:cNvSpPr/>
           <p:nvPr/>
         </p:nvSpPr>
@@ -7981,7 +7781,7 @@
       </p:sp>
       <p:sp>
         <p:nvSpPr>
-          <p:cNvPr id="9" name="Text 6"/>
+          <p:cNvPr id="8" name="Text 5"/>
           <p:cNvSpPr/>
           <p:nvPr/>
         </p:nvSpPr>
@@ -8020,7 +7820,7 @@
       </p:sp>
       <p:sp>
         <p:nvSpPr>
-          <p:cNvPr id="10" name="Shape 7"/>
+          <p:cNvPr id="9" name="Shape 6"/>
           <p:cNvSpPr/>
           <p:nvPr/>
         </p:nvSpPr>
@@ -8040,29 +7840,9 @@
           <a:ln/>
         </p:spPr>
       </p:sp>
-      <p:sp>
-        <p:nvSpPr>
-          <p:cNvPr id="11" name="Shape 8"/>
-          <p:cNvSpPr/>
-          <p:nvPr/>
-        </p:nvSpPr>
-        <p:spPr>
-          <a:xfrm>
-            <a:off x="4663440" y="2011680"/>
-            <a:ext cx="685800" cy="685800"/>
-          </a:xfrm>
-          <a:prstGeom prst="ellipse">
-            <a:avLst/>
-          </a:prstGeom>
-          <a:solidFill>
-            <a:srgbClr val="C8102E"/>
-          </a:solidFill>
-          <a:ln/>
-        </p:spPr>
-      </p:sp>
       <p:pic>
         <p:nvPicPr>
-          <p:cNvPr id="12" name="Image 1" descr="preencoded.png">    </p:cNvPr>
+          <p:cNvPr id="10" name="Image 1" descr="preencoded.png">    </p:cNvPr>
           <p:cNvPicPr>
             <a:picLocks noChangeAspect="1"/>
           </p:cNvPicPr>
@@ -8076,8 +7856,8 @@
         </p:blipFill>
         <p:spPr>
           <a:xfrm>
-            <a:off x="4841748" y="2189988"/>
-            <a:ext cx="329184" cy="329184"/>
+            <a:off x="4663440" y="2011680"/>
+            <a:ext cx="685800" cy="685800"/>
           </a:xfrm>
           <a:prstGeom prst="rect">
             <a:avLst/>
@@ -8086,7 +7866,7 @@
       </p:pic>
       <p:sp>
         <p:nvSpPr>
-          <p:cNvPr id="13" name="Text 9"/>
+          <p:cNvPr id="11" name="Text 7"/>
           <p:cNvSpPr/>
           <p:nvPr/>
         </p:nvSpPr>
@@ -8125,7 +7905,7 @@
       </p:sp>
       <p:sp>
         <p:nvSpPr>
-          <p:cNvPr id="14" name="Text 10"/>
+          <p:cNvPr id="12" name="Text 8"/>
           <p:cNvSpPr/>
           <p:nvPr/>
         </p:nvSpPr>
@@ -8164,7 +7944,7 @@
       </p:sp>
       <p:sp>
         <p:nvSpPr>
-          <p:cNvPr id="15" name="Text 11"/>
+          <p:cNvPr id="13" name="Text 9"/>
           <p:cNvSpPr/>
           <p:nvPr/>
         </p:nvSpPr>
@@ -8203,7 +7983,7 @@
       </p:sp>
       <p:sp>
         <p:nvSpPr>
-          <p:cNvPr id="16" name="Shape 12"/>
+          <p:cNvPr id="14" name="Shape 10"/>
           <p:cNvSpPr/>
           <p:nvPr/>
         </p:nvSpPr>
@@ -8223,29 +8003,9 @@
           <a:ln/>
         </p:spPr>
       </p:sp>
-      <p:sp>
-        <p:nvSpPr>
-          <p:cNvPr id="17" name="Shape 13"/>
-          <p:cNvSpPr/>
-          <p:nvPr/>
-        </p:nvSpPr>
-        <p:spPr>
-          <a:xfrm>
-            <a:off x="8458200" y="2011680"/>
-            <a:ext cx="685800" cy="685800"/>
-          </a:xfrm>
-          <a:prstGeom prst="ellipse">
-            <a:avLst/>
-          </a:prstGeom>
-          <a:solidFill>
-            <a:srgbClr val="C8102E"/>
-          </a:solidFill>
-          <a:ln/>
-        </p:spPr>
-      </p:sp>
       <p:pic>
         <p:nvPicPr>
-          <p:cNvPr id="18" name="Image 2" descr="preencoded.png">    </p:cNvPr>
+          <p:cNvPr id="15" name="Image 2" descr="preencoded.png">    </p:cNvPr>
           <p:cNvPicPr>
             <a:picLocks noChangeAspect="1"/>
           </p:cNvPicPr>
@@ -8259,8 +8019,8 @@
         </p:blipFill>
         <p:spPr>
           <a:xfrm>
-            <a:off x="8636508" y="2189988"/>
-            <a:ext cx="329184" cy="329184"/>
+            <a:off x="8458200" y="2011680"/>
+            <a:ext cx="685800" cy="685800"/>
           </a:xfrm>
           <a:prstGeom prst="rect">
             <a:avLst/>
@@ -8269,7 +8029,7 @@
       </p:pic>
       <p:sp>
         <p:nvSpPr>
-          <p:cNvPr id="19" name="Text 14"/>
+          <p:cNvPr id="16" name="Text 11"/>
           <p:cNvSpPr/>
           <p:nvPr/>
         </p:nvSpPr>
@@ -8308,7 +8068,7 @@
       </p:sp>
       <p:sp>
         <p:nvSpPr>
-          <p:cNvPr id="20" name="Text 15"/>
+          <p:cNvPr id="17" name="Text 12"/>
           <p:cNvSpPr/>
           <p:nvPr/>
         </p:nvSpPr>
@@ -8347,7 +8107,7 @@
       </p:sp>
       <p:sp>
         <p:nvSpPr>
-          <p:cNvPr id="21" name="Text 16"/>
+          <p:cNvPr id="18" name="Text 13"/>
           <p:cNvSpPr/>
           <p:nvPr/>
         </p:nvSpPr>
@@ -8386,7 +8146,7 @@
       </p:sp>
       <p:sp>
         <p:nvSpPr>
-          <p:cNvPr id="22" name="Text 17"/>
+          <p:cNvPr id="19" name="Text 14"/>
           <p:cNvSpPr/>
           <p:nvPr/>
         </p:nvSpPr>
@@ -8425,7 +8185,7 @@
       </p:sp>
       <p:sp>
         <p:nvSpPr>
-          <p:cNvPr id="23" name="Text 18"/>
+          <p:cNvPr id="20" name="Text 15"/>
           <p:cNvSpPr/>
           <p:nvPr/>
         </p:nvSpPr>
@@ -8555,29 +8315,9 @@
           <a:ln/>
         </p:spPr>
       </p:sp>
-      <p:sp>
-        <p:nvSpPr>
-          <p:cNvPr id="4" name="Shape 2"/>
-          <p:cNvSpPr/>
-          <p:nvPr/>
-        </p:nvSpPr>
-        <p:spPr>
-          <a:xfrm>
-            <a:off x="978408" y="1874520"/>
-            <a:ext cx="640080" cy="640080"/>
-          </a:xfrm>
-          <a:prstGeom prst="ellipse">
-            <a:avLst/>
-          </a:prstGeom>
-          <a:solidFill>
-            <a:srgbClr val="C8102E"/>
-          </a:solidFill>
-          <a:ln/>
-        </p:spPr>
-      </p:sp>
       <p:pic>
         <p:nvPicPr>
-          <p:cNvPr id="5" name="Image 0" descr="preencoded.png">    </p:cNvPr>
+          <p:cNvPr id="4" name="Image 0" descr="preencoded.png">    </p:cNvPr>
           <p:cNvPicPr>
             <a:picLocks noChangeAspect="1"/>
           </p:cNvPicPr>
@@ -8591,8 +8331,8 @@
         </p:blipFill>
         <p:spPr>
           <a:xfrm>
-            <a:off x="1144829" y="2040941"/>
-            <a:ext cx="307238" cy="307238"/>
+            <a:off x="978408" y="1874520"/>
+            <a:ext cx="640080" cy="640080"/>
           </a:xfrm>
           <a:prstGeom prst="rect">
             <a:avLst/>
@@ -8601,7 +8341,7 @@
       </p:pic>
       <p:sp>
         <p:nvSpPr>
-          <p:cNvPr id="6" name="Text 3"/>
+          <p:cNvPr id="5" name="Text 2"/>
           <p:cNvSpPr/>
           <p:nvPr/>
         </p:nvSpPr>
@@ -8640,7 +8380,7 @@
       </p:sp>
       <p:sp>
         <p:nvSpPr>
-          <p:cNvPr id="7" name="Text 4"/>
+          <p:cNvPr id="6" name="Text 3"/>
           <p:cNvSpPr/>
           <p:nvPr/>
         </p:nvSpPr>
@@ -8679,7 +8419,7 @@
       </p:sp>
       <p:sp>
         <p:nvSpPr>
-          <p:cNvPr id="8" name="Text 5"/>
+          <p:cNvPr id="7" name="Text 4"/>
           <p:cNvSpPr/>
           <p:nvPr/>
         </p:nvSpPr>
@@ -8710,7 +8450,7 @@
                 <a:ea typeface="Arial" pitchFamily="34" charset="-122"/>
                 <a:cs typeface="Arial" pitchFamily="34" charset="-120"/>
               </a:rPr>
-              <a:t>Close-rate window (trailing quarter), what counts as a scoped lead, attribution rules, and “collected” = funds received.</a:t>
+              <a:t>Cohorts: a lead belongs to the quarter it was scoped; its close counts whenever it funds, inside a 180-day window. Define scoped lead, attribution, and collected = funds received.</a:t>
             </a:r>
             <a:endParaRPr lang="en-US" sz="1250" dirty="0"/>
           </a:p>
@@ -8718,7 +8458,7 @@
       </p:sp>
       <p:sp>
         <p:nvSpPr>
-          <p:cNvPr id="9" name="Shape 6"/>
+          <p:cNvPr id="8" name="Shape 5"/>
           <p:cNvSpPr/>
           <p:nvPr/>
         </p:nvSpPr>
@@ -8738,29 +8478,9 @@
           <a:ln/>
         </p:spPr>
       </p:sp>
-      <p:sp>
-        <p:nvSpPr>
-          <p:cNvPr id="10" name="Shape 7"/>
-          <p:cNvSpPr/>
-          <p:nvPr/>
-        </p:nvSpPr>
-        <p:spPr>
-          <a:xfrm>
-            <a:off x="4727448" y="1874520"/>
-            <a:ext cx="640080" cy="640080"/>
-          </a:xfrm>
-          <a:prstGeom prst="ellipse">
-            <a:avLst/>
-          </a:prstGeom>
-          <a:solidFill>
-            <a:srgbClr val="C8102E"/>
-          </a:solidFill>
-          <a:ln/>
-        </p:spPr>
-      </p:sp>
       <p:pic>
         <p:nvPicPr>
-          <p:cNvPr id="11" name="Image 1" descr="preencoded.png">    </p:cNvPr>
+          <p:cNvPr id="9" name="Image 1" descr="preencoded.png">    </p:cNvPr>
           <p:cNvPicPr>
             <a:picLocks noChangeAspect="1"/>
           </p:cNvPicPr>
@@ -8774,8 +8494,8 @@
         </p:blipFill>
         <p:spPr>
           <a:xfrm>
-            <a:off x="4893869" y="2040941"/>
-            <a:ext cx="307238" cy="307238"/>
+            <a:off x="4727448" y="1874520"/>
+            <a:ext cx="640080" cy="640080"/>
           </a:xfrm>
           <a:prstGeom prst="rect">
             <a:avLst/>
@@ -8784,7 +8504,7 @@
       </p:pic>
       <p:sp>
         <p:nvSpPr>
-          <p:cNvPr id="12" name="Text 8"/>
+          <p:cNvPr id="10" name="Text 6"/>
           <p:cNvSpPr/>
           <p:nvPr/>
         </p:nvSpPr>
@@ -8823,7 +8543,7 @@
       </p:sp>
       <p:sp>
         <p:nvSpPr>
-          <p:cNvPr id="13" name="Text 9"/>
+          <p:cNvPr id="11" name="Text 7"/>
           <p:cNvSpPr/>
           <p:nvPr/>
         </p:nvSpPr>
@@ -8862,7 +8582,7 @@
       </p:sp>
       <p:sp>
         <p:nvSpPr>
-          <p:cNvPr id="14" name="Text 10"/>
+          <p:cNvPr id="12" name="Text 8"/>
           <p:cNvSpPr/>
           <p:nvPr/>
         </p:nvSpPr>
@@ -8901,7 +8621,7 @@
       </p:sp>
       <p:sp>
         <p:nvSpPr>
-          <p:cNvPr id="15" name="Shape 11"/>
+          <p:cNvPr id="13" name="Shape 9"/>
           <p:cNvSpPr/>
           <p:nvPr/>
         </p:nvSpPr>
@@ -8921,29 +8641,9 @@
           <a:ln/>
         </p:spPr>
       </p:sp>
-      <p:sp>
-        <p:nvSpPr>
-          <p:cNvPr id="16" name="Shape 12"/>
-          <p:cNvSpPr/>
-          <p:nvPr/>
-        </p:nvSpPr>
-        <p:spPr>
-          <a:xfrm>
-            <a:off x="8476488" y="1874520"/>
-            <a:ext cx="640080" cy="640080"/>
-          </a:xfrm>
-          <a:prstGeom prst="ellipse">
-            <a:avLst/>
-          </a:prstGeom>
-          <a:solidFill>
-            <a:srgbClr val="C8102E"/>
-          </a:solidFill>
-          <a:ln/>
-        </p:spPr>
-      </p:sp>
       <p:pic>
         <p:nvPicPr>
-          <p:cNvPr id="17" name="Image 2" descr="preencoded.png">    </p:cNvPr>
+          <p:cNvPr id="14" name="Image 2" descr="preencoded.png">    </p:cNvPr>
           <p:cNvPicPr>
             <a:picLocks noChangeAspect="1"/>
           </p:cNvPicPr>
@@ -8957,8 +8657,8 @@
         </p:blipFill>
         <p:spPr>
           <a:xfrm>
-            <a:off x="8642909" y="2040941"/>
-            <a:ext cx="307238" cy="307238"/>
+            <a:off x="8476488" y="1874520"/>
+            <a:ext cx="640080" cy="640080"/>
           </a:xfrm>
           <a:prstGeom prst="rect">
             <a:avLst/>
@@ -8967,7 +8667,7 @@
       </p:pic>
       <p:sp>
         <p:nvSpPr>
-          <p:cNvPr id="18" name="Text 13"/>
+          <p:cNvPr id="15" name="Text 10"/>
           <p:cNvSpPr/>
           <p:nvPr/>
         </p:nvSpPr>
@@ -9006,7 +8706,7 @@
       </p:sp>
       <p:sp>
         <p:nvSpPr>
-          <p:cNvPr id="19" name="Text 14"/>
+          <p:cNvPr id="16" name="Text 11"/>
           <p:cNvSpPr/>
           <p:nvPr/>
         </p:nvSpPr>
@@ -9045,7 +8745,7 @@
       </p:sp>
       <p:sp>
         <p:nvSpPr>
-          <p:cNvPr id="20" name="Text 15"/>
+          <p:cNvPr id="17" name="Text 12"/>
           <p:cNvSpPr/>
           <p:nvPr/>
         </p:nvSpPr>
@@ -9076,7 +8776,7 @@
                 <a:ea typeface="Arial" pitchFamily="34" charset="-122"/>
                 <a:cs typeface="Arial" pitchFamily="34" charset="-120"/>
               </a:rPr>
-              <a:t>2% floor paid as jobs fund; quarter-end true-up to the earned average rate. Six-month check: if the numbers say adjust the curve, adjust the curve.</a:t>
+              <a:t>2% floor paid as jobs fund; each quarter-end re-rates every open cohort and pays the difference. Six-month check: if the numbers say adjust the curve, adjust it.</a:t>
             </a:r>
             <a:endParaRPr lang="en-US" sz="1250" dirty="0"/>
           </a:p>
@@ -9084,7 +8784,7 @@
       </p:sp>
       <p:sp>
         <p:nvSpPr>
-          <p:cNvPr id="21" name="Text 16"/>
+          <p:cNvPr id="18" name="Text 13"/>
           <p:cNvSpPr/>
           <p:nvPr/>
         </p:nvSpPr>
@@ -9123,7 +8823,7 @@
       </p:sp>
       <p:sp>
         <p:nvSpPr>
-          <p:cNvPr id="22" name="Text 17"/>
+          <p:cNvPr id="19" name="Text 14"/>
           <p:cNvSpPr/>
           <p:nvPr/>
         </p:nvSpPr>

--- a/pitch/Commission-Plan.pptx
+++ b/pitch/Commission-Plan.pptx
@@ -8450,7 +8450,7 @@
                 <a:ea typeface="Arial" pitchFamily="34" charset="-122"/>
                 <a:cs typeface="Arial" pitchFamily="34" charset="-120"/>
               </a:rPr>
-              <a:t>Cohorts: a lead belongs to the quarter it was scoped; its close counts whenever it funds, inside a 180-day window. Define scoped lead, attribution, and collected = funds received.</a:t>
+              <a:t>Close rate = funded jobs ÷ scoped leads. A scoped lead = homeowner + written RSOW handed to a rep; raw map records don't count. A lead belongs to the quarter it was scoped (180-day window).</a:t>
             </a:r>
             <a:endParaRPr lang="en-US" sz="1250" dirty="0"/>
           </a:p>

--- a/pitch/Commission-Plan.pptx
+++ b/pitch/Commission-Plan.pptx
@@ -1594,7 +1594,7 @@
                 <a:ea typeface="Arial" pitchFamily="34" charset="-122"/>
                 <a:cs typeface="Arial" pitchFamily="34" charset="-120"/>
               </a:rPr>
-              <a:t>Scope writing &amp; lead operations — paid only on jobs that close and collect</a:t>
+              <a:t>Storm-targeted lead generation — paid only on jobs that close and collect</a:t>
             </a:r>
             <a:endParaRPr lang="en-US" sz="2200" dirty="0"/>
           </a:p>
@@ -1881,7 +1881,7 @@
                 <a:ea typeface="Arial" pitchFamily="34" charset="-122"/>
                 <a:cs typeface="Arial" pitchFamily="34" charset="-120"/>
               </a:rPr>
-              <a:t>Insurance-grade scope writing (RSOW)</a:t>
+              <a:t>Damage-verified lead lists</a:t>
             </a:r>
             <a:endParaRPr lang="en-US" sz="1600" dirty="0"/>
           </a:p>
@@ -1920,7 +1920,7 @@
                 <a:ea typeface="Arial" pitchFamily="34" charset="-122"/>
                 <a:cs typeface="Arial" pitchFamily="34" charset="-120"/>
               </a:rPr>
-              <a:t>Full restoration scopes of work per job — line items, quantities, code items — built to survive adjuster review and maximize approved RCV.</a:t>
+              <a:t>Storm-mapped, filter-qualified homeowners — owner-occupied, right roof age, right income band — handed to reps as ready-to-knock lists.</a:t>
             </a:r>
             <a:endParaRPr lang="en-US" sz="1200" dirty="0"/>
           </a:p>
@@ -2005,7 +2005,7 @@
                 <a:ea typeface="Arial" pitchFamily="34" charset="-122"/>
                 <a:cs typeface="Arial" pitchFamily="34" charset="-120"/>
               </a:rPr>
-              <a:t>Storm targeting &amp; lead operations</a:t>
+              <a:t>Storm response &amp; territory ops</a:t>
             </a:r>
             <a:endParaRPr lang="en-US" sz="1600" dirty="0"/>
           </a:p>
@@ -2044,7 +2044,7 @@
                 <a:ea typeface="Arial" pitchFamily="34" charset="-122"/>
                 <a:cs typeface="Arial" pitchFamily="34" charset="-120"/>
               </a:rPr>
-              <a:t>Runs the damage-map platform: territories, filtered knock lists, alert response. Reps knock verified-damage doors instead of guessing.</a:t>
+              <a:t>Runs the damage-map platform: alerts, territories, routed lists, outreach timing. Reps are on verified-damage doors while competitors are reading the weather.</a:t>
             </a:r>
             <a:endParaRPr lang="en-US" sz="1200" dirty="0"/>
           </a:p>
@@ -2292,7 +2292,7 @@
                 <a:ea typeface="Arial" pitchFamily="34" charset="-122"/>
                 <a:cs typeface="Arial" pitchFamily="34" charset="-120"/>
               </a:rPr>
-              <a:t>No base, no draw, no per-scope charge. If a job doesn't close and fund, the work was free. All of the risk sits on this side of the table.</a:t>
+              <a:t>No base, no draw, no per-lead charge. If a job doesn't close and fund, the lead was free. All of the risk sits on this side of the table.</a:t>
             </a:r>
             <a:endParaRPr lang="en-US" sz="1200" dirty="0"/>
           </a:p>
@@ -2469,7 +2469,7 @@
                 <a:ea typeface="Arial" pitchFamily="34" charset="-122"/>
                 <a:cs typeface="Arial" pitchFamily="34" charset="-120"/>
               </a:rPr>
-              <a:t>Fee = % of job profit on scoped jobs, booked as a job expense, paid only when closed AND collected. </a:t>
+              <a:t>Fee = % of job profit on jobs from provided leads, booked as a job expense, paid only when closed AND collected. </a:t>
             </a:r>
             <a:pPr indent="0" marL="0">
               <a:buNone/>
@@ -2483,7 +2483,7 @@
                 <a:ea typeface="Arial" pitchFamily="34" charset="-122"/>
                 <a:cs typeface="Arial" pitchFamily="34" charset="-120"/>
               </a:rPr>
-              <a:t>The % is set by the close rate on scoped leads, measured quarterly. </a:t>
+              <a:t>The % is set by the close rate on those leads, measured quarterly. </a:t>
             </a:r>
             <a:pPr indent="0" marL="0">
               <a:buNone/>
@@ -2551,7 +2551,7 @@
                           <a:ea typeface="Arial" pitchFamily="34" charset="-122"/>
                           <a:cs typeface="Arial" pitchFamily="34" charset="-120"/>
                         </a:rPr>
-                        <a:t>Per 10 scoped leads</a:t>
+                        <a:t>Per 10 delivered leads</a:t>
                       </a:r>
                       <a:endParaRPr lang="en-US" sz="1300" dirty="0">
                         <a:latin typeface="Arial" charset="0"/>
@@ -5422,7 +5422,7 @@
                 <a:ea typeface="Arial" pitchFamily="34" charset="-122"/>
                 <a:cs typeface="Arial" pitchFamily="34" charset="-120"/>
               </a:rPr>
-              <a:t>Typical job: $30,000 RCV at 50% margin = $15,000 profit; fee is a job expense, so profit after fee splits 50/50. Close rate is cohort-based — a lead belongs to the quarter it was scoped; late closers re-rate that cohort (180-day window), so the rate only moves up.</a:t>
+              <a:t>Typical job: $30,000 RCV at 50% margin = $15,000 profit; fee is a job expense, so profit after fee splits 50/50. Close rate is cohort-based — a lead belongs to the quarter it was delivered; late closers re-rate that cohort (180-day window), so the rate only moves up.</a:t>
             </a:r>
             <a:endParaRPr lang="en-US" sz="900" dirty="0"/>
           </a:p>
@@ -5734,7 +5734,7 @@
                 <a:ea typeface="Arial" pitchFamily="34" charset="-122"/>
                 <a:cs typeface="Arial" pitchFamily="34" charset="-120"/>
               </a:rPr>
-              <a:t>Of job profit — $300 on a typical roof. Scoped leads where most won't close; the fee collects on the few that do. At a 20% close rate, 8 of every 10 scopes were written for free.</a:t>
+              <a:t>Of job profit — $300 on a typical roof. Raw lead lists where most won't close; the fee collects on the few that do. At a 20% close rate, 8 of every 10 leads were handed over for free.</a:t>
             </a:r>
             <a:endParaRPr lang="en-US" sz="1250" dirty="0"/>
           </a:p>
@@ -6160,7 +6160,7 @@
                 <a:ea typeface="Arial" pitchFamily="34" charset="-122"/>
                 <a:cs typeface="Arial" pitchFamily="34" charset="-120"/>
               </a:rPr>
-              <a:t>Same 100 scoped leads, five close rates. The fee % rises — the pie rises much faster.</a:t>
+              <a:t>Same 100 delivered leads, five close rates. The fee % rises — the pie rises much faster.</a:t>
             </a:r>
             <a:endParaRPr lang="en-US" sz="1500" dirty="0"/>
           </a:p>
@@ -6199,7 +6199,7 @@
                 <a:ea typeface="Arial" pitchFamily="34" charset="-122"/>
                 <a:cs typeface="Arial" pitchFamily="34" charset="-120"/>
               </a:rPr>
-              <a:t>T^Rock net profit per 100 scoped leads  (after fee &amp; PM split)</a:t>
+              <a:t>T^Rock net profit per 100 delivered leads  (after fee &amp; PM split)</a:t>
             </a:r>
             <a:endParaRPr lang="en-US" sz="1400" dirty="0"/>
           </a:p>
@@ -6833,7 +6833,7 @@
                 <a:ea typeface="Arial" pitchFamily="34" charset="-122"/>
                 <a:cs typeface="Arial" pitchFamily="34" charset="-120"/>
               </a:rPr>
-              <a:t>Per closed job: $30,000 × 50% margin = $15,000, less slider fee (a job expense), split 50/50 with the PM. 100 scoped leads held constant.</a:t>
+              <a:t>Per closed job: $30,000 × 50% margin = $15,000, less slider fee (a job expense), split 50/50 with the PM. 100 delivered leads held constant.</a:t>
             </a:r>
             <a:endParaRPr lang="en-US" sz="900" dirty="0"/>
           </a:p>
@@ -7649,7 +7649,7 @@
                 <a:ea typeface="Arial" pitchFamily="34" charset="-122"/>
                 <a:cs typeface="Arial" pitchFamily="34" charset="-120"/>
               </a:rPr>
-              <a:t>Every other way to buy scope writing carries fixed cost or scales with paperwork. This one scales only with collected revenue.</a:t>
+              <a:t>Every other way to buy leads charges up front, win or lose. This one bills only against collected revenue.</a:t>
             </a:r>
             <a:endParaRPr lang="en-US" sz="1500" dirty="0"/>
           </a:p>
@@ -7734,7 +7734,7 @@
                 <a:ea typeface="Arial" pitchFamily="34" charset="-122"/>
                 <a:cs typeface="Arial" pitchFamily="34" charset="-120"/>
               </a:rPr>
-              <a:t>Staff estimator</a:t>
+              <a:t>Lead sellers</a:t>
             </a:r>
             <a:endParaRPr lang="en-US" sz="1500" dirty="0"/>
           </a:p>
@@ -7773,7 +7773,7 @@
                 <a:ea typeface="Arial" pitchFamily="34" charset="-122"/>
                 <a:cs typeface="Arial" pitchFamily="34" charset="-120"/>
               </a:rPr>
-              <a:t>$70–90k/yr</a:t>
+              <a:t>$150–300</a:t>
             </a:r>
             <a:endParaRPr lang="en-US" sz="4000" dirty="0"/>
           </a:p>
@@ -7812,7 +7812,7 @@
                 <a:ea typeface="Arial" pitchFamily="34" charset="-122"/>
                 <a:cs typeface="Arial" pitchFamily="34" charset="-120"/>
               </a:rPr>
-              <a:t>Salary paid whether jobs close or not. Pure fixed overhead, plus payroll burden — and someone still has to run lead targeting.</a:t>
+              <a:t>per shared Angi-style lead, paid up front whether it closes or not — and the same homeowner is resold to 3–4 competitors.</a:t>
             </a:r>
             <a:endParaRPr lang="en-US" sz="1200" dirty="0"/>
           </a:p>
@@ -7897,7 +7897,7 @@
                 <a:ea typeface="Arial" pitchFamily="34" charset="-122"/>
                 <a:cs typeface="Arial" pitchFamily="34" charset="-120"/>
               </a:rPr>
-              <a:t>Supplement service</a:t>
+              <a:t>Paid ads (Google / LSA)</a:t>
             </a:r>
             <a:endParaRPr lang="en-US" sz="1500" dirty="0"/>
           </a:p>
@@ -7936,7 +7936,7 @@
                 <a:ea typeface="Arial" pitchFamily="34" charset="-122"/>
                 <a:cs typeface="Arial" pitchFamily="34" charset="-120"/>
               </a:rPr>
-              <a:t>25–33%</a:t>
+              <a:t>$75–250</a:t>
             </a:r>
             <a:endParaRPr lang="en-US" sz="4000" dirty="0"/>
           </a:p>
@@ -7975,7 +7975,7 @@
                 <a:ea typeface="Arial" pitchFamily="34" charset="-122"/>
                 <a:cs typeface="Arial" pitchFamily="34" charset="-120"/>
               </a:rPr>
-              <a:t>of every supplement dollar they add — cost scales with paperwork volume, not with closed jobs, and they touch nothing else.</a:t>
+              <a:t>per inbound lead — spend is committed before anyone knocks, and quality swings wildly from click to click.</a:t>
             </a:r>
             <a:endParaRPr lang="en-US" sz="1200" dirty="0"/>
           </a:p>
@@ -8138,7 +8138,7 @@
                 <a:ea typeface="Arial" pitchFamily="34" charset="-122"/>
                 <a:cs typeface="Arial" pitchFamily="34" charset="-120"/>
               </a:rPr>
-              <a:t>until a job closes AND the check clears. Scope writing and lead operations in one seat, booked as a job cost on collected revenue.</a:t>
+              <a:t>until a job closes AND the check clears. Damage-verified, exclusive leads, billed as a job cost on collected revenue.</a:t>
             </a:r>
             <a:endParaRPr lang="en-US" sz="1200" dirty="0"/>
           </a:p>
@@ -8177,7 +8177,7 @@
                 <a:ea typeface="Arial" pitchFamily="34" charset="-122"/>
                 <a:cs typeface="Arial" pitchFamily="34" charset="-120"/>
               </a:rPr>
-              <a:t>Estimator salary and supplement-fee ranges are industry-typical figures for the region, not quotes.</a:t>
+              <a:t>Per-lead price ranges are typical published figures for roofing, not quotes.</a:t>
             </a:r>
             <a:endParaRPr lang="en-US" sz="900" dirty="0"/>
           </a:p>
@@ -8450,7 +8450,7 @@
                 <a:ea typeface="Arial" pitchFamily="34" charset="-122"/>
                 <a:cs typeface="Arial" pitchFamily="34" charset="-120"/>
               </a:rPr>
-              <a:t>Close rate = funded jobs ÷ scoped leads. A scoped lead = homeowner + written RSOW handed to a rep; raw map records don't count. A lead belongs to the quarter it was scoped (180-day window).</a:t>
+              <a:t>Close rate = funded jobs ÷ delivered leads. A delivered lead = homeowner + property accepted by a rep onto a route; raw map records don't count. A lead belongs to the quarter delivered (180-day window).</a:t>
             </a:r>
             <a:endParaRPr lang="en-US" sz="1250" dirty="0"/>
           </a:p>

--- a/pitch/Commission-Plan.pptx
+++ b/pitch/Commission-Plan.pptx
@@ -3745,7 +3745,7 @@
                           <a:ea typeface="Arial" pitchFamily="34" charset="-122"/>
                           <a:cs typeface="Arial" pitchFamily="34" charset="-120"/>
                         </a:rPr>
-                        <a:t>Fee per closed job ($15,000 profit)</a:t>
+                        <a:t>Fee per closed job ($10,500 profit)</a:t>
                       </a:r>
                       <a:endParaRPr lang="en-US" sz="1200" dirty="0">
                         <a:latin typeface="Arial" charset="0"/>
@@ -3810,7 +3810,7 @@
                           <a:ea typeface="Arial" pitchFamily="34" charset="-122"/>
                           <a:cs typeface="Arial" pitchFamily="34" charset="-120"/>
                         </a:rPr>
-                        <a:t>$300</a:t>
+                        <a:t>$210</a:t>
                       </a:r>
                       <a:endParaRPr lang="en-US" sz="1250" dirty="0">
                         <a:latin typeface="Arial" charset="0"/>
@@ -3875,7 +3875,7 @@
                           <a:ea typeface="Arial" pitchFamily="34" charset="-122"/>
                           <a:cs typeface="Arial" pitchFamily="34" charset="-120"/>
                         </a:rPr>
-                        <a:t>$600</a:t>
+                        <a:t>$420</a:t>
                       </a:r>
                       <a:endParaRPr lang="en-US" sz="1250" dirty="0">
                         <a:latin typeface="Arial" charset="0"/>
@@ -3940,7 +3940,7 @@
                           <a:ea typeface="Arial" pitchFamily="34" charset="-122"/>
                           <a:cs typeface="Arial" pitchFamily="34" charset="-120"/>
                         </a:rPr>
-                        <a:t>$900</a:t>
+                        <a:t>$630</a:t>
                       </a:r>
                       <a:endParaRPr lang="en-US" sz="1250" dirty="0">
                         <a:latin typeface="Arial" charset="0"/>
@@ -4005,7 +4005,7 @@
                           <a:ea typeface="Arial" pitchFamily="34" charset="-122"/>
                           <a:cs typeface="Arial" pitchFamily="34" charset="-120"/>
                         </a:rPr>
-                        <a:t>$1,200</a:t>
+                        <a:t>$840</a:t>
                       </a:r>
                       <a:endParaRPr lang="en-US" sz="1250" dirty="0">
                         <a:latin typeface="Arial" charset="0"/>
@@ -4070,7 +4070,7 @@
                           <a:ea typeface="Arial" pitchFamily="34" charset="-122"/>
                           <a:cs typeface="Arial" pitchFamily="34" charset="-120"/>
                         </a:rPr>
-                        <a:t>$1,500</a:t>
+                        <a:t>$1,050</a:t>
                       </a:r>
                       <a:endParaRPr lang="en-US" sz="1250" dirty="0">
                         <a:latin typeface="Arial" charset="0"/>
@@ -4594,7 +4594,7 @@
                           <a:ea typeface="Arial" pitchFamily="34" charset="-122"/>
                           <a:cs typeface="Arial" pitchFamily="34" charset="-120"/>
                         </a:rPr>
-                        <a:t>$7,350</a:t>
+                        <a:t>$5,145</a:t>
                       </a:r>
                       <a:endParaRPr lang="en-US" sz="1250" dirty="0">
                         <a:latin typeface="Arial" charset="0"/>
@@ -4659,7 +4659,7 @@
                           <a:ea typeface="Arial" pitchFamily="34" charset="-122"/>
                           <a:cs typeface="Arial" pitchFamily="34" charset="-120"/>
                         </a:rPr>
-                        <a:t>$7,200</a:t>
+                        <a:t>$5,040</a:t>
                       </a:r>
                       <a:endParaRPr lang="en-US" sz="1250" dirty="0">
                         <a:latin typeface="Arial" charset="0"/>
@@ -4724,7 +4724,7 @@
                           <a:ea typeface="Arial" pitchFamily="34" charset="-122"/>
                           <a:cs typeface="Arial" pitchFamily="34" charset="-120"/>
                         </a:rPr>
-                        <a:t>$7,050</a:t>
+                        <a:t>$4,935</a:t>
                       </a:r>
                       <a:endParaRPr lang="en-US" sz="1250" dirty="0">
                         <a:latin typeface="Arial" charset="0"/>
@@ -4789,7 +4789,7 @@
                           <a:ea typeface="Arial" pitchFamily="34" charset="-122"/>
                           <a:cs typeface="Arial" pitchFamily="34" charset="-120"/>
                         </a:rPr>
-                        <a:t>$6,900</a:t>
+                        <a:t>$4,830</a:t>
                       </a:r>
                       <a:endParaRPr lang="en-US" sz="1250" dirty="0">
                         <a:latin typeface="Arial" charset="0"/>
@@ -4854,7 +4854,7 @@
                           <a:ea typeface="Arial" pitchFamily="34" charset="-122"/>
                           <a:cs typeface="Arial" pitchFamily="34" charset="-120"/>
                         </a:rPr>
-                        <a:t>$6,750</a:t>
+                        <a:t>$4,725</a:t>
                       </a:r>
                       <a:endParaRPr lang="en-US" sz="1250" dirty="0">
                         <a:latin typeface="Arial" charset="0"/>
@@ -4986,7 +4986,7 @@
                           <a:ea typeface="Arial" pitchFamily="34" charset="-122"/>
                           <a:cs typeface="Arial" pitchFamily="34" charset="-120"/>
                         </a:rPr>
-                        <a:t>$14,700</a:t>
+                        <a:t>$10,290</a:t>
                       </a:r>
                       <a:endParaRPr lang="en-US" sz="1300" dirty="0">
                         <a:latin typeface="Arial" charset="0"/>
@@ -5054,7 +5054,7 @@
                           <a:ea typeface="Arial" pitchFamily="34" charset="-122"/>
                           <a:cs typeface="Arial" pitchFamily="34" charset="-120"/>
                         </a:rPr>
-                        <a:t>$28,800</a:t>
+                        <a:t>$20,160</a:t>
                       </a:r>
                       <a:endParaRPr lang="en-US" sz="1300" dirty="0">
                         <a:latin typeface="Arial" charset="0"/>
@@ -5122,7 +5122,7 @@
                           <a:ea typeface="Arial" pitchFamily="34" charset="-122"/>
                           <a:cs typeface="Arial" pitchFamily="34" charset="-120"/>
                         </a:rPr>
-                        <a:t>$42,300</a:t>
+                        <a:t>$29,610</a:t>
                       </a:r>
                       <a:endParaRPr lang="en-US" sz="1300" dirty="0">
                         <a:latin typeface="Arial" charset="0"/>
@@ -5190,7 +5190,7 @@
                           <a:ea typeface="Arial" pitchFamily="34" charset="-122"/>
                           <a:cs typeface="Arial" pitchFamily="34" charset="-120"/>
                         </a:rPr>
-                        <a:t>$55,200</a:t>
+                        <a:t>$38,640</a:t>
                       </a:r>
                       <a:endParaRPr lang="en-US" sz="1300" dirty="0">
                         <a:latin typeface="Arial" charset="0"/>
@@ -5258,7 +5258,7 @@
                           <a:ea typeface="Arial" pitchFamily="34" charset="-122"/>
                           <a:cs typeface="Arial" pitchFamily="34" charset="-120"/>
                         </a:rPr>
-                        <a:t>$67,500</a:t>
+                        <a:t>$47,250</a:t>
                       </a:r>
                       <a:endParaRPr lang="en-US" sz="1300" dirty="0">
                         <a:latin typeface="Arial" charset="0"/>
@@ -5369,7 +5369,7 @@
                 <a:ea typeface="Arial" pitchFamily="34" charset="-122"/>
                 <a:cs typeface="Arial" pitchFamily="34" charset="-120"/>
               </a:rPr>
-              <a:t>The “expensive” end of the slider is the one where T^Rock banks $67,500 on 10 leads instead of $14,700. </a:t>
+              <a:t>The “expensive” end of the slider is the one where T^Rock banks $47,250 on 10 leads instead of $10,290. </a:t>
             </a:r>
             <a:pPr indent="0" marL="0">
               <a:buNone/>
@@ -5422,7 +5422,7 @@
                 <a:ea typeface="Arial" pitchFamily="34" charset="-122"/>
                 <a:cs typeface="Arial" pitchFamily="34" charset="-120"/>
               </a:rPr>
-              <a:t>Typical job: $30,000 RCV at 50% margin = $15,000 profit; fee is a job expense, so profit after fee splits 50/50. Close rate is cohort-based — a lead belongs to the quarter it was delivered; late closers re-rate that cohort (180-day window), so the rate only moves up.</a:t>
+              <a:t>Typical job: $30,000 RCV at 35% margin = $10,500 profit; fee is a job expense, so profit after fee splits 50/50. Close rate is cohort-based — a lead belongs to the quarter it was delivered; late closers re-rate that cohort (180-day window), so the rate only moves up.</a:t>
             </a:r>
             <a:endParaRPr lang="en-US" sz="900" dirty="0"/>
           </a:p>
@@ -5734,7 +5734,7 @@
                 <a:ea typeface="Arial" pitchFamily="34" charset="-122"/>
                 <a:cs typeface="Arial" pitchFamily="34" charset="-120"/>
               </a:rPr>
-              <a:t>Of job profit — $300 on a typical roof. Raw lead lists where most won't close; the fee collects on the few that do. At a 20% close rate, 8 of every 10 leads were handed over for free.</a:t>
+              <a:t>Of job profit — $210 on a typical roof. Raw lead lists where most won't close; the fee collects on the few that do. At a 20% close rate, 8 of every 10 leads were handed over for free.</a:t>
             </a:r>
             <a:endParaRPr lang="en-US" sz="1250" dirty="0"/>
           </a:p>
@@ -5897,7 +5897,7 @@
                 <a:ea typeface="Arial" pitchFamily="34" charset="-122"/>
                 <a:cs typeface="Arial" pitchFamily="34" charset="-120"/>
               </a:rPr>
-              <a:t>A lead that closes 100% of the time is a signed contract changing hands — a referral. The customary referral fee is ~10% of contract value; 10% of profit is $1,500 on a $30,000 roof — just 5% of contract. Half the going rate for a done deal.</a:t>
+              <a:t>A lead that closes 100% of the time is a signed contract changing hands — a referral. The customary referral fee is ~10% of contract value; 10% of profit is $1,050 on a $30,000 roof — just 3.5% of contract. A third of the going rate for a done deal.</a:t>
             </a:r>
             <a:endParaRPr lang="en-US" sz="1250" dirty="0"/>
           </a:p>
@@ -6011,7 +6011,7 @@
                 <a:ea typeface="Arial" pitchFamily="34" charset="-122"/>
                 <a:cs typeface="Arial" pitchFamily="34" charset="-120"/>
               </a:rPr>
-              <a:t>Referral benchmark: ~10% of contract value is the customary fee for handed-off, ready-to-sign work — this plan's ceiling works out to half that.</a:t>
+              <a:t>Referral benchmark: ~10% of contract value is the customary fee for handed-off, ready-to-sign work — this plan's ceiling works out to about a third of that.</a:t>
             </a:r>
             <a:endParaRPr lang="en-US" sz="900" dirty="0"/>
           </a:p>
@@ -6280,7 +6280,7 @@
                 <a:ea typeface="Arial" pitchFamily="34" charset="-122"/>
                 <a:cs typeface="Arial" pitchFamily="34" charset="-120"/>
               </a:rPr>
-              <a:t>$147,000</a:t>
+              <a:t>$102,900</a:t>
             </a:r>
             <a:endParaRPr lang="en-US" sz="1350" dirty="0"/>
           </a:p>
@@ -6380,7 +6380,7 @@
                 <a:ea typeface="Arial" pitchFamily="34" charset="-122"/>
                 <a:cs typeface="Arial" pitchFamily="34" charset="-120"/>
               </a:rPr>
-              <a:t>$288,000</a:t>
+              <a:t>$201,600</a:t>
             </a:r>
             <a:endParaRPr lang="en-US" sz="1350" dirty="0"/>
           </a:p>
@@ -6480,7 +6480,7 @@
                 <a:ea typeface="Arial" pitchFamily="34" charset="-122"/>
                 <a:cs typeface="Arial" pitchFamily="34" charset="-120"/>
               </a:rPr>
-              <a:t>$423,000</a:t>
+              <a:t>$296,100</a:t>
             </a:r>
             <a:endParaRPr lang="en-US" sz="1350" dirty="0"/>
           </a:p>
@@ -6580,7 +6580,7 @@
                 <a:ea typeface="Arial" pitchFamily="34" charset="-122"/>
                 <a:cs typeface="Arial" pitchFamily="34" charset="-120"/>
               </a:rPr>
-              <a:t>$552,000</a:t>
+              <a:t>$386,400</a:t>
             </a:r>
             <a:endParaRPr lang="en-US" sz="1350" dirty="0"/>
           </a:p>
@@ -6680,7 +6680,7 @@
                 <a:ea typeface="Arial" pitchFamily="34" charset="-122"/>
                 <a:cs typeface="Arial" pitchFamily="34" charset="-120"/>
               </a:rPr>
-              <a:t>$675,000</a:t>
+              <a:t>$472,500</a:t>
             </a:r>
             <a:endParaRPr lang="en-US" sz="1600" dirty="0"/>
           </a:p>
@@ -6833,7 +6833,7 @@
                 <a:ea typeface="Arial" pitchFamily="34" charset="-122"/>
                 <a:cs typeface="Arial" pitchFamily="34" charset="-120"/>
               </a:rPr>
-              <a:t>Per closed job: $30,000 × 50% margin = $15,000, less slider fee (a job expense), split 50/50 with the PM. 100 delivered leads held constant.</a:t>
+              <a:t>Per closed job: $30,000 × 35% margin = $10,500, less slider fee (a job expense), split 50/50 with the PM. 100 delivered leads held constant.</a:t>
             </a:r>
             <a:endParaRPr lang="en-US" sz="900" dirty="0"/>
           </a:p>
@@ -7131,7 +7131,7 @@
                 <a:ea typeface="Arial" pitchFamily="34" charset="-122"/>
                 <a:cs typeface="Arial" pitchFamily="34" charset="-120"/>
               </a:rPr>
-              <a:t>Worked example: $30,000 roof → $15,000 profit → 10% fee = $1,500 → $13,500 splits 50/50 → T^Rock nets $6,750</a:t>
+              <a:t>Worked example: $30,000 roof → $10,500 profit → 10% fee = $1,050 → $9,450 splits 50/50 → T^Rock nets $4,725</a:t>
             </a:r>
             <a:endParaRPr lang="en-US" sz="1250" dirty="0"/>
           </a:p>
@@ -7337,7 +7337,7 @@
                 <a:ea typeface="Arial" pitchFamily="34" charset="-122"/>
                 <a:cs typeface="Arial" pitchFamily="34" charset="-120"/>
               </a:rPr>
-              <a:t>Equivalent band at today's margins: 1% → 5% of contract value</a:t>
+              <a:t>Equivalent band at today's margins: 0.7% → 3.5% of contract value</a:t>
             </a:r>
             <a:endParaRPr lang="en-US" sz="1250" dirty="0"/>
           </a:p>

--- a/pitch/Commission-Plan.pptx
+++ b/pitch/Commission-Plan.pptx
@@ -1547,7 +1547,7 @@
               <a:buNone/>
             </a:pPr>
             <a:r>
-              <a:rPr lang="en-US" sz="4400" b="1" dirty="0">
+              <a:rPr lang="en-US" sz="3600" b="1" dirty="0">
                 <a:solidFill>
                   <a:srgbClr val="FFFFFF"/>
                 </a:solidFill>
@@ -1557,7 +1557,7 @@
               </a:rPr>
               <a:t>T^ROCK PERFORMANCE PAY PLAN</a:t>
             </a:r>
-            <a:endParaRPr lang="en-US" sz="4400" dirty="0"/>
+            <a:endParaRPr lang="en-US" sz="3600" dirty="0"/>
           </a:p>
         </p:txBody>
       </p:sp>
@@ -1570,7 +1570,7 @@
         <p:spPr>
           <a:xfrm>
             <a:off x="713232" y="3200400"/>
-            <a:ext cx="10515600" cy="548640"/>
+            <a:ext cx="10515600" cy="914400"/>
           </a:xfrm>
           <a:prstGeom prst="rect">
             <a:avLst/>
@@ -1586,7 +1586,7 @@
               <a:buNone/>
             </a:pPr>
             <a:r>
-              <a:rPr lang="en-US" sz="2200" dirty="0">
+              <a:rPr lang="en-US" sz="2100" dirty="0">
                 <a:solidFill>
                   <a:srgbClr val="D9D9D9"/>
                 </a:solidFill>
@@ -1596,7 +1596,7 @@
               </a:rPr>
               <a:t>Storm-targeted lead generation — paid only on jobs that close and collect</a:t>
             </a:r>
-            <a:endParaRPr lang="en-US" sz="2200" dirty="0"/>
+            <a:endParaRPr lang="en-US" sz="2100" dirty="0"/>
           </a:p>
         </p:txBody>
       </p:sp>
@@ -1856,8 +1856,8 @@
         </p:nvSpPr>
         <p:spPr>
           <a:xfrm>
-            <a:off x="1645920" y="2084832"/>
-            <a:ext cx="4114800" cy="365760"/>
+            <a:off x="1645920" y="2048256"/>
+            <a:ext cx="4114800" cy="530352"/>
           </a:xfrm>
           <a:prstGeom prst="rect">
             <a:avLst/>
@@ -1873,7 +1873,7 @@
               <a:buNone/>
             </a:pPr>
             <a:r>
-              <a:rPr lang="en-US" sz="1600" b="1" dirty="0">
+              <a:rPr lang="en-US" sz="1500" b="1" dirty="0">
                 <a:solidFill>
                   <a:srgbClr val="111111"/>
                 </a:solidFill>
@@ -1883,7 +1883,7 @@
               </a:rPr>
               <a:t>Damage-verified lead lists</a:t>
             </a:r>
-            <a:endParaRPr lang="en-US" sz="1600" dirty="0"/>
+            <a:endParaRPr lang="en-US" sz="1500" dirty="0"/>
           </a:p>
         </p:txBody>
       </p:sp>
@@ -1895,8 +1895,8 @@
         </p:nvSpPr>
         <p:spPr>
           <a:xfrm>
-            <a:off x="1645920" y="2514600"/>
-            <a:ext cx="4114800" cy="1188720"/>
+            <a:off x="1645920" y="2633472"/>
+            <a:ext cx="4114800" cy="1115568"/>
           </a:xfrm>
           <a:prstGeom prst="rect">
             <a:avLst/>
@@ -1980,8 +1980,8 @@
         </p:nvSpPr>
         <p:spPr>
           <a:xfrm>
-            <a:off x="7315200" y="2084832"/>
-            <a:ext cx="4114800" cy="365760"/>
+            <a:off x="7315200" y="2048256"/>
+            <a:ext cx="4114800" cy="530352"/>
           </a:xfrm>
           <a:prstGeom prst="rect">
             <a:avLst/>
@@ -1997,7 +1997,7 @@
               <a:buNone/>
             </a:pPr>
             <a:r>
-              <a:rPr lang="en-US" sz="1600" b="1" dirty="0">
+              <a:rPr lang="en-US" sz="1500" b="1" dirty="0">
                 <a:solidFill>
                   <a:srgbClr val="111111"/>
                 </a:solidFill>
@@ -2007,7 +2007,7 @@
               </a:rPr>
               <a:t>Storm response &amp; territory ops</a:t>
             </a:r>
-            <a:endParaRPr lang="en-US" sz="1600" dirty="0"/>
+            <a:endParaRPr lang="en-US" sz="1500" dirty="0"/>
           </a:p>
         </p:txBody>
       </p:sp>
@@ -2019,8 +2019,8 @@
         </p:nvSpPr>
         <p:spPr>
           <a:xfrm>
-            <a:off x="7315200" y="2514600"/>
-            <a:ext cx="4114800" cy="1188720"/>
+            <a:off x="7315200" y="2633472"/>
+            <a:ext cx="4114800" cy="1115568"/>
           </a:xfrm>
           <a:prstGeom prst="rect">
             <a:avLst/>
@@ -2104,8 +2104,8 @@
         </p:nvSpPr>
         <p:spPr>
           <a:xfrm>
-            <a:off x="1645920" y="4279392"/>
-            <a:ext cx="4114800" cy="365760"/>
+            <a:off x="1645920" y="4242816"/>
+            <a:ext cx="4114800" cy="530352"/>
           </a:xfrm>
           <a:prstGeom prst="rect">
             <a:avLst/>
@@ -2121,7 +2121,7 @@
               <a:buNone/>
             </a:pPr>
             <a:r>
-              <a:rPr lang="en-US" sz="1600" b="1" dirty="0">
+              <a:rPr lang="en-US" sz="1500" b="1" dirty="0">
                 <a:solidFill>
                   <a:srgbClr val="111111"/>
                 </a:solidFill>
@@ -2131,7 +2131,7 @@
               </a:rPr>
               <a:t>Fee booked as a job cost</a:t>
             </a:r>
-            <a:endParaRPr lang="en-US" sz="1600" dirty="0"/>
+            <a:endParaRPr lang="en-US" sz="1500" dirty="0"/>
           </a:p>
         </p:txBody>
       </p:sp>
@@ -2143,8 +2143,8 @@
         </p:nvSpPr>
         <p:spPr>
           <a:xfrm>
-            <a:off x="1645920" y="4709160"/>
-            <a:ext cx="4114800" cy="1188720"/>
+            <a:off x="1645920" y="4828032"/>
+            <a:ext cx="4114800" cy="1115568"/>
           </a:xfrm>
           <a:prstGeom prst="rect">
             <a:avLst/>
@@ -2228,8 +2228,8 @@
         </p:nvSpPr>
         <p:spPr>
           <a:xfrm>
-            <a:off x="7315200" y="4279392"/>
-            <a:ext cx="4114800" cy="365760"/>
+            <a:off x="7315200" y="4242816"/>
+            <a:ext cx="4114800" cy="530352"/>
           </a:xfrm>
           <a:prstGeom prst="rect">
             <a:avLst/>
@@ -2245,7 +2245,7 @@
               <a:buNone/>
             </a:pPr>
             <a:r>
-              <a:rPr lang="en-US" sz="1600" b="1" dirty="0">
+              <a:rPr lang="en-US" sz="1500" b="1" dirty="0">
                 <a:solidFill>
                   <a:srgbClr val="111111"/>
                 </a:solidFill>
@@ -2255,7 +2255,7 @@
               </a:rPr>
               <a:t>Paid on collected, not promised</a:t>
             </a:r>
-            <a:endParaRPr lang="en-US" sz="1600" dirty="0"/>
+            <a:endParaRPr lang="en-US" sz="1500" dirty="0"/>
           </a:p>
         </p:txBody>
       </p:sp>
@@ -2267,8 +2267,8 @@
         </p:nvSpPr>
         <p:spPr>
           <a:xfrm>
-            <a:off x="7315200" y="4709160"/>
-            <a:ext cx="4114800" cy="1188720"/>
+            <a:off x="7315200" y="4828032"/>
+            <a:ext cx="4114800" cy="1115568"/>
           </a:xfrm>
           <a:prstGeom prst="rect">
             <a:avLst/>
@@ -2444,8 +2444,8 @@
         </p:nvSpPr>
         <p:spPr>
           <a:xfrm>
-            <a:off x="548640" y="1051560"/>
-            <a:ext cx="10881360" cy="685800"/>
+            <a:off x="548640" y="1024128"/>
+            <a:ext cx="10881360" cy="868680"/>
           </a:xfrm>
           <a:prstGeom prst="rect">
             <a:avLst/>
@@ -2461,7 +2461,7 @@
               <a:buNone/>
             </a:pPr>
             <a:r>
-              <a:rPr lang="en-US" sz="1400" b="1" dirty="0">
+              <a:rPr lang="en-US" sz="1300" b="1" dirty="0">
                 <a:solidFill>
                   <a:srgbClr val="2A2A2A"/>
                 </a:solidFill>
@@ -2475,7 +2475,7 @@
               <a:buNone/>
             </a:pPr>
             <a:r>
-              <a:rPr lang="en-US" sz="1400" dirty="0">
+              <a:rPr lang="en-US" sz="1300" dirty="0">
                 <a:solidFill>
                   <a:srgbClr val="6E6E6E"/>
                 </a:solidFill>
@@ -2489,7 +2489,7 @@
               <a:buNone/>
             </a:pPr>
             <a:r>
-              <a:rPr lang="en-US" sz="1400" b="1" dirty="0">
+              <a:rPr lang="en-US" sz="1300" b="1" dirty="0">
                 <a:solidFill>
                   <a:srgbClr val="C8102E"/>
                 </a:solidFill>
@@ -2499,7 +2499,7 @@
               </a:rPr>
               <a:t>Cash flow: the 2% floor is paid as each job funds; quarter-end reconciliation trues up to the earned average rate — T^Rock never prepays a rate, and nothing is ever clawed back.</a:t>
             </a:r>
-            <a:endParaRPr lang="en-US" sz="1400" dirty="0"/>
+            <a:endParaRPr lang="en-US" sz="1300" dirty="0"/>
           </a:p>
         </p:txBody>
       </p:sp>
@@ -2518,7 +2518,7 @@
           </p:nvPr>
         </p:nvGraphicFramePr>
         <p:xfrm>
-          <a:off x="548640" y="1874520"/>
+          <a:off x="548640" y="1920240"/>
           <a:ext cx="11064240" cy="914400"/>
         </p:xfrm>
         <a:graphic>
@@ -2533,7 +2533,7 @@
                 <a:gridCol w="1463040"/>
                 <a:gridCol w="1737360"/>
               </a:tblGrid>
-              <a:tr h="365760">
+              <a:tr h="457200">
                 <a:tc>
                   <a:txBody>
                     <a:bodyPr/>
@@ -2543,7 +2543,7 @@
                         <a:buNone/>
                       </a:pPr>
                       <a:r>
-                        <a:rPr lang="en-US" sz="1300" b="1" dirty="0">
+                        <a:rPr lang="en-US" sz="1200" b="1" dirty="0">
                           <a:solidFill>
                             <a:srgbClr val="FFFFFF"/>
                           </a:solidFill>
@@ -2553,7 +2553,7 @@
                         </a:rPr>
                         <a:t>Per 10 delivered leads</a:t>
                       </a:r>
-                      <a:endParaRPr lang="en-US" sz="1300" dirty="0">
+                      <a:endParaRPr lang="en-US" sz="1200" dirty="0">
                         <a:latin typeface="Arial" charset="0"/>
                         <a:ea typeface="Arial" charset="0"/>
                         <a:cs typeface="Arial" charset="0"/>
@@ -2611,7 +2611,7 @@
                         <a:buNone/>
                       </a:pPr>
                       <a:r>
-                        <a:rPr lang="en-US" sz="1300" b="1" dirty="0">
+                        <a:rPr lang="en-US" sz="1200" b="1" dirty="0">
                           <a:solidFill>
                             <a:srgbClr val="FFFFFF"/>
                           </a:solidFill>
@@ -2621,7 +2621,7 @@
                         </a:rPr>
                         <a:t>20% close (floor)</a:t>
                       </a:r>
-                      <a:endParaRPr lang="en-US" sz="1300" dirty="0">
+                      <a:endParaRPr lang="en-US" sz="1200" dirty="0">
                         <a:latin typeface="Arial" charset="0"/>
                         <a:ea typeface="Arial" charset="0"/>
                         <a:cs typeface="Arial" charset="0"/>
@@ -2679,7 +2679,7 @@
                         <a:buNone/>
                       </a:pPr>
                       <a:r>
-                        <a:rPr lang="en-US" sz="1300" b="1" dirty="0">
+                        <a:rPr lang="en-US" sz="1200" b="1" dirty="0">
                           <a:solidFill>
                             <a:srgbClr val="FFFFFF"/>
                           </a:solidFill>
@@ -2689,7 +2689,7 @@
                         </a:rPr>
                         <a:t>40%</a:t>
                       </a:r>
-                      <a:endParaRPr lang="en-US" sz="1300" dirty="0">
+                      <a:endParaRPr lang="en-US" sz="1200" dirty="0">
                         <a:latin typeface="Arial" charset="0"/>
                         <a:ea typeface="Arial" charset="0"/>
                         <a:cs typeface="Arial" charset="0"/>
@@ -2747,7 +2747,7 @@
                         <a:buNone/>
                       </a:pPr>
                       <a:r>
-                        <a:rPr lang="en-US" sz="1300" b="1" dirty="0">
+                        <a:rPr lang="en-US" sz="1200" b="1" dirty="0">
                           <a:solidFill>
                             <a:srgbClr val="FFFFFF"/>
                           </a:solidFill>
@@ -2757,7 +2757,7 @@
                         </a:rPr>
                         <a:t>60%</a:t>
                       </a:r>
-                      <a:endParaRPr lang="en-US" sz="1300" dirty="0">
+                      <a:endParaRPr lang="en-US" sz="1200" dirty="0">
                         <a:latin typeface="Arial" charset="0"/>
                         <a:ea typeface="Arial" charset="0"/>
                         <a:cs typeface="Arial" charset="0"/>
@@ -2815,7 +2815,7 @@
                         <a:buNone/>
                       </a:pPr>
                       <a:r>
-                        <a:rPr lang="en-US" sz="1300" b="1" dirty="0">
+                        <a:rPr lang="en-US" sz="1200" b="1" dirty="0">
                           <a:solidFill>
                             <a:srgbClr val="FFFFFF"/>
                           </a:solidFill>
@@ -2825,7 +2825,7 @@
                         </a:rPr>
                         <a:t>80%</a:t>
                       </a:r>
-                      <a:endParaRPr lang="en-US" sz="1300" dirty="0">
+                      <a:endParaRPr lang="en-US" sz="1200" dirty="0">
                         <a:latin typeface="Arial" charset="0"/>
                         <a:ea typeface="Arial" charset="0"/>
                         <a:cs typeface="Arial" charset="0"/>
@@ -2883,7 +2883,7 @@
                         <a:buNone/>
                       </a:pPr>
                       <a:r>
-                        <a:rPr lang="en-US" sz="1300" b="1" dirty="0">
+                        <a:rPr lang="en-US" sz="1200" b="1" dirty="0">
                           <a:solidFill>
                             <a:srgbClr val="FFFFFF"/>
                           </a:solidFill>
@@ -2893,7 +2893,7 @@
                         </a:rPr>
                         <a:t>100% (ceiling)</a:t>
                       </a:r>
-                      <a:endParaRPr lang="en-US" sz="1300" dirty="0">
+                      <a:endParaRPr lang="en-US" sz="1200" dirty="0">
                         <a:latin typeface="Arial" charset="0"/>
                         <a:ea typeface="Arial" charset="0"/>
                         <a:cs typeface="Arial" charset="0"/>
@@ -7625,7 +7625,7 @@
         <p:spPr>
           <a:xfrm>
             <a:off x="548640" y="1097280"/>
-            <a:ext cx="10881360" cy="365760"/>
+            <a:ext cx="10881360" cy="502920"/>
           </a:xfrm>
           <a:prstGeom prst="rect">
             <a:avLst/>
@@ -7709,8 +7709,8 @@
         </p:nvSpPr>
         <p:spPr>
           <a:xfrm>
-            <a:off x="1691640" y="2194560"/>
-            <a:ext cx="2286000" cy="365760"/>
+            <a:off x="1691640" y="2121408"/>
+            <a:ext cx="2286000" cy="566928"/>
           </a:xfrm>
           <a:prstGeom prst="rect">
             <a:avLst/>
@@ -7726,7 +7726,7 @@
               <a:buNone/>
             </a:pPr>
             <a:r>
-              <a:rPr lang="en-US" sz="1500" b="1" dirty="0">
+              <a:rPr lang="en-US" sz="1400" b="1" dirty="0">
                 <a:solidFill>
                   <a:srgbClr val="111111"/>
                 </a:solidFill>
@@ -7736,7 +7736,7 @@
               </a:rPr>
               <a:t>Lead sellers</a:t>
             </a:r>
-            <a:endParaRPr lang="en-US" sz="1500" dirty="0"/>
+            <a:endParaRPr lang="en-US" sz="1400" dirty="0"/>
           </a:p>
         </p:txBody>
       </p:sp>
@@ -7872,8 +7872,8 @@
         </p:nvSpPr>
         <p:spPr>
           <a:xfrm>
-            <a:off x="5486400" y="2194560"/>
-            <a:ext cx="2286000" cy="365760"/>
+            <a:off x="5486400" y="2121408"/>
+            <a:ext cx="2286000" cy="566928"/>
           </a:xfrm>
           <a:prstGeom prst="rect">
             <a:avLst/>
@@ -7889,7 +7889,7 @@
               <a:buNone/>
             </a:pPr>
             <a:r>
-              <a:rPr lang="en-US" sz="1500" b="1" dirty="0">
+              <a:rPr lang="en-US" sz="1400" b="1" dirty="0">
                 <a:solidFill>
                   <a:srgbClr val="111111"/>
                 </a:solidFill>
@@ -7899,7 +7899,7 @@
               </a:rPr>
               <a:t>Paid ads (Google / LSA)</a:t>
             </a:r>
-            <a:endParaRPr lang="en-US" sz="1500" dirty="0"/>
+            <a:endParaRPr lang="en-US" sz="1400" dirty="0"/>
           </a:p>
         </p:txBody>
       </p:sp>
@@ -8035,8 +8035,8 @@
         </p:nvSpPr>
         <p:spPr>
           <a:xfrm>
-            <a:off x="9281160" y="2194560"/>
-            <a:ext cx="2286000" cy="365760"/>
+            <a:off x="9281160" y="2121408"/>
+            <a:ext cx="2286000" cy="566928"/>
           </a:xfrm>
           <a:prstGeom prst="rect">
             <a:avLst/>
@@ -8052,7 +8052,7 @@
               <a:buNone/>
             </a:pPr>
             <a:r>
-              <a:rPr lang="en-US" sz="1500" b="1" dirty="0">
+              <a:rPr lang="en-US" sz="1400" b="1" dirty="0">
                 <a:solidFill>
                   <a:srgbClr val="FFFFFF"/>
                 </a:solidFill>
@@ -8062,7 +8062,7 @@
               </a:rPr>
               <a:t>This plan</a:t>
             </a:r>
-            <a:endParaRPr lang="en-US" sz="1500" dirty="0"/>
+            <a:endParaRPr lang="en-US" sz="1400" dirty="0"/>
           </a:p>
         </p:txBody>
       </p:sp>
@@ -8426,7 +8426,7 @@
         <p:spPr>
           <a:xfrm>
             <a:off x="978408" y="3383280"/>
-            <a:ext cx="2926080" cy="1280160"/>
+            <a:ext cx="2926080" cy="1298448"/>
           </a:xfrm>
           <a:prstGeom prst="rect">
             <a:avLst/>
@@ -8442,7 +8442,7 @@
               <a:buNone/>
             </a:pPr>
             <a:r>
-              <a:rPr lang="en-US" sz="1250" dirty="0">
+              <a:rPr lang="en-US" sz="1150" dirty="0">
                 <a:solidFill>
                   <a:srgbClr val="CFCFCF"/>
                 </a:solidFill>
@@ -8452,7 +8452,7 @@
               </a:rPr>
               <a:t>Close rate = funded jobs ÷ delivered leads. A delivered lead = homeowner + property accepted by a rep onto a route; raw map records don't count. A lead belongs to the quarter delivered (180-day window).</a:t>
             </a:r>
-            <a:endParaRPr lang="en-US" sz="1250" dirty="0"/>
+            <a:endParaRPr lang="en-US" sz="1150" dirty="0"/>
           </a:p>
         </p:txBody>
       </p:sp>
@@ -8589,7 +8589,7 @@
         <p:spPr>
           <a:xfrm>
             <a:off x="4727448" y="3383280"/>
-            <a:ext cx="2926080" cy="1280160"/>
+            <a:ext cx="2926080" cy="1298448"/>
           </a:xfrm>
           <a:prstGeom prst="rect">
             <a:avLst/>
@@ -8605,7 +8605,7 @@
               <a:buNone/>
             </a:pPr>
             <a:r>
-              <a:rPr lang="en-US" sz="1250" dirty="0">
+              <a:rPr lang="en-US" sz="1150" dirty="0">
                 <a:solidFill>
                   <a:srgbClr val="CFCFCF"/>
                 </a:solidFill>
@@ -8615,7 +8615,7 @@
               </a:rPr>
               <a:t>Option A (% of job profit, splits like a job cost) or Option B (% of RCV). One page, signed, with the slider table attached.</a:t>
             </a:r>
-            <a:endParaRPr lang="en-US" sz="1250" dirty="0"/>
+            <a:endParaRPr lang="en-US" sz="1150" dirty="0"/>
           </a:p>
         </p:txBody>
       </p:sp>
@@ -8752,7 +8752,7 @@
         <p:spPr>
           <a:xfrm>
             <a:off x="8476488" y="3383280"/>
-            <a:ext cx="2926080" cy="1280160"/>
+            <a:ext cx="2926080" cy="1298448"/>
           </a:xfrm>
           <a:prstGeom prst="rect">
             <a:avLst/>
@@ -8768,7 +8768,7 @@
               <a:buNone/>
             </a:pPr>
             <a:r>
-              <a:rPr lang="en-US" sz="1250" dirty="0">
+              <a:rPr lang="en-US" sz="1150" dirty="0">
                 <a:solidFill>
                   <a:srgbClr val="CFCFCF"/>
                 </a:solidFill>
@@ -8778,7 +8778,7 @@
               </a:rPr>
               <a:t>2% floor paid as jobs fund; each quarter-end re-rates every open cohort and pays the difference. Six-month check: if the numbers say adjust the curve, adjust it.</a:t>
             </a:r>
-            <a:endParaRPr lang="en-US" sz="1250" dirty="0"/>
+            <a:endParaRPr lang="en-US" sz="1150" dirty="0"/>
           </a:p>
         </p:txBody>
       </p:sp>
